--- a/Views/Presentation3.pptx
+++ b/Views/Presentation3.pptx
@@ -18,7 +18,7 @@
     <p:sldId id="296" r:id="rId9"/>
     <p:sldId id="297" r:id="rId10"/>
     <p:sldId id="298" r:id="rId11"/>
-    <p:sldId id="300" r:id="rId12"/>
+    <p:sldId id="301" r:id="rId12"/>
     <p:sldId id="271" r:id="rId13"/>
     <p:sldId id="272" r:id="rId14"/>
     <p:sldId id="277" r:id="rId15"/>
@@ -216,7 +216,7 @@
           <a:p>
             <a:fld id="{C6E8646E-8D3C-430C-BFA9-96BAF70313EA}" type="datetimeFigureOut">
               <a:rPr lang="fr-FR" smtClean="0"/>
-              <a:t>06/10/2025</a:t>
+              <a:t>31/10/2025</a:t>
             </a:fld>
             <a:endParaRPr lang="fr-FR"/>
           </a:p>
@@ -512,6 +512,13 @@
           </p:nvPr>
         </p:nvSpPr>
         <p:spPr/>
+        <p:txBody>
+          <a:bodyPr/>
+          <a:lstStyle/>
+          <a:p>
+            <a:endParaRPr lang="fr-FR"/>
+          </a:p>
+        </p:txBody>
       </p:sp>
       <p:sp>
         <p:nvSpPr>
@@ -596,6 +603,13 @@
           </p:nvPr>
         </p:nvSpPr>
         <p:spPr/>
+        <p:txBody>
+          <a:bodyPr/>
+          <a:lstStyle/>
+          <a:p>
+            <a:endParaRPr lang="fr-FR"/>
+          </a:p>
+        </p:txBody>
       </p:sp>
       <p:sp>
         <p:nvSpPr>
@@ -725,6 +739,13 @@
             <a:schemeClr val="lt1"/>
           </a:fontRef>
         </p:style>
+        <p:txBody>
+          <a:bodyPr/>
+          <a:lstStyle/>
+          <a:p>
+            <a:endParaRPr lang="fr-FR"/>
+          </a:p>
+        </p:txBody>
       </p:sp>
       <p:sp>
         <p:nvSpPr>
@@ -763,6 +784,13 @@
             <a:schemeClr val="lt1"/>
           </a:fontRef>
         </p:style>
+        <p:txBody>
+          <a:bodyPr/>
+          <a:lstStyle/>
+          <a:p>
+            <a:endParaRPr lang="fr-FR"/>
+          </a:p>
+        </p:txBody>
       </p:sp>
       <p:sp>
         <p:nvSpPr>
@@ -897,7 +925,7 @@
           <a:p>
             <a:fld id="{1C7C724F-4508-4890-B18E-3F5BB1B02F24}" type="datetimeFigureOut">
               <a:rPr lang="fr-FR" smtClean="0"/>
-              <a:t>06/10/2025</a:t>
+              <a:t>31/10/2025</a:t>
             </a:fld>
             <a:endParaRPr lang="fr-FR"/>
           </a:p>
@@ -1105,7 +1133,7 @@
           <a:p>
             <a:fld id="{1C7C724F-4508-4890-B18E-3F5BB1B02F24}" type="datetimeFigureOut">
               <a:rPr lang="fr-FR" smtClean="0"/>
-              <a:t>06/10/2025</a:t>
+              <a:t>31/10/2025</a:t>
             </a:fld>
             <a:endParaRPr lang="fr-FR"/>
           </a:p>
@@ -1220,6 +1248,13 @@
             <a:schemeClr val="lt1"/>
           </a:fontRef>
         </p:style>
+        <p:txBody>
+          <a:bodyPr/>
+          <a:lstStyle/>
+          <a:p>
+            <a:endParaRPr lang="fr-FR"/>
+          </a:p>
+        </p:txBody>
       </p:sp>
       <p:sp>
         <p:nvSpPr>
@@ -1258,6 +1293,13 @@
             <a:schemeClr val="lt1"/>
           </a:fontRef>
         </p:style>
+        <p:txBody>
+          <a:bodyPr/>
+          <a:lstStyle/>
+          <a:p>
+            <a:endParaRPr lang="fr-FR"/>
+          </a:p>
+        </p:txBody>
       </p:sp>
       <p:sp>
         <p:nvSpPr>
@@ -1361,7 +1403,7 @@
           <a:p>
             <a:fld id="{1C7C724F-4508-4890-B18E-3F5BB1B02F24}" type="datetimeFigureOut">
               <a:rPr lang="fr-FR" smtClean="0"/>
-              <a:t>06/10/2025</a:t>
+              <a:t>31/10/2025</a:t>
             </a:fld>
             <a:endParaRPr lang="fr-FR"/>
           </a:p>
@@ -1531,7 +1573,7 @@
           <a:p>
             <a:fld id="{1C7C724F-4508-4890-B18E-3F5BB1B02F24}" type="datetimeFigureOut">
               <a:rPr lang="fr-FR" smtClean="0"/>
-              <a:t>06/10/2025</a:t>
+              <a:t>31/10/2025</a:t>
             </a:fld>
             <a:endParaRPr lang="fr-FR"/>
           </a:p>
@@ -1646,6 +1688,13 @@
             <a:schemeClr val="lt1"/>
           </a:fontRef>
         </p:style>
+        <p:txBody>
+          <a:bodyPr/>
+          <a:lstStyle/>
+          <a:p>
+            <a:endParaRPr lang="fr-FR"/>
+          </a:p>
+        </p:txBody>
       </p:sp>
       <p:sp>
         <p:nvSpPr>
@@ -1684,6 +1733,13 @@
             <a:schemeClr val="lt1"/>
           </a:fontRef>
         </p:style>
+        <p:txBody>
+          <a:bodyPr/>
+          <a:lstStyle/>
+          <a:p>
+            <a:endParaRPr lang="fr-FR"/>
+          </a:p>
+        </p:txBody>
       </p:sp>
       <p:sp>
         <p:nvSpPr>
@@ -1866,7 +1922,7 @@
           <a:p>
             <a:fld id="{1C7C724F-4508-4890-B18E-3F5BB1B02F24}" type="datetimeFigureOut">
               <a:rPr lang="fr-FR" smtClean="0"/>
-              <a:t>06/10/2025</a:t>
+              <a:t>31/10/2025</a:t>
             </a:fld>
             <a:endParaRPr lang="fr-FR"/>
           </a:p>
@@ -2141,7 +2197,7 @@
           <a:p>
             <a:fld id="{1C7C724F-4508-4890-B18E-3F5BB1B02F24}" type="datetimeFigureOut">
               <a:rPr lang="fr-FR" smtClean="0"/>
-              <a:t>06/10/2025</a:t>
+              <a:t>31/10/2025</a:t>
             </a:fld>
             <a:endParaRPr lang="fr-FR"/>
           </a:p>
@@ -2520,7 +2576,7 @@
           <a:p>
             <a:fld id="{1C7C724F-4508-4890-B18E-3F5BB1B02F24}" type="datetimeFigureOut">
               <a:rPr lang="fr-FR" smtClean="0"/>
-              <a:t>06/10/2025</a:t>
+              <a:t>31/10/2025</a:t>
             </a:fld>
             <a:endParaRPr lang="fr-FR"/>
           </a:p>
@@ -2638,7 +2694,7 @@
           <a:p>
             <a:fld id="{1C7C724F-4508-4890-B18E-3F5BB1B02F24}" type="datetimeFigureOut">
               <a:rPr lang="fr-FR" smtClean="0"/>
-              <a:t>06/10/2025</a:t>
+              <a:t>31/10/2025</a:t>
             </a:fld>
             <a:endParaRPr lang="fr-FR"/>
           </a:p>
@@ -2753,6 +2809,13 @@
             <a:schemeClr val="lt1"/>
           </a:fontRef>
         </p:style>
+        <p:txBody>
+          <a:bodyPr/>
+          <a:lstStyle/>
+          <a:p>
+            <a:endParaRPr lang="fr-FR"/>
+          </a:p>
+        </p:txBody>
       </p:sp>
       <p:sp>
         <p:nvSpPr>
@@ -2791,6 +2854,13 @@
             <a:schemeClr val="lt1"/>
           </a:fontRef>
         </p:style>
+        <p:txBody>
+          <a:bodyPr/>
+          <a:lstStyle/>
+          <a:p>
+            <a:endParaRPr lang="fr-FR"/>
+          </a:p>
+        </p:txBody>
       </p:sp>
       <p:sp>
         <p:nvSpPr>
@@ -2809,7 +2879,7 @@
           <a:p>
             <a:fld id="{1C7C724F-4508-4890-B18E-3F5BB1B02F24}" type="datetimeFigureOut">
               <a:rPr lang="fr-FR" smtClean="0"/>
-              <a:t>06/10/2025</a:t>
+              <a:t>31/10/2025</a:t>
             </a:fld>
             <a:endParaRPr lang="fr-FR"/>
           </a:p>
@@ -2932,6 +3002,13 @@
             <a:schemeClr val="lt1"/>
           </a:fontRef>
         </p:style>
+        <p:txBody>
+          <a:bodyPr/>
+          <a:lstStyle/>
+          <a:p>
+            <a:endParaRPr lang="fr-FR"/>
+          </a:p>
+        </p:txBody>
       </p:sp>
       <p:sp>
         <p:nvSpPr>
@@ -2970,6 +3047,13 @@
             <a:schemeClr val="lt1"/>
           </a:fontRef>
         </p:style>
+        <p:txBody>
+          <a:bodyPr/>
+          <a:lstStyle/>
+          <a:p>
+            <a:endParaRPr lang="fr-FR"/>
+          </a:p>
+        </p:txBody>
       </p:sp>
       <p:sp>
         <p:nvSpPr>
@@ -3163,7 +3247,7 @@
           <a:p>
             <a:fld id="{1C7C724F-4508-4890-B18E-3F5BB1B02F24}" type="datetimeFigureOut">
               <a:rPr lang="fr-FR" smtClean="0"/>
-              <a:t>06/10/2025</a:t>
+              <a:t>31/10/2025</a:t>
             </a:fld>
             <a:endParaRPr lang="fr-FR"/>
           </a:p>
@@ -3299,6 +3383,13 @@
             <a:schemeClr val="lt1"/>
           </a:fontRef>
         </p:style>
+        <p:txBody>
+          <a:bodyPr/>
+          <a:lstStyle/>
+          <a:p>
+            <a:endParaRPr lang="fr-FR"/>
+          </a:p>
+        </p:txBody>
       </p:sp>
       <p:sp>
         <p:nvSpPr>
@@ -3337,6 +3428,13 @@
             <a:schemeClr val="lt1"/>
           </a:fontRef>
         </p:style>
+        <p:txBody>
+          <a:bodyPr/>
+          <a:lstStyle/>
+          <a:p>
+            <a:endParaRPr lang="fr-FR"/>
+          </a:p>
+        </p:txBody>
       </p:sp>
       <p:sp>
         <p:nvSpPr>
@@ -3545,7 +3643,7 @@
           <a:p>
             <a:fld id="{1C7C724F-4508-4890-B18E-3F5BB1B02F24}" type="datetimeFigureOut">
               <a:rPr lang="fr-FR" smtClean="0"/>
-              <a:t>06/10/2025</a:t>
+              <a:t>31/10/2025</a:t>
             </a:fld>
             <a:endParaRPr lang="fr-FR"/>
           </a:p>
@@ -3665,6 +3763,13 @@
             <a:schemeClr val="lt1"/>
           </a:fontRef>
         </p:style>
+        <p:txBody>
+          <a:bodyPr/>
+          <a:lstStyle/>
+          <a:p>
+            <a:endParaRPr lang="fr-FR"/>
+          </a:p>
+        </p:txBody>
       </p:sp>
       <p:sp>
         <p:nvSpPr>
@@ -3703,6 +3808,13 @@
             <a:schemeClr val="lt1"/>
           </a:fontRef>
         </p:style>
+        <p:txBody>
+          <a:bodyPr/>
+          <a:lstStyle/>
+          <a:p>
+            <a:endParaRPr lang="fr-FR"/>
+          </a:p>
+        </p:txBody>
       </p:sp>
       <p:sp>
         <p:nvSpPr>
@@ -3832,7 +3944,7 @@
           <a:p>
             <a:fld id="{1C7C724F-4508-4890-B18E-3F5BB1B02F24}" type="datetimeFigureOut">
               <a:rPr lang="fr-FR" smtClean="0"/>
-              <a:t>06/10/2025</a:t>
+              <a:t>31/10/2025</a:t>
             </a:fld>
             <a:endParaRPr lang="fr-FR"/>
           </a:p>
@@ -4575,6 +4687,136 @@
           <a:chExt cx="0" cy="0"/>
         </a:xfrm>
       </p:grpSpPr>
+      <p:cxnSp>
+        <p:nvCxnSpPr>
+          <p:cNvPr id="93" name="Straight Connector 92">
+            <a:extLst>
+              <a:ext uri="{FF2B5EF4-FFF2-40B4-BE49-F238E27FC236}">
+                <a16:creationId xmlns:a16="http://schemas.microsoft.com/office/drawing/2014/main" id="{A8D5A20B-B049-2879-C37F-CAC15A6A672B}"/>
+              </a:ext>
+            </a:extLst>
+          </p:cNvPr>
+          <p:cNvCxnSpPr>
+            <a:cxnSpLocks/>
+          </p:cNvCxnSpPr>
+          <p:nvPr/>
+        </p:nvCxnSpPr>
+        <p:spPr>
+          <a:xfrm>
+            <a:off x="5398701" y="2432915"/>
+            <a:ext cx="1" cy="357860"/>
+          </a:xfrm>
+          <a:prstGeom prst="line">
+            <a:avLst/>
+          </a:prstGeom>
+          <a:ln>
+            <a:solidFill>
+              <a:srgbClr val="00B050"/>
+            </a:solidFill>
+          </a:ln>
+        </p:spPr>
+        <p:style>
+          <a:lnRef idx="1">
+            <a:schemeClr val="accent1"/>
+          </a:lnRef>
+          <a:fillRef idx="0">
+            <a:schemeClr val="accent1"/>
+          </a:fillRef>
+          <a:effectRef idx="0">
+            <a:schemeClr val="accent1"/>
+          </a:effectRef>
+          <a:fontRef idx="minor">
+            <a:schemeClr val="tx1"/>
+          </a:fontRef>
+        </p:style>
+      </p:cxnSp>
+      <p:cxnSp>
+        <p:nvCxnSpPr>
+          <p:cNvPr id="106" name="Straight Connector 105">
+            <a:extLst>
+              <a:ext uri="{FF2B5EF4-FFF2-40B4-BE49-F238E27FC236}">
+                <a16:creationId xmlns:a16="http://schemas.microsoft.com/office/drawing/2014/main" id="{B119D559-C6E2-BA2F-449E-816D84158164}"/>
+              </a:ext>
+            </a:extLst>
+          </p:cNvPr>
+          <p:cNvCxnSpPr>
+            <a:cxnSpLocks/>
+          </p:cNvCxnSpPr>
+          <p:nvPr/>
+        </p:nvCxnSpPr>
+        <p:spPr>
+          <a:xfrm>
+            <a:off x="5147721" y="2427245"/>
+            <a:ext cx="3154" cy="484102"/>
+          </a:xfrm>
+          <a:prstGeom prst="line">
+            <a:avLst/>
+          </a:prstGeom>
+          <a:ln>
+            <a:solidFill>
+              <a:schemeClr val="tx1"/>
+            </a:solidFill>
+          </a:ln>
+        </p:spPr>
+        <p:style>
+          <a:lnRef idx="1">
+            <a:schemeClr val="accent1"/>
+          </a:lnRef>
+          <a:fillRef idx="0">
+            <a:schemeClr val="accent1"/>
+          </a:fillRef>
+          <a:effectRef idx="0">
+            <a:schemeClr val="accent1"/>
+          </a:effectRef>
+          <a:fontRef idx="minor">
+            <a:schemeClr val="tx1"/>
+          </a:fontRef>
+        </p:style>
+      </p:cxnSp>
+      <p:sp>
+        <p:nvSpPr>
+          <p:cNvPr id="15" name="Rectangle 14">
+            <a:extLst>
+              <a:ext uri="{FF2B5EF4-FFF2-40B4-BE49-F238E27FC236}">
+                <a16:creationId xmlns:a16="http://schemas.microsoft.com/office/drawing/2014/main" id="{1F498DA7-3338-5409-5681-101EDFAF0052}"/>
+              </a:ext>
+            </a:extLst>
+          </p:cNvPr>
+          <p:cNvSpPr/>
+          <p:nvPr/>
+        </p:nvSpPr>
+        <p:spPr>
+          <a:xfrm>
+            <a:off x="5060930" y="1617120"/>
+            <a:ext cx="2287034" cy="819519"/>
+          </a:xfrm>
+          <a:prstGeom prst="rect">
+            <a:avLst/>
+          </a:prstGeom>
+        </p:spPr>
+        <p:style>
+          <a:lnRef idx="2">
+            <a:schemeClr val="dk1"/>
+          </a:lnRef>
+          <a:fillRef idx="1">
+            <a:schemeClr val="lt1"/>
+          </a:fillRef>
+          <a:effectRef idx="0">
+            <a:schemeClr val="dk1"/>
+          </a:effectRef>
+          <a:fontRef idx="minor">
+            <a:schemeClr val="dk1"/>
+          </a:fontRef>
+        </p:style>
+        <p:txBody>
+          <a:bodyPr rtlCol="0" anchor="ctr"/>
+          <a:lstStyle/>
+          <a:p>
+            <a:pPr algn="ctr"/>
+            <a:endParaRPr lang="fr-FR"/>
+          </a:p>
+        </p:txBody>
+      </p:sp>
       <p:sp>
         <p:nvSpPr>
           <p:cNvPr id="5" name="Date Placeholder 1">
@@ -4941,173 +5183,6 @@
       </p:sp>
       <p:sp>
         <p:nvSpPr>
-          <p:cNvPr id="12" name="TextBox 11">
-            <a:extLst>
-              <a:ext uri="{FF2B5EF4-FFF2-40B4-BE49-F238E27FC236}">
-                <a16:creationId xmlns:a16="http://schemas.microsoft.com/office/drawing/2014/main" id="{9116E47E-10D0-EAA6-08EB-4DB3E60BB44C}"/>
-              </a:ext>
-            </a:extLst>
-          </p:cNvPr>
-          <p:cNvSpPr txBox="1"/>
-          <p:nvPr/>
-        </p:nvSpPr>
-        <p:spPr>
-          <a:xfrm>
-            <a:off x="452411" y="1241427"/>
-            <a:ext cx="3030260" cy="4801314"/>
-          </a:xfrm>
-          <a:prstGeom prst="rect">
-            <a:avLst/>
-          </a:prstGeom>
-          <a:ln w="38100"/>
-        </p:spPr>
-        <p:style>
-          <a:lnRef idx="2">
-            <a:schemeClr val="accent6"/>
-          </a:lnRef>
-          <a:fillRef idx="1">
-            <a:schemeClr val="lt1"/>
-          </a:fillRef>
-          <a:effectRef idx="0">
-            <a:schemeClr val="accent6"/>
-          </a:effectRef>
-          <a:fontRef idx="minor">
-            <a:schemeClr val="dk1"/>
-          </a:fontRef>
-        </p:style>
-        <p:txBody>
-          <a:bodyPr wrap="square" rtlCol="0">
-            <a:spAutoFit/>
-          </a:bodyPr>
-          <a:lstStyle/>
-          <a:p>
-            <a:r>
-              <a:rPr lang="fr-FR" b="1" dirty="0"/>
-              <a:t>Matériel :</a:t>
-            </a:r>
-          </a:p>
-          <a:p>
-            <a:endParaRPr lang="fr-FR" b="1" dirty="0"/>
-          </a:p>
-          <a:p>
-            <a:pPr marL="285750" indent="-285750">
-              <a:buFont typeface="Arial" panose="020B0604020202020204" pitchFamily="34" charset="0"/>
-              <a:buChar char="•"/>
-            </a:pPr>
-            <a:r>
-              <a:rPr lang="fr-FR" u="sng" dirty="0"/>
-              <a:t>Déjà possédé :</a:t>
-            </a:r>
-          </a:p>
-          <a:p>
-            <a:endParaRPr lang="fr-FR" u="sng" dirty="0"/>
-          </a:p>
-          <a:p>
-            <a:pPr marL="742950" lvl="1" indent="-285750">
-              <a:buFont typeface="Arial" panose="020B0604020202020204" pitchFamily="34" charset="0"/>
-              <a:buChar char="•"/>
-            </a:pPr>
-            <a:r>
-              <a:rPr lang="fr-FR" dirty="0"/>
-              <a:t>Corde Métallique</a:t>
-            </a:r>
-          </a:p>
-          <a:p>
-            <a:pPr marL="742950" lvl="1" indent="-285750">
-              <a:buFont typeface="Arial" panose="020B0604020202020204" pitchFamily="34" charset="0"/>
-              <a:buChar char="•"/>
-            </a:pPr>
-            <a:r>
-              <a:rPr lang="fr-FR" dirty="0"/>
-              <a:t>Mécaniques</a:t>
-            </a:r>
-          </a:p>
-          <a:p>
-            <a:pPr marL="742950" lvl="1" indent="-285750">
-              <a:buFont typeface="Arial" panose="020B0604020202020204" pitchFamily="34" charset="0"/>
-              <a:buChar char="•"/>
-            </a:pPr>
-            <a:r>
-              <a:rPr lang="fr-FR" dirty="0"/>
-              <a:t>Micros (Simple &amp; Double)</a:t>
-            </a:r>
-          </a:p>
-          <a:p>
-            <a:pPr marL="742950" lvl="1" indent="-285750">
-              <a:buFont typeface="Arial" panose="020B0604020202020204" pitchFamily="34" charset="0"/>
-              <a:buChar char="•"/>
-            </a:pPr>
-            <a:r>
-              <a:rPr lang="fr-FR" dirty="0"/>
-              <a:t>Ordinateur Portable</a:t>
-            </a:r>
-          </a:p>
-          <a:p>
-            <a:r>
-              <a:rPr lang="fr-FR" b="1" dirty="0"/>
-              <a:t> </a:t>
-            </a:r>
-          </a:p>
-          <a:p>
-            <a:endParaRPr lang="fr-FR" b="1" dirty="0"/>
-          </a:p>
-          <a:p>
-            <a:pPr marL="285750" indent="-285750">
-              <a:buFont typeface="Arial" panose="020B0604020202020204" pitchFamily="34" charset="0"/>
-              <a:buChar char="•"/>
-            </a:pPr>
-            <a:r>
-              <a:rPr lang="fr-FR" u="sng" dirty="0"/>
-              <a:t>Reste à trouver :</a:t>
-            </a:r>
-          </a:p>
-          <a:p>
-            <a:endParaRPr lang="fr-FR" u="sng" dirty="0"/>
-          </a:p>
-          <a:p>
-            <a:pPr marL="742950" lvl="1" indent="-285750">
-              <a:buFont typeface="Arial" panose="020B0604020202020204" pitchFamily="34" charset="0"/>
-              <a:buChar char="•"/>
-            </a:pPr>
-            <a:r>
-              <a:rPr lang="fr-FR" dirty="0"/>
-              <a:t>Système d’excitation</a:t>
-            </a:r>
-          </a:p>
-          <a:p>
-            <a:pPr marL="742950" lvl="1" indent="-285750">
-              <a:buFont typeface="Arial" panose="020B0604020202020204" pitchFamily="34" charset="0"/>
-              <a:buChar char="•"/>
-            </a:pPr>
-            <a:r>
-              <a:rPr lang="fr-FR" dirty="0"/>
-              <a:t>Solénoïde</a:t>
-            </a:r>
-          </a:p>
-          <a:p>
-            <a:pPr marL="742950" lvl="1" indent="-285750">
-              <a:buFont typeface="Arial" panose="020B0604020202020204" pitchFamily="34" charset="0"/>
-              <a:buChar char="•"/>
-            </a:pPr>
-            <a:r>
-              <a:rPr lang="fr-FR" dirty="0"/>
-              <a:t>Carte d’acquisition</a:t>
-            </a:r>
-          </a:p>
-          <a:p>
-            <a:pPr marL="742950" lvl="1" indent="-285750">
-              <a:buFont typeface="Arial" panose="020B0604020202020204" pitchFamily="34" charset="0"/>
-              <a:buChar char="•"/>
-            </a:pPr>
-            <a:r>
-              <a:rPr lang="fr-FR" dirty="0"/>
-              <a:t>Oscilloscope</a:t>
-            </a:r>
-          </a:p>
-        </p:txBody>
-      </p:sp>
-      <p:sp>
-        <p:nvSpPr>
           <p:cNvPr id="3" name="TextBox 2">
             <a:extLst>
               <a:ext uri="{FF2B5EF4-FFF2-40B4-BE49-F238E27FC236}">
@@ -5120,8 +5195,8 @@
         </p:nvSpPr>
         <p:spPr>
           <a:xfrm>
-            <a:off x="3759200" y="4565413"/>
-            <a:ext cx="5064543" cy="1477328"/>
+            <a:off x="345440" y="4565413"/>
+            <a:ext cx="8478303" cy="1477328"/>
           </a:xfrm>
           <a:prstGeom prst="rect">
             <a:avLst/>
@@ -5147,7 +5222,7 @@
           </a:fontRef>
         </p:style>
         <p:txBody>
-          <a:bodyPr wrap="square" numCol="1" rtlCol="0">
+          <a:bodyPr wrap="square" numCol="3" rtlCol="0">
             <a:spAutoFit/>
           </a:bodyPr>
           <a:lstStyle/>
@@ -5177,12 +5252,57 @@
               <a:buFont typeface="Wingdings" panose="05000000000000000000" pitchFamily="2" charset="2"/>
               <a:buChar char="à"/>
             </a:pPr>
+            <a:endParaRPr lang="fr-FR" dirty="0">
+              <a:sym typeface="Wingdings" panose="05000000000000000000" pitchFamily="2" charset="2"/>
+            </a:endParaRPr>
+          </a:p>
+          <a:p>
+            <a:endParaRPr lang="fr-FR" dirty="0">
+              <a:sym typeface="Wingdings" panose="05000000000000000000" pitchFamily="2" charset="2"/>
+            </a:endParaRPr>
+          </a:p>
+          <a:p>
+            <a:endParaRPr lang="fr-FR" dirty="0">
+              <a:sym typeface="Wingdings" panose="05000000000000000000" pitchFamily="2" charset="2"/>
+            </a:endParaRPr>
+          </a:p>
+          <a:p>
+            <a:endParaRPr lang="fr-FR" dirty="0">
+              <a:sym typeface="Wingdings" panose="05000000000000000000" pitchFamily="2" charset="2"/>
+            </a:endParaRPr>
+          </a:p>
+          <a:p>
+            <a:pPr marL="285750" indent="-285750">
+              <a:buFont typeface="Wingdings" panose="05000000000000000000" pitchFamily="2" charset="2"/>
+              <a:buChar char="à"/>
+            </a:pPr>
             <a:r>
               <a:rPr lang="fr-FR" dirty="0">
                 <a:sym typeface="Wingdings" panose="05000000000000000000" pitchFamily="2" charset="2"/>
               </a:rPr>
               <a:t>Intensité &amp; Fréquence du champ parasite</a:t>
             </a:r>
+          </a:p>
+          <a:p>
+            <a:pPr marL="285750" indent="-285750">
+              <a:buFont typeface="Wingdings" panose="05000000000000000000" pitchFamily="2" charset="2"/>
+              <a:buChar char="à"/>
+            </a:pPr>
+            <a:endParaRPr lang="fr-FR" dirty="0"/>
+          </a:p>
+          <a:p>
+            <a:pPr marL="285750" indent="-285750">
+              <a:buFont typeface="Wingdings" panose="05000000000000000000" pitchFamily="2" charset="2"/>
+              <a:buChar char="à"/>
+            </a:pPr>
+            <a:endParaRPr lang="fr-FR" dirty="0"/>
+          </a:p>
+          <a:p>
+            <a:pPr marL="285750" indent="-285750">
+              <a:buFont typeface="Wingdings" panose="05000000000000000000" pitchFamily="2" charset="2"/>
+              <a:buChar char="à"/>
+            </a:pPr>
+            <a:endParaRPr lang="fr-FR" dirty="0"/>
           </a:p>
           <a:p>
             <a:pPr marL="285750" indent="-285750">
@@ -5218,14 +5338,13 @@
               </a:ext>
             </a:extLst>
           </a:blip>
-          <a:stretch>
-            <a:fillRect/>
-          </a:stretch>
+          <a:srcRect/>
+          <a:stretch/>
         </p:blipFill>
         <p:spPr>
-          <a:xfrm>
-            <a:off x="3567421" y="2951290"/>
-            <a:ext cx="5628641" cy="816991"/>
+          <a:xfrm rot="16140000">
+            <a:off x="4210262" y="693933"/>
+            <a:ext cx="723475" cy="6262094"/>
           </a:xfrm>
           <a:prstGeom prst="rect">
             <a:avLst/>
@@ -5248,8 +5367,8 @@
         </p:nvCxnSpPr>
         <p:spPr>
           <a:xfrm>
-            <a:off x="7684805" y="2502535"/>
-            <a:ext cx="0" cy="614045"/>
+            <a:off x="6190251" y="2858141"/>
+            <a:ext cx="0" cy="685117"/>
           </a:xfrm>
           <a:prstGeom prst="line">
             <a:avLst/>
@@ -5277,50 +5396,6 @@
       </p:cxnSp>
       <p:sp>
         <p:nvSpPr>
-          <p:cNvPr id="15" name="Rectangle 14">
-            <a:extLst>
-              <a:ext uri="{FF2B5EF4-FFF2-40B4-BE49-F238E27FC236}">
-                <a16:creationId xmlns:a16="http://schemas.microsoft.com/office/drawing/2014/main" id="{1F498DA7-3338-5409-5681-101EDFAF0052}"/>
-              </a:ext>
-            </a:extLst>
-          </p:cNvPr>
-          <p:cNvSpPr/>
-          <p:nvPr/>
-        </p:nvSpPr>
-        <p:spPr>
-          <a:xfrm>
-            <a:off x="6775443" y="1390254"/>
-            <a:ext cx="1841586" cy="734504"/>
-          </a:xfrm>
-          <a:prstGeom prst="rect">
-            <a:avLst/>
-          </a:prstGeom>
-        </p:spPr>
-        <p:style>
-          <a:lnRef idx="2">
-            <a:schemeClr val="dk1"/>
-          </a:lnRef>
-          <a:fillRef idx="1">
-            <a:schemeClr val="lt1"/>
-          </a:fillRef>
-          <a:effectRef idx="0">
-            <a:schemeClr val="dk1"/>
-          </a:effectRef>
-          <a:fontRef idx="minor">
-            <a:schemeClr val="dk1"/>
-          </a:fontRef>
-        </p:style>
-        <p:txBody>
-          <a:bodyPr rtlCol="0" anchor="ctr"/>
-          <a:lstStyle/>
-          <a:p>
-            <a:pPr algn="ctr"/>
-            <a:endParaRPr lang="fr-FR"/>
-          </a:p>
-        </p:txBody>
-      </p:sp>
-      <p:sp>
-        <p:nvSpPr>
           <p:cNvPr id="17" name="Freeform: Shape 16">
             <a:extLst>
               <a:ext uri="{FF2B5EF4-FFF2-40B4-BE49-F238E27FC236}">
@@ -5333,8 +5408,8 @@
         </p:nvSpPr>
         <p:spPr>
           <a:xfrm>
-            <a:off x="6775443" y="1534517"/>
-            <a:ext cx="1841585" cy="477163"/>
+            <a:off x="5060930" y="1778081"/>
+            <a:ext cx="2287034" cy="532392"/>
           </a:xfrm>
           <a:custGeom>
             <a:avLst/>
@@ -5519,8 +5594,8 @@
         </p:blipFill>
         <p:spPr>
           <a:xfrm>
-            <a:off x="4214657" y="1305513"/>
-            <a:ext cx="914400" cy="914400"/>
+            <a:off x="1880735" y="1522571"/>
+            <a:ext cx="1135578" cy="1020236"/>
           </a:xfrm>
           <a:prstGeom prst="rect">
             <a:avLst/>
@@ -5543,8 +5618,8 @@
         </p:nvCxnSpPr>
         <p:spPr>
           <a:xfrm>
-            <a:off x="7752080" y="2551734"/>
-            <a:ext cx="0" cy="564846"/>
+            <a:off x="6273799" y="2913035"/>
+            <a:ext cx="0" cy="630224"/>
           </a:xfrm>
           <a:prstGeom prst="line">
             <a:avLst/>
@@ -5584,8 +5659,8 @@
         </p:nvSpPr>
         <p:spPr>
           <a:xfrm>
-            <a:off x="5425440" y="1757506"/>
-            <a:ext cx="264160" cy="264539"/>
+            <a:off x="3384385" y="2026879"/>
+            <a:ext cx="328056" cy="295158"/>
           </a:xfrm>
           <a:prstGeom prst="rect">
             <a:avLst/>
@@ -5632,8 +5707,8 @@
         </p:nvCxnSpPr>
         <p:spPr>
           <a:xfrm flipV="1">
-            <a:off x="5689600" y="1889775"/>
-            <a:ext cx="436880" cy="1"/>
+            <a:off x="3712441" y="2174458"/>
+            <a:ext cx="542554" cy="1"/>
           </a:xfrm>
           <a:prstGeom prst="line">
             <a:avLst/>
@@ -5675,8 +5750,8 @@
         </p:nvCxnSpPr>
         <p:spPr>
           <a:xfrm>
-            <a:off x="6126480" y="1889775"/>
-            <a:ext cx="0" cy="599425"/>
+            <a:off x="4254995" y="2174458"/>
+            <a:ext cx="0" cy="668805"/>
           </a:xfrm>
           <a:prstGeom prst="line">
             <a:avLst/>
@@ -5718,8 +5793,8 @@
         </p:nvCxnSpPr>
         <p:spPr>
           <a:xfrm>
-            <a:off x="6126480" y="2489200"/>
-            <a:ext cx="1558325" cy="20566"/>
+            <a:off x="4254995" y="2843263"/>
+            <a:ext cx="1935257" cy="22946"/>
           </a:xfrm>
           <a:prstGeom prst="line">
             <a:avLst/>
@@ -5761,8 +5836,8 @@
         </p:nvCxnSpPr>
         <p:spPr>
           <a:xfrm>
-            <a:off x="6914561" y="2124758"/>
-            <a:ext cx="0" cy="374725"/>
+            <a:off x="5233699" y="2436639"/>
+            <a:ext cx="0" cy="418097"/>
           </a:xfrm>
           <a:prstGeom prst="line">
             <a:avLst/>
@@ -5804,8 +5879,8 @@
         </p:nvCxnSpPr>
         <p:spPr>
           <a:xfrm>
-            <a:off x="5689600" y="1836896"/>
-            <a:ext cx="511844" cy="0"/>
+            <a:off x="3712441" y="2115458"/>
+            <a:ext cx="635650" cy="0"/>
           </a:xfrm>
           <a:prstGeom prst="line">
             <a:avLst/>
@@ -5847,8 +5922,8 @@
         </p:nvCxnSpPr>
         <p:spPr>
           <a:xfrm>
-            <a:off x="7885465" y="2452537"/>
-            <a:ext cx="0" cy="671274"/>
+            <a:off x="6439448" y="2802356"/>
+            <a:ext cx="0" cy="748970"/>
           </a:xfrm>
           <a:prstGeom prst="line">
             <a:avLst/>
@@ -5890,8 +5965,8 @@
         </p:nvCxnSpPr>
         <p:spPr>
           <a:xfrm>
-            <a:off x="6201445" y="1836896"/>
-            <a:ext cx="0" cy="594884"/>
+            <a:off x="4348092" y="2115458"/>
+            <a:ext cx="0" cy="663738"/>
           </a:xfrm>
           <a:prstGeom prst="line">
             <a:avLst/>
@@ -5933,51 +6008,8 @@
         </p:nvCxnSpPr>
         <p:spPr>
           <a:xfrm>
-            <a:off x="6201444" y="2431780"/>
-            <a:ext cx="1691964" cy="20757"/>
-          </a:xfrm>
-          <a:prstGeom prst="line">
-            <a:avLst/>
-          </a:prstGeom>
-          <a:ln>
-            <a:solidFill>
-              <a:srgbClr val="00B050"/>
-            </a:solidFill>
-          </a:ln>
-        </p:spPr>
-        <p:style>
-          <a:lnRef idx="1">
-            <a:schemeClr val="accent1"/>
-          </a:lnRef>
-          <a:fillRef idx="0">
-            <a:schemeClr val="accent1"/>
-          </a:fillRef>
-          <a:effectRef idx="0">
-            <a:schemeClr val="accent1"/>
-          </a:effectRef>
-          <a:fontRef idx="minor">
-            <a:schemeClr val="tx1"/>
-          </a:fontRef>
-        </p:style>
-      </p:cxnSp>
-      <p:cxnSp>
-        <p:nvCxnSpPr>
-          <p:cNvPr id="93" name="Straight Connector 92">
-            <a:extLst>
-              <a:ext uri="{FF2B5EF4-FFF2-40B4-BE49-F238E27FC236}">
-                <a16:creationId xmlns:a16="http://schemas.microsoft.com/office/drawing/2014/main" id="{A8D5A20B-B049-2879-C37F-CAC15A6A672B}"/>
-              </a:ext>
-            </a:extLst>
-          </p:cNvPr>
-          <p:cNvCxnSpPr>
-            <a:cxnSpLocks/>
-          </p:cNvCxnSpPr>
-          <p:nvPr/>
-        </p:nvCxnSpPr>
-        <p:spPr>
-          <a:xfrm>
-            <a:off x="7044136" y="2134338"/>
-            <a:ext cx="3290" cy="307820"/>
+            <a:off x="4348091" y="2779197"/>
+            <a:ext cx="2101221" cy="23160"/>
           </a:xfrm>
           <a:prstGeom prst="line">
             <a:avLst/>
@@ -6019,8 +6051,8 @@
         </p:nvCxnSpPr>
         <p:spPr>
           <a:xfrm>
-            <a:off x="5689600" y="1942654"/>
-            <a:ext cx="353060" cy="0"/>
+            <a:off x="3712441" y="2233457"/>
+            <a:ext cx="438459" cy="0"/>
           </a:xfrm>
           <a:prstGeom prst="line">
             <a:avLst/>
@@ -6062,8 +6094,8 @@
         </p:nvCxnSpPr>
         <p:spPr>
           <a:xfrm>
-            <a:off x="6042660" y="1942654"/>
-            <a:ext cx="0" cy="609432"/>
+            <a:off x="4150900" y="2233457"/>
+            <a:ext cx="0" cy="679970"/>
           </a:xfrm>
           <a:prstGeom prst="line">
             <a:avLst/>
@@ -6105,8 +6137,8 @@
         </p:nvCxnSpPr>
         <p:spPr>
           <a:xfrm>
-            <a:off x="6048001" y="2541803"/>
-            <a:ext cx="1704079" cy="16838"/>
+            <a:off x="4157533" y="2901954"/>
+            <a:ext cx="2116266" cy="18787"/>
           </a:xfrm>
           <a:prstGeom prst="line">
             <a:avLst/>
@@ -6130,49 +6162,6 @@
       </p:cxnSp>
       <p:cxnSp>
         <p:nvCxnSpPr>
-          <p:cNvPr id="106" name="Straight Connector 105">
-            <a:extLst>
-              <a:ext uri="{FF2B5EF4-FFF2-40B4-BE49-F238E27FC236}">
-                <a16:creationId xmlns:a16="http://schemas.microsoft.com/office/drawing/2014/main" id="{B119D559-C6E2-BA2F-449E-816D84158164}"/>
-              </a:ext>
-            </a:extLst>
-          </p:cNvPr>
-          <p:cNvCxnSpPr>
-            <a:cxnSpLocks/>
-          </p:cNvCxnSpPr>
-          <p:nvPr/>
-        </p:nvCxnSpPr>
-        <p:spPr>
-          <a:xfrm>
-            <a:off x="7159671" y="2124758"/>
-            <a:ext cx="2540" cy="433883"/>
-          </a:xfrm>
-          <a:prstGeom prst="line">
-            <a:avLst/>
-          </a:prstGeom>
-          <a:ln>
-            <a:solidFill>
-              <a:schemeClr val="tx1"/>
-            </a:solidFill>
-          </a:ln>
-        </p:spPr>
-        <p:style>
-          <a:lnRef idx="1">
-            <a:schemeClr val="accent1"/>
-          </a:lnRef>
-          <a:fillRef idx="0">
-            <a:schemeClr val="accent1"/>
-          </a:fillRef>
-          <a:effectRef idx="0">
-            <a:schemeClr val="accent1"/>
-          </a:effectRef>
-          <a:fontRef idx="minor">
-            <a:schemeClr val="tx1"/>
-          </a:fontRef>
-        </p:style>
-      </p:cxnSp>
-      <p:cxnSp>
-        <p:nvCxnSpPr>
           <p:cNvPr id="109" name="Straight Connector 108">
             <a:extLst>
               <a:ext uri="{FF2B5EF4-FFF2-40B4-BE49-F238E27FC236}">
@@ -6187,8 +6176,8 @@
         </p:nvCxnSpPr>
         <p:spPr>
           <a:xfrm flipH="1">
-            <a:off x="5102860" y="1988836"/>
-            <a:ext cx="322580" cy="0"/>
+            <a:off x="2983779" y="2284984"/>
+            <a:ext cx="400607" cy="0"/>
           </a:xfrm>
           <a:prstGeom prst="line">
             <a:avLst/>
@@ -6223,8 +6212,8 @@
         </p:nvSpPr>
         <p:spPr>
           <a:xfrm>
-            <a:off x="4472477" y="2059735"/>
-            <a:ext cx="398370" cy="261610"/>
+            <a:off x="2200917" y="2364090"/>
+            <a:ext cx="494729" cy="291890"/>
           </a:xfrm>
           <a:prstGeom prst="rect">
             <a:avLst/>
@@ -6259,8 +6248,8 @@
         </p:nvSpPr>
         <p:spPr>
           <a:xfrm>
-            <a:off x="4963117" y="1473942"/>
-            <a:ext cx="1328354" cy="276999"/>
+            <a:off x="2810234" y="1710494"/>
+            <a:ext cx="1649660" cy="309060"/>
           </a:xfrm>
           <a:prstGeom prst="rect">
             <a:avLst/>
@@ -6295,8 +6284,8 @@
         </p:nvSpPr>
         <p:spPr>
           <a:xfrm>
-            <a:off x="6999717" y="1069866"/>
-            <a:ext cx="1328354" cy="276999"/>
+            <a:off x="5339452" y="1259649"/>
+            <a:ext cx="1649660" cy="309060"/>
           </a:xfrm>
           <a:prstGeom prst="rect">
             <a:avLst/>
@@ -6317,6 +6306,406 @@
           </a:p>
         </p:txBody>
       </p:sp>
+      <p:sp>
+        <p:nvSpPr>
+          <p:cNvPr id="13" name="TextBox 12">
+            <a:extLst>
+              <a:ext uri="{FF2B5EF4-FFF2-40B4-BE49-F238E27FC236}">
+                <a16:creationId xmlns:a16="http://schemas.microsoft.com/office/drawing/2014/main" id="{6CB59CC3-6CE0-0CFB-3BC1-D9CC8EF26893}"/>
+              </a:ext>
+            </a:extLst>
+          </p:cNvPr>
+          <p:cNvSpPr txBox="1"/>
+          <p:nvPr/>
+        </p:nvSpPr>
+        <p:spPr>
+          <a:xfrm>
+            <a:off x="7412937" y="3221774"/>
+            <a:ext cx="1049654" cy="276999"/>
+          </a:xfrm>
+          <a:prstGeom prst="rect">
+            <a:avLst/>
+          </a:prstGeom>
+          <a:noFill/>
+        </p:spPr>
+        <p:txBody>
+          <a:bodyPr wrap="square">
+            <a:spAutoFit/>
+          </a:bodyPr>
+          <a:lstStyle/>
+          <a:p>
+            <a:pPr algn="ctr"/>
+            <a:r>
+              <a:rPr lang="fr-FR" sz="1200" dirty="0"/>
+              <a:t>Bloc Vibrato</a:t>
+            </a:r>
+          </a:p>
+        </p:txBody>
+      </p:sp>
+      <p:sp>
+        <p:nvSpPr>
+          <p:cNvPr id="14" name="TextBox 13">
+            <a:extLst>
+              <a:ext uri="{FF2B5EF4-FFF2-40B4-BE49-F238E27FC236}">
+                <a16:creationId xmlns:a16="http://schemas.microsoft.com/office/drawing/2014/main" id="{6773D432-B5CD-F70F-2425-FB14F234EF97}"/>
+              </a:ext>
+            </a:extLst>
+          </p:cNvPr>
+          <p:cNvSpPr txBox="1"/>
+          <p:nvPr/>
+        </p:nvSpPr>
+        <p:spPr>
+          <a:xfrm>
+            <a:off x="7171997" y="2945096"/>
+            <a:ext cx="1296140" cy="276999"/>
+          </a:xfrm>
+          <a:prstGeom prst="rect">
+            <a:avLst/>
+          </a:prstGeom>
+          <a:noFill/>
+        </p:spPr>
+        <p:txBody>
+          <a:bodyPr wrap="square">
+            <a:spAutoFit/>
+          </a:bodyPr>
+          <a:lstStyle/>
+          <a:p>
+            <a:pPr algn="ctr"/>
+            <a:r>
+              <a:rPr lang="fr-FR" sz="1200" dirty="0"/>
+              <a:t>Micro </a:t>
+            </a:r>
+            <a:r>
+              <a:rPr lang="fr-FR" sz="1200" dirty="0" err="1"/>
+              <a:t>SingleCoil</a:t>
+            </a:r>
+            <a:endParaRPr lang="fr-FR" sz="1200" dirty="0"/>
+          </a:p>
+        </p:txBody>
+      </p:sp>
+      <p:sp>
+        <p:nvSpPr>
+          <p:cNvPr id="21" name="TextBox 20">
+            <a:extLst>
+              <a:ext uri="{FF2B5EF4-FFF2-40B4-BE49-F238E27FC236}">
+                <a16:creationId xmlns:a16="http://schemas.microsoft.com/office/drawing/2014/main" id="{EF02E2F6-7461-C568-DF59-D7E040D83DD7}"/>
+              </a:ext>
+            </a:extLst>
+          </p:cNvPr>
+          <p:cNvSpPr txBox="1"/>
+          <p:nvPr/>
+        </p:nvSpPr>
+        <p:spPr>
+          <a:xfrm>
+            <a:off x="492975" y="3022345"/>
+            <a:ext cx="942141" cy="276999"/>
+          </a:xfrm>
+          <a:prstGeom prst="rect">
+            <a:avLst/>
+          </a:prstGeom>
+          <a:noFill/>
+        </p:spPr>
+        <p:txBody>
+          <a:bodyPr wrap="square">
+            <a:spAutoFit/>
+          </a:bodyPr>
+          <a:lstStyle/>
+          <a:p>
+            <a:pPr algn="ctr"/>
+            <a:r>
+              <a:rPr lang="fr-FR" sz="1200" dirty="0"/>
+              <a:t>Mécanique</a:t>
+            </a:r>
+          </a:p>
+        </p:txBody>
+      </p:sp>
+      <p:cxnSp>
+        <p:nvCxnSpPr>
+          <p:cNvPr id="23" name="Connector: Elbow 22">
+            <a:extLst>
+              <a:ext uri="{FF2B5EF4-FFF2-40B4-BE49-F238E27FC236}">
+                <a16:creationId xmlns:a16="http://schemas.microsoft.com/office/drawing/2014/main" id="{4FF988A3-4B06-6E2E-639F-64E1F6F38285}"/>
+              </a:ext>
+            </a:extLst>
+          </p:cNvPr>
+          <p:cNvCxnSpPr>
+            <a:cxnSpLocks/>
+            <a:stCxn id="21" idx="2"/>
+          </p:cNvCxnSpPr>
+          <p:nvPr/>
+        </p:nvCxnSpPr>
+        <p:spPr>
+          <a:xfrm rot="16200000" flipH="1">
+            <a:off x="939847" y="3323543"/>
+            <a:ext cx="685116" cy="636718"/>
+          </a:xfrm>
+          <a:prstGeom prst="bentConnector3">
+            <a:avLst>
+              <a:gd name="adj1" fmla="val 99905"/>
+            </a:avLst>
+          </a:prstGeom>
+          <a:ln>
+            <a:tailEnd type="triangle"/>
+          </a:ln>
+        </p:spPr>
+        <p:style>
+          <a:lnRef idx="1">
+            <a:schemeClr val="dk1"/>
+          </a:lnRef>
+          <a:fillRef idx="0">
+            <a:schemeClr val="dk1"/>
+          </a:fillRef>
+          <a:effectRef idx="0">
+            <a:schemeClr val="dk1"/>
+          </a:effectRef>
+          <a:fontRef idx="minor">
+            <a:schemeClr val="tx1"/>
+          </a:fontRef>
+        </p:style>
+      </p:cxnSp>
+      <p:cxnSp>
+        <p:nvCxnSpPr>
+          <p:cNvPr id="35" name="Connector: Elbow 34">
+            <a:extLst>
+              <a:ext uri="{FF2B5EF4-FFF2-40B4-BE49-F238E27FC236}">
+                <a16:creationId xmlns:a16="http://schemas.microsoft.com/office/drawing/2014/main" id="{50CFC299-348E-F330-9452-E7ABBDC72C03}"/>
+              </a:ext>
+            </a:extLst>
+          </p:cNvPr>
+          <p:cNvCxnSpPr>
+            <a:cxnSpLocks/>
+            <a:stCxn id="14" idx="1"/>
+          </p:cNvCxnSpPr>
+          <p:nvPr/>
+        </p:nvCxnSpPr>
+        <p:spPr>
+          <a:xfrm rot="10800000" flipV="1">
+            <a:off x="6468437" y="3083596"/>
+            <a:ext cx="703561" cy="671912"/>
+          </a:xfrm>
+          <a:prstGeom prst="bentConnector3">
+            <a:avLst>
+              <a:gd name="adj1" fmla="val 50000"/>
+            </a:avLst>
+          </a:prstGeom>
+          <a:ln>
+            <a:tailEnd type="triangle"/>
+          </a:ln>
+        </p:spPr>
+        <p:style>
+          <a:lnRef idx="1">
+            <a:schemeClr val="dk1"/>
+          </a:lnRef>
+          <a:fillRef idx="0">
+            <a:schemeClr val="dk1"/>
+          </a:fillRef>
+          <a:effectRef idx="0">
+            <a:schemeClr val="dk1"/>
+          </a:effectRef>
+          <a:fontRef idx="minor">
+            <a:schemeClr val="tx1"/>
+          </a:fontRef>
+        </p:style>
+      </p:cxnSp>
+      <p:cxnSp>
+        <p:nvCxnSpPr>
+          <p:cNvPr id="43" name="Connector: Elbow 42">
+            <a:extLst>
+              <a:ext uri="{FF2B5EF4-FFF2-40B4-BE49-F238E27FC236}">
+                <a16:creationId xmlns:a16="http://schemas.microsoft.com/office/drawing/2014/main" id="{6BFEC6A8-37CA-DDB2-34B3-EAC758DD7C81}"/>
+              </a:ext>
+            </a:extLst>
+          </p:cNvPr>
+          <p:cNvCxnSpPr>
+            <a:cxnSpLocks/>
+            <a:stCxn id="13" idx="1"/>
+          </p:cNvCxnSpPr>
+          <p:nvPr/>
+        </p:nvCxnSpPr>
+        <p:spPr>
+          <a:xfrm rot="10800000" flipV="1">
+            <a:off x="7046595" y="3360274"/>
+            <a:ext cx="366342" cy="247808"/>
+          </a:xfrm>
+          <a:prstGeom prst="bentConnector3">
+            <a:avLst>
+              <a:gd name="adj1" fmla="val 99921"/>
+            </a:avLst>
+          </a:prstGeom>
+          <a:ln>
+            <a:tailEnd type="triangle"/>
+          </a:ln>
+        </p:spPr>
+        <p:style>
+          <a:lnRef idx="1">
+            <a:schemeClr val="dk1"/>
+          </a:lnRef>
+          <a:fillRef idx="0">
+            <a:schemeClr val="dk1"/>
+          </a:fillRef>
+          <a:effectRef idx="0">
+            <a:schemeClr val="dk1"/>
+          </a:effectRef>
+          <a:fontRef idx="minor">
+            <a:schemeClr val="tx1"/>
+          </a:fontRef>
+        </p:style>
+      </p:cxnSp>
+      <p:sp>
+        <p:nvSpPr>
+          <p:cNvPr id="52" name="TextBox 51">
+            <a:extLst>
+              <a:ext uri="{FF2B5EF4-FFF2-40B4-BE49-F238E27FC236}">
+                <a16:creationId xmlns:a16="http://schemas.microsoft.com/office/drawing/2014/main" id="{3A70D80F-2229-FD27-3AD5-7187F59B005E}"/>
+              </a:ext>
+            </a:extLst>
+          </p:cNvPr>
+          <p:cNvSpPr txBox="1"/>
+          <p:nvPr/>
+        </p:nvSpPr>
+        <p:spPr>
+          <a:xfrm>
+            <a:off x="2915256" y="3215499"/>
+            <a:ext cx="633157" cy="276999"/>
+          </a:xfrm>
+          <a:prstGeom prst="rect">
+            <a:avLst/>
+          </a:prstGeom>
+          <a:noFill/>
+        </p:spPr>
+        <p:txBody>
+          <a:bodyPr wrap="square">
+            <a:spAutoFit/>
+          </a:bodyPr>
+          <a:lstStyle/>
+          <a:p>
+            <a:pPr algn="ctr"/>
+            <a:r>
+              <a:rPr lang="fr-FR" sz="1200" dirty="0"/>
+              <a:t>Corde</a:t>
+            </a:r>
+          </a:p>
+        </p:txBody>
+      </p:sp>
+      <p:cxnSp>
+        <p:nvCxnSpPr>
+          <p:cNvPr id="53" name="Connector: Elbow 52">
+            <a:extLst>
+              <a:ext uri="{FF2B5EF4-FFF2-40B4-BE49-F238E27FC236}">
+                <a16:creationId xmlns:a16="http://schemas.microsoft.com/office/drawing/2014/main" id="{A5361A9F-4CAF-2A70-9164-246E5EDA2109}"/>
+              </a:ext>
+            </a:extLst>
+          </p:cNvPr>
+          <p:cNvCxnSpPr>
+            <a:cxnSpLocks/>
+            <a:stCxn id="52" idx="3"/>
+          </p:cNvCxnSpPr>
+          <p:nvPr/>
+        </p:nvCxnSpPr>
+        <p:spPr>
+          <a:xfrm>
+            <a:off x="3548413" y="3353999"/>
+            <a:ext cx="274743" cy="555544"/>
+          </a:xfrm>
+          <a:prstGeom prst="bentConnector2">
+            <a:avLst/>
+          </a:prstGeom>
+          <a:ln>
+            <a:tailEnd type="triangle"/>
+          </a:ln>
+        </p:spPr>
+        <p:style>
+          <a:lnRef idx="1">
+            <a:schemeClr val="dk1"/>
+          </a:lnRef>
+          <a:fillRef idx="0">
+            <a:schemeClr val="dk1"/>
+          </a:fillRef>
+          <a:effectRef idx="0">
+            <a:schemeClr val="dk1"/>
+          </a:effectRef>
+          <a:fontRef idx="minor">
+            <a:schemeClr val="tx1"/>
+          </a:fontRef>
+        </p:style>
+      </p:cxnSp>
+      <p:sp>
+        <p:nvSpPr>
+          <p:cNvPr id="57" name="TextBox 56">
+            <a:extLst>
+              <a:ext uri="{FF2B5EF4-FFF2-40B4-BE49-F238E27FC236}">
+                <a16:creationId xmlns:a16="http://schemas.microsoft.com/office/drawing/2014/main" id="{0843E1A7-D5D9-9271-804D-43BF5EF7399A}"/>
+              </a:ext>
+            </a:extLst>
+          </p:cNvPr>
+          <p:cNvSpPr txBox="1"/>
+          <p:nvPr/>
+        </p:nvSpPr>
+        <p:spPr>
+          <a:xfrm>
+            <a:off x="4645725" y="3092763"/>
+            <a:ext cx="1653952" cy="276999"/>
+          </a:xfrm>
+          <a:prstGeom prst="rect">
+            <a:avLst/>
+          </a:prstGeom>
+          <a:noFill/>
+        </p:spPr>
+        <p:txBody>
+          <a:bodyPr wrap="square">
+            <a:spAutoFit/>
+          </a:bodyPr>
+          <a:lstStyle/>
+          <a:p>
+            <a:pPr algn="ctr"/>
+            <a:r>
+              <a:rPr lang="fr-FR" sz="1200" dirty="0"/>
+              <a:t>Micro Humbucker</a:t>
+            </a:r>
+          </a:p>
+        </p:txBody>
+      </p:sp>
+      <p:cxnSp>
+        <p:nvCxnSpPr>
+          <p:cNvPr id="58" name="Connector: Elbow 57">
+            <a:extLst>
+              <a:ext uri="{FF2B5EF4-FFF2-40B4-BE49-F238E27FC236}">
+                <a16:creationId xmlns:a16="http://schemas.microsoft.com/office/drawing/2014/main" id="{125C70E4-D44E-FE81-2FAC-CF8D1C57ACEE}"/>
+              </a:ext>
+            </a:extLst>
+          </p:cNvPr>
+          <p:cNvCxnSpPr>
+            <a:cxnSpLocks/>
+          </p:cNvCxnSpPr>
+          <p:nvPr/>
+        </p:nvCxnSpPr>
+        <p:spPr>
+          <a:xfrm rot="16200000" flipH="1">
+            <a:off x="5567470" y="3274992"/>
+            <a:ext cx="345520" cy="535059"/>
+          </a:xfrm>
+          <a:prstGeom prst="bentConnector2">
+            <a:avLst/>
+          </a:prstGeom>
+          <a:ln>
+            <a:tailEnd type="triangle"/>
+          </a:ln>
+        </p:spPr>
+        <p:style>
+          <a:lnRef idx="1">
+            <a:schemeClr val="dk1"/>
+          </a:lnRef>
+          <a:fillRef idx="0">
+            <a:schemeClr val="dk1"/>
+          </a:fillRef>
+          <a:effectRef idx="0">
+            <a:schemeClr val="dk1"/>
+          </a:effectRef>
+          <a:fontRef idx="minor">
+            <a:schemeClr val="tx1"/>
+          </a:fontRef>
+        </p:style>
+      </p:cxnSp>
     </p:spTree>
     <p:extLst>
       <p:ext uri="{BB962C8B-B14F-4D97-AF65-F5344CB8AC3E}">
@@ -6338,7 +6727,7 @@
         <p:cNvPr id="1" name="">
           <a:extLst>
             <a:ext uri="{FF2B5EF4-FFF2-40B4-BE49-F238E27FC236}">
-              <a16:creationId xmlns:a16="http://schemas.microsoft.com/office/drawing/2014/main" id="{BFB7C5E6-0DE1-4F1C-6F44-3FB16C6D9DAB}"/>
+              <a16:creationId xmlns:a16="http://schemas.microsoft.com/office/drawing/2014/main" id="{4F584765-5894-8CC8-303C-ADAA4CFFF1EE}"/>
             </a:ext>
           </a:extLst>
         </p:cNvPr>
@@ -6353,12 +6742,142 @@
           <a:chExt cx="0" cy="0"/>
         </a:xfrm>
       </p:grpSpPr>
+      <p:cxnSp>
+        <p:nvCxnSpPr>
+          <p:cNvPr id="93" name="Straight Connector 92">
+            <a:extLst>
+              <a:ext uri="{FF2B5EF4-FFF2-40B4-BE49-F238E27FC236}">
+                <a16:creationId xmlns:a16="http://schemas.microsoft.com/office/drawing/2014/main" id="{0D44BAF1-ED95-2AE0-4741-B870742D63AE}"/>
+              </a:ext>
+            </a:extLst>
+          </p:cNvPr>
+          <p:cNvCxnSpPr>
+            <a:cxnSpLocks/>
+          </p:cNvCxnSpPr>
+          <p:nvPr/>
+        </p:nvCxnSpPr>
+        <p:spPr>
+          <a:xfrm>
+            <a:off x="5398701" y="2432915"/>
+            <a:ext cx="1" cy="357860"/>
+          </a:xfrm>
+          <a:prstGeom prst="line">
+            <a:avLst/>
+          </a:prstGeom>
+          <a:ln>
+            <a:solidFill>
+              <a:srgbClr val="00B050"/>
+            </a:solidFill>
+          </a:ln>
+        </p:spPr>
+        <p:style>
+          <a:lnRef idx="1">
+            <a:schemeClr val="accent1"/>
+          </a:lnRef>
+          <a:fillRef idx="0">
+            <a:schemeClr val="accent1"/>
+          </a:fillRef>
+          <a:effectRef idx="0">
+            <a:schemeClr val="accent1"/>
+          </a:effectRef>
+          <a:fontRef idx="minor">
+            <a:schemeClr val="tx1"/>
+          </a:fontRef>
+        </p:style>
+      </p:cxnSp>
+      <p:cxnSp>
+        <p:nvCxnSpPr>
+          <p:cNvPr id="106" name="Straight Connector 105">
+            <a:extLst>
+              <a:ext uri="{FF2B5EF4-FFF2-40B4-BE49-F238E27FC236}">
+                <a16:creationId xmlns:a16="http://schemas.microsoft.com/office/drawing/2014/main" id="{A4445B1F-7F4B-929D-852E-C4CC735F867F}"/>
+              </a:ext>
+            </a:extLst>
+          </p:cNvPr>
+          <p:cNvCxnSpPr>
+            <a:cxnSpLocks/>
+          </p:cNvCxnSpPr>
+          <p:nvPr/>
+        </p:nvCxnSpPr>
+        <p:spPr>
+          <a:xfrm>
+            <a:off x="5147721" y="2427245"/>
+            <a:ext cx="3154" cy="484102"/>
+          </a:xfrm>
+          <a:prstGeom prst="line">
+            <a:avLst/>
+          </a:prstGeom>
+          <a:ln>
+            <a:solidFill>
+              <a:schemeClr val="tx1"/>
+            </a:solidFill>
+          </a:ln>
+        </p:spPr>
+        <p:style>
+          <a:lnRef idx="1">
+            <a:schemeClr val="accent1"/>
+          </a:lnRef>
+          <a:fillRef idx="0">
+            <a:schemeClr val="accent1"/>
+          </a:fillRef>
+          <a:effectRef idx="0">
+            <a:schemeClr val="accent1"/>
+          </a:effectRef>
+          <a:fontRef idx="minor">
+            <a:schemeClr val="tx1"/>
+          </a:fontRef>
+        </p:style>
+      </p:cxnSp>
+      <p:sp>
+        <p:nvSpPr>
+          <p:cNvPr id="15" name="Rectangle 14">
+            <a:extLst>
+              <a:ext uri="{FF2B5EF4-FFF2-40B4-BE49-F238E27FC236}">
+                <a16:creationId xmlns:a16="http://schemas.microsoft.com/office/drawing/2014/main" id="{366108D0-AB28-C372-C33F-9BCB677A77B2}"/>
+              </a:ext>
+            </a:extLst>
+          </p:cNvPr>
+          <p:cNvSpPr/>
+          <p:nvPr/>
+        </p:nvSpPr>
+        <p:spPr>
+          <a:xfrm>
+            <a:off x="5060930" y="1617120"/>
+            <a:ext cx="2287034" cy="819519"/>
+          </a:xfrm>
+          <a:prstGeom prst="rect">
+            <a:avLst/>
+          </a:prstGeom>
+        </p:spPr>
+        <p:style>
+          <a:lnRef idx="2">
+            <a:schemeClr val="dk1"/>
+          </a:lnRef>
+          <a:fillRef idx="1">
+            <a:schemeClr val="lt1"/>
+          </a:fillRef>
+          <a:effectRef idx="0">
+            <a:schemeClr val="dk1"/>
+          </a:effectRef>
+          <a:fontRef idx="minor">
+            <a:schemeClr val="dk1"/>
+          </a:fontRef>
+        </p:style>
+        <p:txBody>
+          <a:bodyPr rtlCol="0" anchor="ctr"/>
+          <a:lstStyle/>
+          <a:p>
+            <a:pPr algn="ctr"/>
+            <a:endParaRPr lang="fr-FR"/>
+          </a:p>
+        </p:txBody>
+      </p:sp>
       <p:sp>
         <p:nvSpPr>
           <p:cNvPr id="5" name="Date Placeholder 1">
             <a:extLst>
               <a:ext uri="{FF2B5EF4-FFF2-40B4-BE49-F238E27FC236}">
-                <a16:creationId xmlns:a16="http://schemas.microsoft.com/office/drawing/2014/main" id="{6FE16BF0-5CAC-E27D-2BCA-C7ECB900BED0}"/>
+                <a16:creationId xmlns:a16="http://schemas.microsoft.com/office/drawing/2014/main" id="{395038D2-4793-2D6D-E7EE-AED98E6D03B7}"/>
               </a:ext>
             </a:extLst>
           </p:cNvPr>
@@ -6387,7 +6906,7 @@
           <p:cNvPr id="6" name="Footer Placeholder 2">
             <a:extLst>
               <a:ext uri="{FF2B5EF4-FFF2-40B4-BE49-F238E27FC236}">
-                <a16:creationId xmlns:a16="http://schemas.microsoft.com/office/drawing/2014/main" id="{244D8848-C6E0-0932-C016-8417CD84FE02}"/>
+                <a16:creationId xmlns:a16="http://schemas.microsoft.com/office/drawing/2014/main" id="{C88CB7A3-A7AC-6F87-1DC2-8DC7EC063FBD}"/>
               </a:ext>
             </a:extLst>
           </p:cNvPr>
@@ -6415,7 +6934,7 @@
           <p:cNvPr id="7" name="Slide Number Placeholder 3">
             <a:extLst>
               <a:ext uri="{FF2B5EF4-FFF2-40B4-BE49-F238E27FC236}">
-                <a16:creationId xmlns:a16="http://schemas.microsoft.com/office/drawing/2014/main" id="{48DFD7F1-F1BC-C854-C94A-8AED674D6088}"/>
+                <a16:creationId xmlns:a16="http://schemas.microsoft.com/office/drawing/2014/main" id="{F36ECDC7-487F-939D-7A92-84F22DFE3AF5}"/>
               </a:ext>
             </a:extLst>
           </p:cNvPr>
@@ -6444,7 +6963,7 @@
           <p:cNvPr id="2" name="Rectangle 1">
             <a:extLst>
               <a:ext uri="{FF2B5EF4-FFF2-40B4-BE49-F238E27FC236}">
-                <a16:creationId xmlns:a16="http://schemas.microsoft.com/office/drawing/2014/main" id="{5152021D-76B4-A12E-592D-D2F8076D4D87}"/>
+                <a16:creationId xmlns:a16="http://schemas.microsoft.com/office/drawing/2014/main" id="{85D3E981-369E-684E-83B4-2FEA29A4EAD6}"/>
               </a:ext>
             </a:extLst>
           </p:cNvPr>
@@ -6488,7 +7007,7 @@
           <p:cNvPr id="8" name="Footer Placeholder 2">
             <a:extLst>
               <a:ext uri="{FF2B5EF4-FFF2-40B4-BE49-F238E27FC236}">
-                <a16:creationId xmlns:a16="http://schemas.microsoft.com/office/drawing/2014/main" id="{3A2191DD-FD6C-D2E8-D7D5-F517800D6FCA}"/>
+                <a16:creationId xmlns:a16="http://schemas.microsoft.com/office/drawing/2014/main" id="{3A457BAC-AC8C-5010-1E29-5509087D2B47}"/>
               </a:ext>
             </a:extLst>
           </p:cNvPr>
@@ -6616,7 +7135,7 @@
           <p:cNvPr id="9" name="TextBox 8">
             <a:extLst>
               <a:ext uri="{FF2B5EF4-FFF2-40B4-BE49-F238E27FC236}">
-                <a16:creationId xmlns:a16="http://schemas.microsoft.com/office/drawing/2014/main" id="{8E92E44C-346A-328C-2F65-C1AA752EFAE7}"/>
+                <a16:creationId xmlns:a16="http://schemas.microsoft.com/office/drawing/2014/main" id="{7CA2BFA9-FCC6-B783-50CC-7DE344DF6405}"/>
               </a:ext>
             </a:extLst>
           </p:cNvPr>
@@ -6668,7 +7187,7 @@
           <p:cNvPr id="16" name="Rectangle 15">
             <a:extLst>
               <a:ext uri="{FF2B5EF4-FFF2-40B4-BE49-F238E27FC236}">
-                <a16:creationId xmlns:a16="http://schemas.microsoft.com/office/drawing/2014/main" id="{8CD5999F-74D6-8034-1956-8C86720C2FF3}"/>
+                <a16:creationId xmlns:a16="http://schemas.microsoft.com/office/drawing/2014/main" id="{6DB99E34-6928-D6A4-E886-C3C70D4D9284}"/>
               </a:ext>
             </a:extLst>
           </p:cNvPr>
@@ -6719,10 +7238,10 @@
       </p:sp>
       <p:sp>
         <p:nvSpPr>
-          <p:cNvPr id="12" name="TextBox 11">
+          <p:cNvPr id="3" name="TextBox 2">
             <a:extLst>
               <a:ext uri="{FF2B5EF4-FFF2-40B4-BE49-F238E27FC236}">
-                <a16:creationId xmlns:a16="http://schemas.microsoft.com/office/drawing/2014/main" id="{F1BE6537-99FB-9A80-B717-CE3001CCA985}"/>
+                <a16:creationId xmlns:a16="http://schemas.microsoft.com/office/drawing/2014/main" id="{DAB6632F-9154-9B58-7CAA-95E7E6ABA2C7}"/>
               </a:ext>
             </a:extLst>
           </p:cNvPr>
@@ -6731,175 +7250,8 @@
         </p:nvSpPr>
         <p:spPr>
           <a:xfrm>
-            <a:off x="452411" y="1241427"/>
-            <a:ext cx="3030260" cy="4801314"/>
-          </a:xfrm>
-          <a:prstGeom prst="rect">
-            <a:avLst/>
-          </a:prstGeom>
-          <a:ln w="38100"/>
-        </p:spPr>
-        <p:style>
-          <a:lnRef idx="2">
-            <a:schemeClr val="accent6"/>
-          </a:lnRef>
-          <a:fillRef idx="1">
-            <a:schemeClr val="lt1"/>
-          </a:fillRef>
-          <a:effectRef idx="0">
-            <a:schemeClr val="accent6"/>
-          </a:effectRef>
-          <a:fontRef idx="minor">
-            <a:schemeClr val="dk1"/>
-          </a:fontRef>
-        </p:style>
-        <p:txBody>
-          <a:bodyPr wrap="square" rtlCol="0">
-            <a:spAutoFit/>
-          </a:bodyPr>
-          <a:lstStyle/>
-          <a:p>
-            <a:r>
-              <a:rPr lang="fr-FR" b="1" dirty="0"/>
-              <a:t>Matériel :</a:t>
-            </a:r>
-          </a:p>
-          <a:p>
-            <a:endParaRPr lang="fr-FR" b="1" dirty="0"/>
-          </a:p>
-          <a:p>
-            <a:pPr marL="285750" indent="-285750">
-              <a:buFont typeface="Arial" panose="020B0604020202020204" pitchFamily="34" charset="0"/>
-              <a:buChar char="•"/>
-            </a:pPr>
-            <a:r>
-              <a:rPr lang="fr-FR" u="sng" dirty="0"/>
-              <a:t>Déjà possédé :</a:t>
-            </a:r>
-          </a:p>
-          <a:p>
-            <a:endParaRPr lang="fr-FR" u="sng" dirty="0"/>
-          </a:p>
-          <a:p>
-            <a:pPr marL="742950" lvl="1" indent="-285750">
-              <a:buFont typeface="Arial" panose="020B0604020202020204" pitchFamily="34" charset="0"/>
-              <a:buChar char="•"/>
-            </a:pPr>
-            <a:r>
-              <a:rPr lang="fr-FR" dirty="0"/>
-              <a:t>Corde Métallique</a:t>
-            </a:r>
-          </a:p>
-          <a:p>
-            <a:pPr marL="742950" lvl="1" indent="-285750">
-              <a:buFont typeface="Arial" panose="020B0604020202020204" pitchFamily="34" charset="0"/>
-              <a:buChar char="•"/>
-            </a:pPr>
-            <a:r>
-              <a:rPr lang="fr-FR" dirty="0"/>
-              <a:t>Mécaniques</a:t>
-            </a:r>
-          </a:p>
-          <a:p>
-            <a:pPr marL="742950" lvl="1" indent="-285750">
-              <a:buFont typeface="Arial" panose="020B0604020202020204" pitchFamily="34" charset="0"/>
-              <a:buChar char="•"/>
-            </a:pPr>
-            <a:r>
-              <a:rPr lang="fr-FR" dirty="0"/>
-              <a:t>Micros (Simple &amp; Double)</a:t>
-            </a:r>
-          </a:p>
-          <a:p>
-            <a:pPr marL="742950" lvl="1" indent="-285750">
-              <a:buFont typeface="Arial" panose="020B0604020202020204" pitchFamily="34" charset="0"/>
-              <a:buChar char="•"/>
-            </a:pPr>
-            <a:r>
-              <a:rPr lang="fr-FR" dirty="0"/>
-              <a:t>Ordinateur Portable</a:t>
-            </a:r>
-          </a:p>
-          <a:p>
-            <a:r>
-              <a:rPr lang="fr-FR" b="1" dirty="0"/>
-              <a:t> </a:t>
-            </a:r>
-          </a:p>
-          <a:p>
-            <a:endParaRPr lang="fr-FR" b="1" dirty="0"/>
-          </a:p>
-          <a:p>
-            <a:pPr marL="285750" indent="-285750">
-              <a:buFont typeface="Arial" panose="020B0604020202020204" pitchFamily="34" charset="0"/>
-              <a:buChar char="•"/>
-            </a:pPr>
-            <a:r>
-              <a:rPr lang="fr-FR" u="sng" dirty="0"/>
-              <a:t>Reste à trouver :</a:t>
-            </a:r>
-          </a:p>
-          <a:p>
-            <a:endParaRPr lang="fr-FR" u="sng" dirty="0"/>
-          </a:p>
-          <a:p>
-            <a:pPr marL="742950" lvl="1" indent="-285750">
-              <a:buFont typeface="Arial" panose="020B0604020202020204" pitchFamily="34" charset="0"/>
-              <a:buChar char="•"/>
-            </a:pPr>
-            <a:r>
-              <a:rPr lang="fr-FR" dirty="0"/>
-              <a:t>Système d’excitation</a:t>
-            </a:r>
-          </a:p>
-          <a:p>
-            <a:pPr marL="742950" lvl="1" indent="-285750">
-              <a:buFont typeface="Arial" panose="020B0604020202020204" pitchFamily="34" charset="0"/>
-              <a:buChar char="•"/>
-            </a:pPr>
-            <a:r>
-              <a:rPr lang="fr-FR" dirty="0"/>
-              <a:t>Solénoïde</a:t>
-            </a:r>
-          </a:p>
-          <a:p>
-            <a:pPr marL="742950" lvl="1" indent="-285750">
-              <a:buFont typeface="Arial" panose="020B0604020202020204" pitchFamily="34" charset="0"/>
-              <a:buChar char="•"/>
-            </a:pPr>
-            <a:r>
-              <a:rPr lang="fr-FR" dirty="0"/>
-              <a:t>Carte d’acquisition</a:t>
-            </a:r>
-          </a:p>
-          <a:p>
-            <a:pPr marL="742950" lvl="1" indent="-285750">
-              <a:buFont typeface="Arial" panose="020B0604020202020204" pitchFamily="34" charset="0"/>
-              <a:buChar char="•"/>
-            </a:pPr>
-            <a:r>
-              <a:rPr lang="fr-FR" dirty="0"/>
-              <a:t>Oscilloscope</a:t>
-            </a:r>
-          </a:p>
-        </p:txBody>
-      </p:sp>
-      <p:sp>
-        <p:nvSpPr>
-          <p:cNvPr id="3" name="TextBox 2">
-            <a:extLst>
-              <a:ext uri="{FF2B5EF4-FFF2-40B4-BE49-F238E27FC236}">
-                <a16:creationId xmlns:a16="http://schemas.microsoft.com/office/drawing/2014/main" id="{D3E3331A-21AD-415B-5CCD-8DDBAF25B1BD}"/>
-              </a:ext>
-            </a:extLst>
-          </p:cNvPr>
-          <p:cNvSpPr txBox="1"/>
-          <p:nvPr/>
-        </p:nvSpPr>
-        <p:spPr>
-          <a:xfrm>
-            <a:off x="3759200" y="4565413"/>
-            <a:ext cx="5064543" cy="1477328"/>
+            <a:off x="345440" y="4565413"/>
+            <a:ext cx="8478303" cy="1477328"/>
           </a:xfrm>
           <a:prstGeom prst="rect">
             <a:avLst/>
@@ -6925,7 +7277,7 @@
           </a:fontRef>
         </p:style>
         <p:txBody>
-          <a:bodyPr wrap="square" numCol="1" rtlCol="0">
+          <a:bodyPr wrap="square" numCol="3" rtlCol="0">
             <a:spAutoFit/>
           </a:bodyPr>
           <a:lstStyle/>
@@ -6955,12 +7307,57 @@
               <a:buFont typeface="Wingdings" panose="05000000000000000000" pitchFamily="2" charset="2"/>
               <a:buChar char="à"/>
             </a:pPr>
+            <a:endParaRPr lang="fr-FR" dirty="0">
+              <a:sym typeface="Wingdings" panose="05000000000000000000" pitchFamily="2" charset="2"/>
+            </a:endParaRPr>
+          </a:p>
+          <a:p>
+            <a:endParaRPr lang="fr-FR" dirty="0">
+              <a:sym typeface="Wingdings" panose="05000000000000000000" pitchFamily="2" charset="2"/>
+            </a:endParaRPr>
+          </a:p>
+          <a:p>
+            <a:endParaRPr lang="fr-FR" dirty="0">
+              <a:sym typeface="Wingdings" panose="05000000000000000000" pitchFamily="2" charset="2"/>
+            </a:endParaRPr>
+          </a:p>
+          <a:p>
+            <a:endParaRPr lang="fr-FR" dirty="0">
+              <a:sym typeface="Wingdings" panose="05000000000000000000" pitchFamily="2" charset="2"/>
+            </a:endParaRPr>
+          </a:p>
+          <a:p>
+            <a:pPr marL="285750" indent="-285750">
+              <a:buFont typeface="Wingdings" panose="05000000000000000000" pitchFamily="2" charset="2"/>
+              <a:buChar char="à"/>
+            </a:pPr>
             <a:r>
               <a:rPr lang="fr-FR" dirty="0">
                 <a:sym typeface="Wingdings" panose="05000000000000000000" pitchFamily="2" charset="2"/>
               </a:rPr>
               <a:t>Intensité &amp; Fréquence du champ parasite</a:t>
             </a:r>
+          </a:p>
+          <a:p>
+            <a:pPr marL="285750" indent="-285750">
+              <a:buFont typeface="Wingdings" panose="05000000000000000000" pitchFamily="2" charset="2"/>
+              <a:buChar char="à"/>
+            </a:pPr>
+            <a:endParaRPr lang="fr-FR" dirty="0"/>
+          </a:p>
+          <a:p>
+            <a:pPr marL="285750" indent="-285750">
+              <a:buFont typeface="Wingdings" panose="05000000000000000000" pitchFamily="2" charset="2"/>
+              <a:buChar char="à"/>
+            </a:pPr>
+            <a:endParaRPr lang="fr-FR" dirty="0"/>
+          </a:p>
+          <a:p>
+            <a:pPr marL="285750" indent="-285750">
+              <a:buFont typeface="Wingdings" panose="05000000000000000000" pitchFamily="2" charset="2"/>
+              <a:buChar char="à"/>
+            </a:pPr>
+            <a:endParaRPr lang="fr-FR" dirty="0"/>
           </a:p>
           <a:p>
             <a:pPr marL="285750" indent="-285750">
@@ -6979,7 +7376,7 @@
           <p:cNvPr id="11" name="Picture 10">
             <a:extLst>
               <a:ext uri="{FF2B5EF4-FFF2-40B4-BE49-F238E27FC236}">
-                <a16:creationId xmlns:a16="http://schemas.microsoft.com/office/drawing/2014/main" id="{6DA7D672-DB9E-6FA4-2544-BDB36C527A3C}"/>
+                <a16:creationId xmlns:a16="http://schemas.microsoft.com/office/drawing/2014/main" id="{9DC01244-87DC-5E3F-2B64-F23428E952DB}"/>
               </a:ext>
             </a:extLst>
           </p:cNvPr>
@@ -6996,14 +7393,13 @@
               </a:ext>
             </a:extLst>
           </a:blip>
-          <a:stretch>
-            <a:fillRect/>
-          </a:stretch>
+          <a:srcRect/>
+          <a:stretch/>
         </p:blipFill>
         <p:spPr>
-          <a:xfrm>
-            <a:off x="3567421" y="2951290"/>
-            <a:ext cx="5628641" cy="816991"/>
+          <a:xfrm rot="16140000">
+            <a:off x="4210262" y="693933"/>
+            <a:ext cx="723475" cy="6262094"/>
           </a:xfrm>
           <a:prstGeom prst="rect">
             <a:avLst/>
@@ -7015,7 +7411,7 @@
           <p:cNvPr id="74" name="Straight Connector 73">
             <a:extLst>
               <a:ext uri="{FF2B5EF4-FFF2-40B4-BE49-F238E27FC236}">
-                <a16:creationId xmlns:a16="http://schemas.microsoft.com/office/drawing/2014/main" id="{0703E7DF-C581-8ECA-6134-BEB0EE50D07B}"/>
+                <a16:creationId xmlns:a16="http://schemas.microsoft.com/office/drawing/2014/main" id="{EBE8B673-200E-195A-00C5-D9D0A66639C7}"/>
               </a:ext>
             </a:extLst>
           </p:cNvPr>
@@ -7026,8 +7422,8 @@
         </p:nvCxnSpPr>
         <p:spPr>
           <a:xfrm>
-            <a:off x="7684805" y="2502535"/>
-            <a:ext cx="0" cy="614045"/>
+            <a:off x="6190251" y="2858141"/>
+            <a:ext cx="0" cy="685117"/>
           </a:xfrm>
           <a:prstGeom prst="line">
             <a:avLst/>
@@ -7055,10 +7451,10 @@
       </p:cxnSp>
       <p:sp>
         <p:nvSpPr>
-          <p:cNvPr id="15" name="Rectangle 14">
+          <p:cNvPr id="17" name="Freeform: Shape 16">
             <a:extLst>
               <a:ext uri="{FF2B5EF4-FFF2-40B4-BE49-F238E27FC236}">
-                <a16:creationId xmlns:a16="http://schemas.microsoft.com/office/drawing/2014/main" id="{73116245-F618-0625-394A-CE37C22D5A73}"/>
+                <a16:creationId xmlns:a16="http://schemas.microsoft.com/office/drawing/2014/main" id="{D09ED06E-50AB-DDEF-5598-DA325C1F6FF7}"/>
               </a:ext>
             </a:extLst>
           </p:cNvPr>
@@ -7067,52 +7463,8 @@
         </p:nvSpPr>
         <p:spPr>
           <a:xfrm>
-            <a:off x="6775443" y="1390254"/>
-            <a:ext cx="1841586" cy="734504"/>
-          </a:xfrm>
-          <a:prstGeom prst="rect">
-            <a:avLst/>
-          </a:prstGeom>
-        </p:spPr>
-        <p:style>
-          <a:lnRef idx="2">
-            <a:schemeClr val="dk1"/>
-          </a:lnRef>
-          <a:fillRef idx="1">
-            <a:schemeClr val="lt1"/>
-          </a:fillRef>
-          <a:effectRef idx="0">
-            <a:schemeClr val="dk1"/>
-          </a:effectRef>
-          <a:fontRef idx="minor">
-            <a:schemeClr val="dk1"/>
-          </a:fontRef>
-        </p:style>
-        <p:txBody>
-          <a:bodyPr rtlCol="0" anchor="ctr"/>
-          <a:lstStyle/>
-          <a:p>
-            <a:pPr algn="ctr"/>
-            <a:endParaRPr lang="fr-FR"/>
-          </a:p>
-        </p:txBody>
-      </p:sp>
-      <p:sp>
-        <p:nvSpPr>
-          <p:cNvPr id="17" name="Freeform: Shape 16">
-            <a:extLst>
-              <a:ext uri="{FF2B5EF4-FFF2-40B4-BE49-F238E27FC236}">
-                <a16:creationId xmlns:a16="http://schemas.microsoft.com/office/drawing/2014/main" id="{E070ED70-041D-8735-EE73-DC8C6A1843A2}"/>
-              </a:ext>
-            </a:extLst>
-          </p:cNvPr>
-          <p:cNvSpPr/>
-          <p:nvPr/>
-        </p:nvSpPr>
-        <p:spPr>
-          <a:xfrm>
-            <a:off x="6775443" y="1534517"/>
-            <a:ext cx="1841585" cy="477163"/>
+            <a:off x="5060930" y="1778081"/>
+            <a:ext cx="2287034" cy="532392"/>
           </a:xfrm>
           <a:custGeom>
             <a:avLst/>
@@ -7274,7 +7626,7 @@
           <p:cNvPr id="19" name="Graphic 18" descr="Laptop with solid fill">
             <a:extLst>
               <a:ext uri="{FF2B5EF4-FFF2-40B4-BE49-F238E27FC236}">
-                <a16:creationId xmlns:a16="http://schemas.microsoft.com/office/drawing/2014/main" id="{1475BB62-8833-C74B-33F3-5FF5E6BC8EBE}"/>
+                <a16:creationId xmlns:a16="http://schemas.microsoft.com/office/drawing/2014/main" id="{0DF6654C-CBD1-6556-BA18-1C940905A8BB}"/>
               </a:ext>
             </a:extLst>
           </p:cNvPr>
@@ -7297,8 +7649,8 @@
         </p:blipFill>
         <p:spPr>
           <a:xfrm>
-            <a:off x="4214657" y="1305513"/>
-            <a:ext cx="914400" cy="914400"/>
+            <a:off x="1880735" y="1522571"/>
+            <a:ext cx="1135578" cy="1020236"/>
           </a:xfrm>
           <a:prstGeom prst="rect">
             <a:avLst/>
@@ -7310,7 +7662,7 @@
           <p:cNvPr id="103" name="Straight Connector 102">
             <a:extLst>
               <a:ext uri="{FF2B5EF4-FFF2-40B4-BE49-F238E27FC236}">
-                <a16:creationId xmlns:a16="http://schemas.microsoft.com/office/drawing/2014/main" id="{EDB22A42-8AE1-16F0-3819-E6BDA471ADB7}"/>
+                <a16:creationId xmlns:a16="http://schemas.microsoft.com/office/drawing/2014/main" id="{072E5EAA-1B3C-7A1C-9FB4-B2AD7EFC4C17}"/>
               </a:ext>
             </a:extLst>
           </p:cNvPr>
@@ -7321,8 +7673,8 @@
         </p:nvCxnSpPr>
         <p:spPr>
           <a:xfrm>
-            <a:off x="7752080" y="2551734"/>
-            <a:ext cx="0" cy="564846"/>
+            <a:off x="6273799" y="2913035"/>
+            <a:ext cx="0" cy="630224"/>
           </a:xfrm>
           <a:prstGeom prst="line">
             <a:avLst/>
@@ -7353,7 +7705,7 @@
           <p:cNvPr id="20" name="Rectangle 19">
             <a:extLst>
               <a:ext uri="{FF2B5EF4-FFF2-40B4-BE49-F238E27FC236}">
-                <a16:creationId xmlns:a16="http://schemas.microsoft.com/office/drawing/2014/main" id="{F463684D-63E0-72BE-8912-85CC2694CE45}"/>
+                <a16:creationId xmlns:a16="http://schemas.microsoft.com/office/drawing/2014/main" id="{F0D4DC10-63A3-469D-A94C-9EB8972FFC5F}"/>
               </a:ext>
             </a:extLst>
           </p:cNvPr>
@@ -7362,8 +7714,8 @@
         </p:nvSpPr>
         <p:spPr>
           <a:xfrm>
-            <a:off x="5425440" y="1757506"/>
-            <a:ext cx="264160" cy="264539"/>
+            <a:off x="3384385" y="2026879"/>
+            <a:ext cx="328056" cy="295158"/>
           </a:xfrm>
           <a:prstGeom prst="rect">
             <a:avLst/>
@@ -7394,12 +7746,1028 @@
           </a:p>
         </p:txBody>
       </p:sp>
+      <p:cxnSp>
+        <p:nvCxnSpPr>
+          <p:cNvPr id="66" name="Straight Connector 65">
+            <a:extLst>
+              <a:ext uri="{FF2B5EF4-FFF2-40B4-BE49-F238E27FC236}">
+                <a16:creationId xmlns:a16="http://schemas.microsoft.com/office/drawing/2014/main" id="{2BD2D331-7B78-3629-00BA-6645A6147AD7}"/>
+              </a:ext>
+            </a:extLst>
+          </p:cNvPr>
+          <p:cNvCxnSpPr>
+            <a:stCxn id="20" idx="3"/>
+          </p:cNvCxnSpPr>
+          <p:nvPr/>
+        </p:nvCxnSpPr>
+        <p:spPr>
+          <a:xfrm flipV="1">
+            <a:off x="3712441" y="2174458"/>
+            <a:ext cx="542554" cy="1"/>
+          </a:xfrm>
+          <a:prstGeom prst="line">
+            <a:avLst/>
+          </a:prstGeom>
+          <a:ln>
+            <a:solidFill>
+              <a:srgbClr val="0070C0"/>
+            </a:solidFill>
+          </a:ln>
+        </p:spPr>
+        <p:style>
+          <a:lnRef idx="1">
+            <a:schemeClr val="accent1"/>
+          </a:lnRef>
+          <a:fillRef idx="0">
+            <a:schemeClr val="accent1"/>
+          </a:fillRef>
+          <a:effectRef idx="0">
+            <a:schemeClr val="accent1"/>
+          </a:effectRef>
+          <a:fontRef idx="minor">
+            <a:schemeClr val="tx1"/>
+          </a:fontRef>
+        </p:style>
+      </p:cxnSp>
+      <p:cxnSp>
+        <p:nvCxnSpPr>
+          <p:cNvPr id="67" name="Straight Connector 66">
+            <a:extLst>
+              <a:ext uri="{FF2B5EF4-FFF2-40B4-BE49-F238E27FC236}">
+                <a16:creationId xmlns:a16="http://schemas.microsoft.com/office/drawing/2014/main" id="{3150FDC8-5870-0CF1-51FF-C401CA483F06}"/>
+              </a:ext>
+            </a:extLst>
+          </p:cNvPr>
+          <p:cNvCxnSpPr>
+            <a:cxnSpLocks/>
+          </p:cNvCxnSpPr>
+          <p:nvPr/>
+        </p:nvCxnSpPr>
+        <p:spPr>
+          <a:xfrm>
+            <a:off x="4254995" y="2174458"/>
+            <a:ext cx="0" cy="668805"/>
+          </a:xfrm>
+          <a:prstGeom prst="line">
+            <a:avLst/>
+          </a:prstGeom>
+          <a:ln>
+            <a:solidFill>
+              <a:srgbClr val="0070C0"/>
+            </a:solidFill>
+          </a:ln>
+        </p:spPr>
+        <p:style>
+          <a:lnRef idx="1">
+            <a:schemeClr val="accent1"/>
+          </a:lnRef>
+          <a:fillRef idx="0">
+            <a:schemeClr val="accent1"/>
+          </a:fillRef>
+          <a:effectRef idx="0">
+            <a:schemeClr val="accent1"/>
+          </a:effectRef>
+          <a:fontRef idx="minor">
+            <a:schemeClr val="tx1"/>
+          </a:fontRef>
+        </p:style>
+      </p:cxnSp>
+      <p:cxnSp>
+        <p:nvCxnSpPr>
+          <p:cNvPr id="71" name="Straight Connector 70">
+            <a:extLst>
+              <a:ext uri="{FF2B5EF4-FFF2-40B4-BE49-F238E27FC236}">
+                <a16:creationId xmlns:a16="http://schemas.microsoft.com/office/drawing/2014/main" id="{0CC16D5E-221F-21C3-AC59-8DBA8031A23F}"/>
+              </a:ext>
+            </a:extLst>
+          </p:cNvPr>
+          <p:cNvCxnSpPr>
+            <a:cxnSpLocks/>
+          </p:cNvCxnSpPr>
+          <p:nvPr/>
+        </p:nvCxnSpPr>
+        <p:spPr>
+          <a:xfrm>
+            <a:off x="4254995" y="2843263"/>
+            <a:ext cx="1935257" cy="22946"/>
+          </a:xfrm>
+          <a:prstGeom prst="line">
+            <a:avLst/>
+          </a:prstGeom>
+          <a:ln>
+            <a:solidFill>
+              <a:srgbClr val="0070C0"/>
+            </a:solidFill>
+          </a:ln>
+        </p:spPr>
+        <p:style>
+          <a:lnRef idx="1">
+            <a:schemeClr val="accent1"/>
+          </a:lnRef>
+          <a:fillRef idx="0">
+            <a:schemeClr val="accent1"/>
+          </a:fillRef>
+          <a:effectRef idx="0">
+            <a:schemeClr val="accent1"/>
+          </a:effectRef>
+          <a:fontRef idx="minor">
+            <a:schemeClr val="tx1"/>
+          </a:fontRef>
+        </p:style>
+      </p:cxnSp>
+      <p:cxnSp>
+        <p:nvCxnSpPr>
+          <p:cNvPr id="80" name="Straight Connector 79">
+            <a:extLst>
+              <a:ext uri="{FF2B5EF4-FFF2-40B4-BE49-F238E27FC236}">
+                <a16:creationId xmlns:a16="http://schemas.microsoft.com/office/drawing/2014/main" id="{B55B7405-4DF4-095B-0FA9-B3EFE7557045}"/>
+              </a:ext>
+            </a:extLst>
+          </p:cNvPr>
+          <p:cNvCxnSpPr>
+            <a:cxnSpLocks/>
+          </p:cNvCxnSpPr>
+          <p:nvPr/>
+        </p:nvCxnSpPr>
+        <p:spPr>
+          <a:xfrm>
+            <a:off x="5233699" y="2436639"/>
+            <a:ext cx="0" cy="418097"/>
+          </a:xfrm>
+          <a:prstGeom prst="line">
+            <a:avLst/>
+          </a:prstGeom>
+          <a:ln>
+            <a:solidFill>
+              <a:srgbClr val="0070C0"/>
+            </a:solidFill>
+          </a:ln>
+        </p:spPr>
+        <p:style>
+          <a:lnRef idx="1">
+            <a:schemeClr val="accent1"/>
+          </a:lnRef>
+          <a:fillRef idx="0">
+            <a:schemeClr val="accent1"/>
+          </a:fillRef>
+          <a:effectRef idx="0">
+            <a:schemeClr val="accent1"/>
+          </a:effectRef>
+          <a:fontRef idx="minor">
+            <a:schemeClr val="tx1"/>
+          </a:fontRef>
+        </p:style>
+      </p:cxnSp>
+      <p:cxnSp>
+        <p:nvCxnSpPr>
+          <p:cNvPr id="83" name="Straight Connector 82">
+            <a:extLst>
+              <a:ext uri="{FF2B5EF4-FFF2-40B4-BE49-F238E27FC236}">
+                <a16:creationId xmlns:a16="http://schemas.microsoft.com/office/drawing/2014/main" id="{C9D3C339-9B9C-280D-0F40-EC917F044496}"/>
+              </a:ext>
+            </a:extLst>
+          </p:cNvPr>
+          <p:cNvCxnSpPr>
+            <a:cxnSpLocks/>
+          </p:cNvCxnSpPr>
+          <p:nvPr/>
+        </p:nvCxnSpPr>
+        <p:spPr>
+          <a:xfrm>
+            <a:off x="3712441" y="2115458"/>
+            <a:ext cx="635650" cy="0"/>
+          </a:xfrm>
+          <a:prstGeom prst="line">
+            <a:avLst/>
+          </a:prstGeom>
+          <a:ln>
+            <a:solidFill>
+              <a:srgbClr val="00B050"/>
+            </a:solidFill>
+          </a:ln>
+        </p:spPr>
+        <p:style>
+          <a:lnRef idx="1">
+            <a:schemeClr val="accent1"/>
+          </a:lnRef>
+          <a:fillRef idx="0">
+            <a:schemeClr val="accent1"/>
+          </a:fillRef>
+          <a:effectRef idx="0">
+            <a:schemeClr val="accent1"/>
+          </a:effectRef>
+          <a:fontRef idx="minor">
+            <a:schemeClr val="tx1"/>
+          </a:fontRef>
+        </p:style>
+      </p:cxnSp>
+      <p:cxnSp>
+        <p:nvCxnSpPr>
+          <p:cNvPr id="85" name="Straight Connector 84">
+            <a:extLst>
+              <a:ext uri="{FF2B5EF4-FFF2-40B4-BE49-F238E27FC236}">
+                <a16:creationId xmlns:a16="http://schemas.microsoft.com/office/drawing/2014/main" id="{01486EB0-0D0B-8958-5905-68AA13DE42F8}"/>
+              </a:ext>
+            </a:extLst>
+          </p:cNvPr>
+          <p:cNvCxnSpPr>
+            <a:cxnSpLocks/>
+          </p:cNvCxnSpPr>
+          <p:nvPr/>
+        </p:nvCxnSpPr>
+        <p:spPr>
+          <a:xfrm>
+            <a:off x="6439448" y="2802356"/>
+            <a:ext cx="0" cy="748970"/>
+          </a:xfrm>
+          <a:prstGeom prst="line">
+            <a:avLst/>
+          </a:prstGeom>
+          <a:ln>
+            <a:solidFill>
+              <a:srgbClr val="00B050"/>
+            </a:solidFill>
+          </a:ln>
+        </p:spPr>
+        <p:style>
+          <a:lnRef idx="1">
+            <a:schemeClr val="accent1"/>
+          </a:lnRef>
+          <a:fillRef idx="0">
+            <a:schemeClr val="accent1"/>
+          </a:fillRef>
+          <a:effectRef idx="0">
+            <a:schemeClr val="accent1"/>
+          </a:effectRef>
+          <a:fontRef idx="minor">
+            <a:schemeClr val="tx1"/>
+          </a:fontRef>
+        </p:style>
+      </p:cxnSp>
+      <p:cxnSp>
+        <p:nvCxnSpPr>
+          <p:cNvPr id="86" name="Straight Connector 85">
+            <a:extLst>
+              <a:ext uri="{FF2B5EF4-FFF2-40B4-BE49-F238E27FC236}">
+                <a16:creationId xmlns:a16="http://schemas.microsoft.com/office/drawing/2014/main" id="{40756577-0321-22B1-E4B5-C73A623AC834}"/>
+              </a:ext>
+            </a:extLst>
+          </p:cNvPr>
+          <p:cNvCxnSpPr>
+            <a:cxnSpLocks/>
+          </p:cNvCxnSpPr>
+          <p:nvPr/>
+        </p:nvCxnSpPr>
+        <p:spPr>
+          <a:xfrm>
+            <a:off x="4348092" y="2115458"/>
+            <a:ext cx="0" cy="663738"/>
+          </a:xfrm>
+          <a:prstGeom prst="line">
+            <a:avLst/>
+          </a:prstGeom>
+          <a:ln>
+            <a:solidFill>
+              <a:srgbClr val="00B050"/>
+            </a:solidFill>
+          </a:ln>
+        </p:spPr>
+        <p:style>
+          <a:lnRef idx="1">
+            <a:schemeClr val="accent1"/>
+          </a:lnRef>
+          <a:fillRef idx="0">
+            <a:schemeClr val="accent1"/>
+          </a:fillRef>
+          <a:effectRef idx="0">
+            <a:schemeClr val="accent1"/>
+          </a:effectRef>
+          <a:fontRef idx="minor">
+            <a:schemeClr val="tx1"/>
+          </a:fontRef>
+        </p:style>
+      </p:cxnSp>
+      <p:cxnSp>
+        <p:nvCxnSpPr>
+          <p:cNvPr id="89" name="Straight Connector 88">
+            <a:extLst>
+              <a:ext uri="{FF2B5EF4-FFF2-40B4-BE49-F238E27FC236}">
+                <a16:creationId xmlns:a16="http://schemas.microsoft.com/office/drawing/2014/main" id="{E40798BB-6454-B514-907C-F098EC49B74C}"/>
+              </a:ext>
+            </a:extLst>
+          </p:cNvPr>
+          <p:cNvCxnSpPr>
+            <a:cxnSpLocks/>
+          </p:cNvCxnSpPr>
+          <p:nvPr/>
+        </p:nvCxnSpPr>
+        <p:spPr>
+          <a:xfrm>
+            <a:off x="4348091" y="2779197"/>
+            <a:ext cx="2101221" cy="23160"/>
+          </a:xfrm>
+          <a:prstGeom prst="line">
+            <a:avLst/>
+          </a:prstGeom>
+          <a:ln>
+            <a:solidFill>
+              <a:srgbClr val="00B050"/>
+            </a:solidFill>
+          </a:ln>
+        </p:spPr>
+        <p:style>
+          <a:lnRef idx="1">
+            <a:schemeClr val="accent1"/>
+          </a:lnRef>
+          <a:fillRef idx="0">
+            <a:schemeClr val="accent1"/>
+          </a:fillRef>
+          <a:effectRef idx="0">
+            <a:schemeClr val="accent1"/>
+          </a:effectRef>
+          <a:fontRef idx="minor">
+            <a:schemeClr val="tx1"/>
+          </a:fontRef>
+        </p:style>
+      </p:cxnSp>
+      <p:cxnSp>
+        <p:nvCxnSpPr>
+          <p:cNvPr id="95" name="Straight Connector 94">
+            <a:extLst>
+              <a:ext uri="{FF2B5EF4-FFF2-40B4-BE49-F238E27FC236}">
+                <a16:creationId xmlns:a16="http://schemas.microsoft.com/office/drawing/2014/main" id="{FA500742-0E21-0B1F-4139-36DD2315F908}"/>
+              </a:ext>
+            </a:extLst>
+          </p:cNvPr>
+          <p:cNvCxnSpPr>
+            <a:cxnSpLocks/>
+          </p:cNvCxnSpPr>
+          <p:nvPr/>
+        </p:nvCxnSpPr>
+        <p:spPr>
+          <a:xfrm>
+            <a:off x="3712441" y="2233457"/>
+            <a:ext cx="438459" cy="0"/>
+          </a:xfrm>
+          <a:prstGeom prst="line">
+            <a:avLst/>
+          </a:prstGeom>
+          <a:ln>
+            <a:solidFill>
+              <a:schemeClr val="tx1"/>
+            </a:solidFill>
+          </a:ln>
+        </p:spPr>
+        <p:style>
+          <a:lnRef idx="1">
+            <a:schemeClr val="accent1"/>
+          </a:lnRef>
+          <a:fillRef idx="0">
+            <a:schemeClr val="accent1"/>
+          </a:fillRef>
+          <a:effectRef idx="0">
+            <a:schemeClr val="accent1"/>
+          </a:effectRef>
+          <a:fontRef idx="minor">
+            <a:schemeClr val="tx1"/>
+          </a:fontRef>
+        </p:style>
+      </p:cxnSp>
+      <p:cxnSp>
+        <p:nvCxnSpPr>
+          <p:cNvPr id="97" name="Straight Connector 96">
+            <a:extLst>
+              <a:ext uri="{FF2B5EF4-FFF2-40B4-BE49-F238E27FC236}">
+                <a16:creationId xmlns:a16="http://schemas.microsoft.com/office/drawing/2014/main" id="{12042ED1-D8A5-D6CA-9ABA-81BC0AA78046}"/>
+              </a:ext>
+            </a:extLst>
+          </p:cNvPr>
+          <p:cNvCxnSpPr>
+            <a:cxnSpLocks/>
+          </p:cNvCxnSpPr>
+          <p:nvPr/>
+        </p:nvCxnSpPr>
+        <p:spPr>
+          <a:xfrm>
+            <a:off x="4150900" y="2233457"/>
+            <a:ext cx="0" cy="679970"/>
+          </a:xfrm>
+          <a:prstGeom prst="line">
+            <a:avLst/>
+          </a:prstGeom>
+          <a:ln>
+            <a:solidFill>
+              <a:schemeClr val="tx1"/>
+            </a:solidFill>
+          </a:ln>
+        </p:spPr>
+        <p:style>
+          <a:lnRef idx="1">
+            <a:schemeClr val="accent1"/>
+          </a:lnRef>
+          <a:fillRef idx="0">
+            <a:schemeClr val="accent1"/>
+          </a:fillRef>
+          <a:effectRef idx="0">
+            <a:schemeClr val="accent1"/>
+          </a:effectRef>
+          <a:fontRef idx="minor">
+            <a:schemeClr val="tx1"/>
+          </a:fontRef>
+        </p:style>
+      </p:cxnSp>
+      <p:cxnSp>
+        <p:nvCxnSpPr>
+          <p:cNvPr id="100" name="Straight Connector 99">
+            <a:extLst>
+              <a:ext uri="{FF2B5EF4-FFF2-40B4-BE49-F238E27FC236}">
+                <a16:creationId xmlns:a16="http://schemas.microsoft.com/office/drawing/2014/main" id="{1638109D-4F19-E80F-1BE5-BE320C4AD93B}"/>
+              </a:ext>
+            </a:extLst>
+          </p:cNvPr>
+          <p:cNvCxnSpPr>
+            <a:cxnSpLocks/>
+          </p:cNvCxnSpPr>
+          <p:nvPr/>
+        </p:nvCxnSpPr>
+        <p:spPr>
+          <a:xfrm>
+            <a:off x="4157533" y="2901954"/>
+            <a:ext cx="2116266" cy="18787"/>
+          </a:xfrm>
+          <a:prstGeom prst="line">
+            <a:avLst/>
+          </a:prstGeom>
+          <a:ln/>
+        </p:spPr>
+        <p:style>
+          <a:lnRef idx="1">
+            <a:schemeClr val="dk1"/>
+          </a:lnRef>
+          <a:fillRef idx="0">
+            <a:schemeClr val="dk1"/>
+          </a:fillRef>
+          <a:effectRef idx="0">
+            <a:schemeClr val="dk1"/>
+          </a:effectRef>
+          <a:fontRef idx="minor">
+            <a:schemeClr val="tx1"/>
+          </a:fontRef>
+        </p:style>
+      </p:cxnSp>
+      <p:cxnSp>
+        <p:nvCxnSpPr>
+          <p:cNvPr id="109" name="Straight Connector 108">
+            <a:extLst>
+              <a:ext uri="{FF2B5EF4-FFF2-40B4-BE49-F238E27FC236}">
+                <a16:creationId xmlns:a16="http://schemas.microsoft.com/office/drawing/2014/main" id="{2B7CE8E2-BE27-EA7C-786B-A2D3BEF526C2}"/>
+              </a:ext>
+            </a:extLst>
+          </p:cNvPr>
+          <p:cNvCxnSpPr>
+            <a:cxnSpLocks/>
+          </p:cNvCxnSpPr>
+          <p:nvPr/>
+        </p:nvCxnSpPr>
+        <p:spPr>
+          <a:xfrm flipH="1">
+            <a:off x="2983779" y="2284984"/>
+            <a:ext cx="400607" cy="0"/>
+          </a:xfrm>
+          <a:prstGeom prst="line">
+            <a:avLst/>
+          </a:prstGeom>
+        </p:spPr>
+        <p:style>
+          <a:lnRef idx="1">
+            <a:schemeClr val="dk1"/>
+          </a:lnRef>
+          <a:fillRef idx="0">
+            <a:schemeClr val="dk1"/>
+          </a:fillRef>
+          <a:effectRef idx="0">
+            <a:schemeClr val="dk1"/>
+          </a:effectRef>
+          <a:fontRef idx="minor">
+            <a:schemeClr val="tx1"/>
+          </a:fontRef>
+        </p:style>
+      </p:cxnSp>
+      <p:sp>
+        <p:nvSpPr>
+          <p:cNvPr id="111" name="TextBox 110">
+            <a:extLst>
+              <a:ext uri="{FF2B5EF4-FFF2-40B4-BE49-F238E27FC236}">
+                <a16:creationId xmlns:a16="http://schemas.microsoft.com/office/drawing/2014/main" id="{421AFEC0-C15F-EDAF-D3CD-E9CA1803B3EE}"/>
+              </a:ext>
+            </a:extLst>
+          </p:cNvPr>
+          <p:cNvSpPr txBox="1"/>
+          <p:nvPr/>
+        </p:nvSpPr>
+        <p:spPr>
+          <a:xfrm>
+            <a:off x="2200917" y="2364090"/>
+            <a:ext cx="494729" cy="291890"/>
+          </a:xfrm>
+          <a:prstGeom prst="rect">
+            <a:avLst/>
+          </a:prstGeom>
+          <a:noFill/>
+        </p:spPr>
+        <p:txBody>
+          <a:bodyPr wrap="square" rtlCol="0">
+            <a:spAutoFit/>
+          </a:bodyPr>
+          <a:lstStyle/>
+          <a:p>
+            <a:pPr algn="ctr"/>
+            <a:r>
+              <a:rPr lang="fr-FR" sz="1100" dirty="0"/>
+              <a:t>PC</a:t>
+            </a:r>
+          </a:p>
+        </p:txBody>
+      </p:sp>
+      <p:sp>
+        <p:nvSpPr>
+          <p:cNvPr id="113" name="TextBox 112">
+            <a:extLst>
+              <a:ext uri="{FF2B5EF4-FFF2-40B4-BE49-F238E27FC236}">
+                <a16:creationId xmlns:a16="http://schemas.microsoft.com/office/drawing/2014/main" id="{07AC3D74-1B99-2A9F-0F70-7334A5E5A4AF}"/>
+              </a:ext>
+            </a:extLst>
+          </p:cNvPr>
+          <p:cNvSpPr txBox="1"/>
+          <p:nvPr/>
+        </p:nvSpPr>
+        <p:spPr>
+          <a:xfrm>
+            <a:off x="2810234" y="1710494"/>
+            <a:ext cx="1649660" cy="309060"/>
+          </a:xfrm>
+          <a:prstGeom prst="rect">
+            <a:avLst/>
+          </a:prstGeom>
+          <a:noFill/>
+        </p:spPr>
+        <p:txBody>
+          <a:bodyPr wrap="square">
+            <a:spAutoFit/>
+          </a:bodyPr>
+          <a:lstStyle/>
+          <a:p>
+            <a:pPr algn="ctr"/>
+            <a:r>
+              <a:rPr lang="fr-FR" sz="1200" dirty="0"/>
+              <a:t>Carte acquisition</a:t>
+            </a:r>
+          </a:p>
+        </p:txBody>
+      </p:sp>
+      <p:sp>
+        <p:nvSpPr>
+          <p:cNvPr id="114" name="TextBox 113">
+            <a:extLst>
+              <a:ext uri="{FF2B5EF4-FFF2-40B4-BE49-F238E27FC236}">
+                <a16:creationId xmlns:a16="http://schemas.microsoft.com/office/drawing/2014/main" id="{25B617B6-1494-C294-9287-9D5835E5AF15}"/>
+              </a:ext>
+            </a:extLst>
+          </p:cNvPr>
+          <p:cNvSpPr txBox="1"/>
+          <p:nvPr/>
+        </p:nvSpPr>
+        <p:spPr>
+          <a:xfrm>
+            <a:off x="5339452" y="1259649"/>
+            <a:ext cx="1649660" cy="309060"/>
+          </a:xfrm>
+          <a:prstGeom prst="rect">
+            <a:avLst/>
+          </a:prstGeom>
+          <a:noFill/>
+        </p:spPr>
+        <p:txBody>
+          <a:bodyPr wrap="square">
+            <a:spAutoFit/>
+          </a:bodyPr>
+          <a:lstStyle/>
+          <a:p>
+            <a:pPr algn="ctr"/>
+            <a:r>
+              <a:rPr lang="fr-FR" sz="1200" dirty="0"/>
+              <a:t>Oscilloscope</a:t>
+            </a:r>
+          </a:p>
+        </p:txBody>
+      </p:sp>
+      <p:sp>
+        <p:nvSpPr>
+          <p:cNvPr id="13" name="TextBox 12">
+            <a:extLst>
+              <a:ext uri="{FF2B5EF4-FFF2-40B4-BE49-F238E27FC236}">
+                <a16:creationId xmlns:a16="http://schemas.microsoft.com/office/drawing/2014/main" id="{98E96F94-DE17-9425-E478-BB63E0DEBD99}"/>
+              </a:ext>
+            </a:extLst>
+          </p:cNvPr>
+          <p:cNvSpPr txBox="1"/>
+          <p:nvPr/>
+        </p:nvSpPr>
+        <p:spPr>
+          <a:xfrm>
+            <a:off x="7412937" y="3221774"/>
+            <a:ext cx="1049654" cy="276999"/>
+          </a:xfrm>
+          <a:prstGeom prst="rect">
+            <a:avLst/>
+          </a:prstGeom>
+          <a:noFill/>
+        </p:spPr>
+        <p:txBody>
+          <a:bodyPr wrap="square">
+            <a:spAutoFit/>
+          </a:bodyPr>
+          <a:lstStyle/>
+          <a:p>
+            <a:pPr algn="ctr"/>
+            <a:r>
+              <a:rPr lang="fr-FR" sz="1200" dirty="0"/>
+              <a:t>Bloc Vibrato</a:t>
+            </a:r>
+          </a:p>
+        </p:txBody>
+      </p:sp>
+      <p:sp>
+        <p:nvSpPr>
+          <p:cNvPr id="14" name="TextBox 13">
+            <a:extLst>
+              <a:ext uri="{FF2B5EF4-FFF2-40B4-BE49-F238E27FC236}">
+                <a16:creationId xmlns:a16="http://schemas.microsoft.com/office/drawing/2014/main" id="{459BD377-5E1F-20F0-E82D-B1869232C333}"/>
+              </a:ext>
+            </a:extLst>
+          </p:cNvPr>
+          <p:cNvSpPr txBox="1"/>
+          <p:nvPr/>
+        </p:nvSpPr>
+        <p:spPr>
+          <a:xfrm>
+            <a:off x="7171997" y="2945096"/>
+            <a:ext cx="1296140" cy="276999"/>
+          </a:xfrm>
+          <a:prstGeom prst="rect">
+            <a:avLst/>
+          </a:prstGeom>
+          <a:noFill/>
+        </p:spPr>
+        <p:txBody>
+          <a:bodyPr wrap="square">
+            <a:spAutoFit/>
+          </a:bodyPr>
+          <a:lstStyle/>
+          <a:p>
+            <a:pPr algn="ctr"/>
+            <a:r>
+              <a:rPr lang="fr-FR" sz="1200" dirty="0"/>
+              <a:t>Micro </a:t>
+            </a:r>
+            <a:r>
+              <a:rPr lang="fr-FR" sz="1200" dirty="0" err="1"/>
+              <a:t>SingleCoil</a:t>
+            </a:r>
+            <a:endParaRPr lang="fr-FR" sz="1200" dirty="0"/>
+          </a:p>
+        </p:txBody>
+      </p:sp>
+      <p:sp>
+        <p:nvSpPr>
+          <p:cNvPr id="18" name="TextBox 17">
+            <a:extLst>
+              <a:ext uri="{FF2B5EF4-FFF2-40B4-BE49-F238E27FC236}">
+                <a16:creationId xmlns:a16="http://schemas.microsoft.com/office/drawing/2014/main" id="{083555BA-3574-E5E2-1D96-6BBF3F582FBC}"/>
+              </a:ext>
+            </a:extLst>
+          </p:cNvPr>
+          <p:cNvSpPr txBox="1"/>
+          <p:nvPr/>
+        </p:nvSpPr>
+        <p:spPr>
+          <a:xfrm>
+            <a:off x="4645725" y="3092763"/>
+            <a:ext cx="1653952" cy="276999"/>
+          </a:xfrm>
+          <a:prstGeom prst="rect">
+            <a:avLst/>
+          </a:prstGeom>
+          <a:noFill/>
+        </p:spPr>
+        <p:txBody>
+          <a:bodyPr wrap="square">
+            <a:spAutoFit/>
+          </a:bodyPr>
+          <a:lstStyle/>
+          <a:p>
+            <a:pPr algn="ctr"/>
+            <a:r>
+              <a:rPr lang="fr-FR" sz="1200" dirty="0"/>
+              <a:t>Micro Humbucker</a:t>
+            </a:r>
+          </a:p>
+        </p:txBody>
+      </p:sp>
+      <p:sp>
+        <p:nvSpPr>
+          <p:cNvPr id="21" name="TextBox 20">
+            <a:extLst>
+              <a:ext uri="{FF2B5EF4-FFF2-40B4-BE49-F238E27FC236}">
+                <a16:creationId xmlns:a16="http://schemas.microsoft.com/office/drawing/2014/main" id="{D1A318D3-D710-4EC3-037E-0E73F9189039}"/>
+              </a:ext>
+            </a:extLst>
+          </p:cNvPr>
+          <p:cNvSpPr txBox="1"/>
+          <p:nvPr/>
+        </p:nvSpPr>
+        <p:spPr>
+          <a:xfrm>
+            <a:off x="492975" y="3022345"/>
+            <a:ext cx="942141" cy="276999"/>
+          </a:xfrm>
+          <a:prstGeom prst="rect">
+            <a:avLst/>
+          </a:prstGeom>
+          <a:noFill/>
+        </p:spPr>
+        <p:txBody>
+          <a:bodyPr wrap="square">
+            <a:spAutoFit/>
+          </a:bodyPr>
+          <a:lstStyle/>
+          <a:p>
+            <a:pPr algn="ctr"/>
+            <a:r>
+              <a:rPr lang="fr-FR" sz="1200" dirty="0"/>
+              <a:t>Mécanique</a:t>
+            </a:r>
+          </a:p>
+        </p:txBody>
+      </p:sp>
+      <p:cxnSp>
+        <p:nvCxnSpPr>
+          <p:cNvPr id="23" name="Connector: Elbow 22">
+            <a:extLst>
+              <a:ext uri="{FF2B5EF4-FFF2-40B4-BE49-F238E27FC236}">
+                <a16:creationId xmlns:a16="http://schemas.microsoft.com/office/drawing/2014/main" id="{3BA8D0EA-EC8E-3F19-6246-1D42CDD73009}"/>
+              </a:ext>
+            </a:extLst>
+          </p:cNvPr>
+          <p:cNvCxnSpPr>
+            <a:cxnSpLocks/>
+            <a:stCxn id="21" idx="2"/>
+          </p:cNvCxnSpPr>
+          <p:nvPr/>
+        </p:nvCxnSpPr>
+        <p:spPr>
+          <a:xfrm rot="16200000" flipH="1">
+            <a:off x="939847" y="3323543"/>
+            <a:ext cx="685116" cy="636718"/>
+          </a:xfrm>
+          <a:prstGeom prst="bentConnector3">
+            <a:avLst>
+              <a:gd name="adj1" fmla="val 99905"/>
+            </a:avLst>
+          </a:prstGeom>
+          <a:ln>
+            <a:tailEnd type="triangle"/>
+          </a:ln>
+        </p:spPr>
+        <p:style>
+          <a:lnRef idx="1">
+            <a:schemeClr val="dk1"/>
+          </a:lnRef>
+          <a:fillRef idx="0">
+            <a:schemeClr val="dk1"/>
+          </a:fillRef>
+          <a:effectRef idx="0">
+            <a:schemeClr val="dk1"/>
+          </a:effectRef>
+          <a:fontRef idx="minor">
+            <a:schemeClr val="tx1"/>
+          </a:fontRef>
+        </p:style>
+      </p:cxnSp>
+      <p:cxnSp>
+        <p:nvCxnSpPr>
+          <p:cNvPr id="31" name="Connector: Elbow 30">
+            <a:extLst>
+              <a:ext uri="{FF2B5EF4-FFF2-40B4-BE49-F238E27FC236}">
+                <a16:creationId xmlns:a16="http://schemas.microsoft.com/office/drawing/2014/main" id="{C274247C-D906-9B23-21F1-2EE1985F6860}"/>
+              </a:ext>
+            </a:extLst>
+          </p:cNvPr>
+          <p:cNvCxnSpPr>
+            <a:cxnSpLocks/>
+            <a:stCxn id="18" idx="2"/>
+          </p:cNvCxnSpPr>
+          <p:nvPr/>
+        </p:nvCxnSpPr>
+        <p:spPr>
+          <a:xfrm rot="16200000" flipH="1">
+            <a:off x="5567470" y="3274992"/>
+            <a:ext cx="345520" cy="535059"/>
+          </a:xfrm>
+          <a:prstGeom prst="bentConnector2">
+            <a:avLst/>
+          </a:prstGeom>
+          <a:ln>
+            <a:tailEnd type="triangle"/>
+          </a:ln>
+        </p:spPr>
+        <p:style>
+          <a:lnRef idx="1">
+            <a:schemeClr val="dk1"/>
+          </a:lnRef>
+          <a:fillRef idx="0">
+            <a:schemeClr val="dk1"/>
+          </a:fillRef>
+          <a:effectRef idx="0">
+            <a:schemeClr val="dk1"/>
+          </a:effectRef>
+          <a:fontRef idx="minor">
+            <a:schemeClr val="tx1"/>
+          </a:fontRef>
+        </p:style>
+      </p:cxnSp>
+      <p:cxnSp>
+        <p:nvCxnSpPr>
+          <p:cNvPr id="35" name="Connector: Elbow 34">
+            <a:extLst>
+              <a:ext uri="{FF2B5EF4-FFF2-40B4-BE49-F238E27FC236}">
+                <a16:creationId xmlns:a16="http://schemas.microsoft.com/office/drawing/2014/main" id="{AA86542A-3169-7113-A44E-D9FAC6B6848A}"/>
+              </a:ext>
+            </a:extLst>
+          </p:cNvPr>
+          <p:cNvCxnSpPr>
+            <a:cxnSpLocks/>
+            <a:stCxn id="14" idx="1"/>
+          </p:cNvCxnSpPr>
+          <p:nvPr/>
+        </p:nvCxnSpPr>
+        <p:spPr>
+          <a:xfrm rot="10800000" flipV="1">
+            <a:off x="6468437" y="3083596"/>
+            <a:ext cx="703561" cy="671912"/>
+          </a:xfrm>
+          <a:prstGeom prst="bentConnector3">
+            <a:avLst>
+              <a:gd name="adj1" fmla="val 50000"/>
+            </a:avLst>
+          </a:prstGeom>
+          <a:ln>
+            <a:tailEnd type="triangle"/>
+          </a:ln>
+        </p:spPr>
+        <p:style>
+          <a:lnRef idx="1">
+            <a:schemeClr val="dk1"/>
+          </a:lnRef>
+          <a:fillRef idx="0">
+            <a:schemeClr val="dk1"/>
+          </a:fillRef>
+          <a:effectRef idx="0">
+            <a:schemeClr val="dk1"/>
+          </a:effectRef>
+          <a:fontRef idx="minor">
+            <a:schemeClr val="tx1"/>
+          </a:fontRef>
+        </p:style>
+      </p:cxnSp>
+      <p:cxnSp>
+        <p:nvCxnSpPr>
+          <p:cNvPr id="43" name="Connector: Elbow 42">
+            <a:extLst>
+              <a:ext uri="{FF2B5EF4-FFF2-40B4-BE49-F238E27FC236}">
+                <a16:creationId xmlns:a16="http://schemas.microsoft.com/office/drawing/2014/main" id="{7C26DD00-4B34-7016-6AC6-71FB94B52CCF}"/>
+              </a:ext>
+            </a:extLst>
+          </p:cNvPr>
+          <p:cNvCxnSpPr>
+            <a:cxnSpLocks/>
+            <a:stCxn id="13" idx="1"/>
+          </p:cNvCxnSpPr>
+          <p:nvPr/>
+        </p:nvCxnSpPr>
+        <p:spPr>
+          <a:xfrm rot="10800000" flipV="1">
+            <a:off x="7046595" y="3360274"/>
+            <a:ext cx="366342" cy="247808"/>
+          </a:xfrm>
+          <a:prstGeom prst="bentConnector3">
+            <a:avLst>
+              <a:gd name="adj1" fmla="val 99921"/>
+            </a:avLst>
+          </a:prstGeom>
+          <a:ln>
+            <a:tailEnd type="triangle"/>
+          </a:ln>
+        </p:spPr>
+        <p:style>
+          <a:lnRef idx="1">
+            <a:schemeClr val="dk1"/>
+          </a:lnRef>
+          <a:fillRef idx="0">
+            <a:schemeClr val="dk1"/>
+          </a:fillRef>
+          <a:effectRef idx="0">
+            <a:schemeClr val="dk1"/>
+          </a:effectRef>
+          <a:fontRef idx="minor">
+            <a:schemeClr val="tx1"/>
+          </a:fontRef>
+        </p:style>
+      </p:cxnSp>
+      <p:sp>
+        <p:nvSpPr>
+          <p:cNvPr id="52" name="TextBox 51">
+            <a:extLst>
+              <a:ext uri="{FF2B5EF4-FFF2-40B4-BE49-F238E27FC236}">
+                <a16:creationId xmlns:a16="http://schemas.microsoft.com/office/drawing/2014/main" id="{73E6ED65-3FC3-90CA-31FD-2B16EA3FB47B}"/>
+              </a:ext>
+            </a:extLst>
+          </p:cNvPr>
+          <p:cNvSpPr txBox="1"/>
+          <p:nvPr/>
+        </p:nvSpPr>
+        <p:spPr>
+          <a:xfrm>
+            <a:off x="2915256" y="3215499"/>
+            <a:ext cx="633157" cy="276999"/>
+          </a:xfrm>
+          <a:prstGeom prst="rect">
+            <a:avLst/>
+          </a:prstGeom>
+          <a:noFill/>
+        </p:spPr>
+        <p:txBody>
+          <a:bodyPr wrap="square">
+            <a:spAutoFit/>
+          </a:bodyPr>
+          <a:lstStyle/>
+          <a:p>
+            <a:pPr algn="ctr"/>
+            <a:r>
+              <a:rPr lang="fr-FR" sz="1200" dirty="0"/>
+              <a:t>Corde</a:t>
+            </a:r>
+          </a:p>
+        </p:txBody>
+      </p:sp>
+      <p:cxnSp>
+        <p:nvCxnSpPr>
+          <p:cNvPr id="53" name="Connector: Elbow 52">
+            <a:extLst>
+              <a:ext uri="{FF2B5EF4-FFF2-40B4-BE49-F238E27FC236}">
+                <a16:creationId xmlns:a16="http://schemas.microsoft.com/office/drawing/2014/main" id="{5C4601E3-24F9-A62F-BE91-52F3A7AA8ABC}"/>
+              </a:ext>
+            </a:extLst>
+          </p:cNvPr>
+          <p:cNvCxnSpPr>
+            <a:cxnSpLocks/>
+            <a:stCxn id="52" idx="3"/>
+          </p:cNvCxnSpPr>
+          <p:nvPr/>
+        </p:nvCxnSpPr>
+        <p:spPr>
+          <a:xfrm>
+            <a:off x="3548413" y="3353999"/>
+            <a:ext cx="274743" cy="555544"/>
+          </a:xfrm>
+          <a:prstGeom prst="bentConnector2">
+            <a:avLst/>
+          </a:prstGeom>
+          <a:ln>
+            <a:tailEnd type="triangle"/>
+          </a:ln>
+        </p:spPr>
+        <p:style>
+          <a:lnRef idx="1">
+            <a:schemeClr val="dk1"/>
+          </a:lnRef>
+          <a:fillRef idx="0">
+            <a:schemeClr val="dk1"/>
+          </a:fillRef>
+          <a:effectRef idx="0">
+            <a:schemeClr val="dk1"/>
+          </a:effectRef>
+          <a:fontRef idx="minor">
+            <a:schemeClr val="tx1"/>
+          </a:fontRef>
+        </p:style>
+      </p:cxnSp>
       <p:grpSp>
         <p:nvGrpSpPr>
-          <p:cNvPr id="57" name="Group 56">
+          <p:cNvPr id="10" name="Group 9">
             <a:extLst>
               <a:ext uri="{FF2B5EF4-FFF2-40B4-BE49-F238E27FC236}">
-                <a16:creationId xmlns:a16="http://schemas.microsoft.com/office/drawing/2014/main" id="{91200402-FF58-CD75-C6BE-09AAABD735E7}"/>
+                <a16:creationId xmlns:a16="http://schemas.microsoft.com/office/drawing/2014/main" id="{9A72E36D-D58A-2C4E-5157-8C5E862E339F}"/>
               </a:ext>
             </a:extLst>
           </p:cNvPr>
@@ -7408,7 +8776,7 @@
         </p:nvGrpSpPr>
         <p:grpSpPr>
           <a:xfrm>
-            <a:off x="6849792" y="3032198"/>
+            <a:off x="4778695" y="3501662"/>
             <a:ext cx="2135121" cy="629737"/>
             <a:chOff x="5078985" y="3438238"/>
             <a:chExt cx="2135121" cy="629737"/>
@@ -7416,10 +8784,10 @@
         </p:grpSpPr>
         <p:grpSp>
           <p:nvGrpSpPr>
-            <p:cNvPr id="54" name="Group 53">
+            <p:cNvPr id="27" name="Group 26">
               <a:extLst>
                 <a:ext uri="{FF2B5EF4-FFF2-40B4-BE49-F238E27FC236}">
-                  <a16:creationId xmlns:a16="http://schemas.microsoft.com/office/drawing/2014/main" id="{8AD45FAD-CA9A-7A67-1473-B08926A9FC10}"/>
+                  <a16:creationId xmlns:a16="http://schemas.microsoft.com/office/drawing/2014/main" id="{BA20091A-6EF5-C33A-4F95-0F78B87AD696}"/>
                 </a:ext>
               </a:extLst>
             </p:cNvPr>
@@ -7436,10 +8804,10 @@
           </p:grpSpPr>
           <p:sp>
             <p:nvSpPr>
-              <p:cNvPr id="22" name="Rectangle 21">
+              <p:cNvPr id="30" name="Rectangle 29">
                 <a:extLst>
                   <a:ext uri="{FF2B5EF4-FFF2-40B4-BE49-F238E27FC236}">
-                    <a16:creationId xmlns:a16="http://schemas.microsoft.com/office/drawing/2014/main" id="{F32FB9EC-FB62-0BBE-3635-833EE85C04B4}"/>
+                    <a16:creationId xmlns:a16="http://schemas.microsoft.com/office/drawing/2014/main" id="{1D5641F9-42A6-2E4C-5D2B-D7A32DF0A9CE}"/>
                   </a:ext>
                 </a:extLst>
               </p:cNvPr>
@@ -7488,10 +8856,10 @@
           </p:sp>
           <p:cxnSp>
             <p:nvCxnSpPr>
-              <p:cNvPr id="24" name="Straight Connector 23">
+              <p:cNvPr id="32" name="Straight Connector 31">
                 <a:extLst>
                   <a:ext uri="{FF2B5EF4-FFF2-40B4-BE49-F238E27FC236}">
-                    <a16:creationId xmlns:a16="http://schemas.microsoft.com/office/drawing/2014/main" id="{F4CE526B-C7B7-5965-8A5B-23CEC40E11DD}"/>
+                    <a16:creationId xmlns:a16="http://schemas.microsoft.com/office/drawing/2014/main" id="{57BCA6D6-FA50-EFA5-4B75-CAFA4DAFA90B}"/>
                   </a:ext>
                 </a:extLst>
               </p:cNvPr>
@@ -7529,10 +8897,10 @@
           </p:cxnSp>
           <p:cxnSp>
             <p:nvCxnSpPr>
-              <p:cNvPr id="25" name="Straight Connector 24">
+              <p:cNvPr id="33" name="Straight Connector 32">
                 <a:extLst>
                   <a:ext uri="{FF2B5EF4-FFF2-40B4-BE49-F238E27FC236}">
-                    <a16:creationId xmlns:a16="http://schemas.microsoft.com/office/drawing/2014/main" id="{640A5E00-828F-9433-84B2-94C228A8E334}"/>
+                    <a16:creationId xmlns:a16="http://schemas.microsoft.com/office/drawing/2014/main" id="{ABB44C34-2501-5A10-4D85-F1320D220AB0}"/>
                   </a:ext>
                 </a:extLst>
               </p:cNvPr>
@@ -7570,10 +8938,10 @@
           </p:cxnSp>
           <p:cxnSp>
             <p:nvCxnSpPr>
-              <p:cNvPr id="26" name="Straight Connector 25">
+              <p:cNvPr id="34" name="Straight Connector 33">
                 <a:extLst>
                   <a:ext uri="{FF2B5EF4-FFF2-40B4-BE49-F238E27FC236}">
-                    <a16:creationId xmlns:a16="http://schemas.microsoft.com/office/drawing/2014/main" id="{F7323253-CAAB-84B6-3CE1-A355AA5AF0E6}"/>
+                    <a16:creationId xmlns:a16="http://schemas.microsoft.com/office/drawing/2014/main" id="{A8718BAD-4933-19D1-2602-8C1E8D28BDC7}"/>
                   </a:ext>
                 </a:extLst>
               </p:cNvPr>
@@ -7611,10 +8979,10 @@
           </p:cxnSp>
           <p:cxnSp>
             <p:nvCxnSpPr>
-              <p:cNvPr id="27" name="Straight Connector 26">
+              <p:cNvPr id="36" name="Straight Connector 35">
                 <a:extLst>
                   <a:ext uri="{FF2B5EF4-FFF2-40B4-BE49-F238E27FC236}">
-                    <a16:creationId xmlns:a16="http://schemas.microsoft.com/office/drawing/2014/main" id="{4FCA6A60-9717-FA4E-FDD2-7FFA543287BB}"/>
+                    <a16:creationId xmlns:a16="http://schemas.microsoft.com/office/drawing/2014/main" id="{C5E5B4F9-1682-621C-8932-0D82AA051B04}"/>
                   </a:ext>
                 </a:extLst>
               </p:cNvPr>
@@ -7652,10 +9020,10 @@
           </p:cxnSp>
           <p:cxnSp>
             <p:nvCxnSpPr>
-              <p:cNvPr id="28" name="Straight Connector 27">
+              <p:cNvPr id="37" name="Straight Connector 36">
                 <a:extLst>
                   <a:ext uri="{FF2B5EF4-FFF2-40B4-BE49-F238E27FC236}">
-                    <a16:creationId xmlns:a16="http://schemas.microsoft.com/office/drawing/2014/main" id="{FB0CE6BC-88EC-65BD-D78A-0A52A691C584}"/>
+                    <a16:creationId xmlns:a16="http://schemas.microsoft.com/office/drawing/2014/main" id="{D1FC2046-A10A-A239-837E-B3C1448C4739}"/>
                   </a:ext>
                 </a:extLst>
               </p:cNvPr>
@@ -7693,10 +9061,10 @@
           </p:cxnSp>
           <p:cxnSp>
             <p:nvCxnSpPr>
-              <p:cNvPr id="29" name="Straight Connector 28">
+              <p:cNvPr id="38" name="Straight Connector 37">
                 <a:extLst>
                   <a:ext uri="{FF2B5EF4-FFF2-40B4-BE49-F238E27FC236}">
-                    <a16:creationId xmlns:a16="http://schemas.microsoft.com/office/drawing/2014/main" id="{59FC59CD-F71E-3DE2-1263-A0F6EAFC6246}"/>
+                    <a16:creationId xmlns:a16="http://schemas.microsoft.com/office/drawing/2014/main" id="{9545EB58-6B3E-ADE6-5D07-FFAEC90D6B41}"/>
                   </a:ext>
                 </a:extLst>
               </p:cNvPr>
@@ -7734,10 +9102,10 @@
           </p:cxnSp>
           <p:cxnSp>
             <p:nvCxnSpPr>
-              <p:cNvPr id="30" name="Straight Connector 29">
+              <p:cNvPr id="39" name="Straight Connector 38">
                 <a:extLst>
                   <a:ext uri="{FF2B5EF4-FFF2-40B4-BE49-F238E27FC236}">
-                    <a16:creationId xmlns:a16="http://schemas.microsoft.com/office/drawing/2014/main" id="{65181CDB-38F1-E9C9-0231-02972CAB93CA}"/>
+                    <a16:creationId xmlns:a16="http://schemas.microsoft.com/office/drawing/2014/main" id="{A34E0D56-FEC1-ACF2-6516-1C56632D26C4}"/>
                   </a:ext>
                 </a:extLst>
               </p:cNvPr>
@@ -7775,10 +9143,10 @@
           </p:cxnSp>
           <p:cxnSp>
             <p:nvCxnSpPr>
-              <p:cNvPr id="31" name="Straight Connector 30">
+              <p:cNvPr id="40" name="Straight Connector 39">
                 <a:extLst>
                   <a:ext uri="{FF2B5EF4-FFF2-40B4-BE49-F238E27FC236}">
-                    <a16:creationId xmlns:a16="http://schemas.microsoft.com/office/drawing/2014/main" id="{219ED1D8-B1A8-65CD-3B7D-20E3C10663B8}"/>
+                    <a16:creationId xmlns:a16="http://schemas.microsoft.com/office/drawing/2014/main" id="{C0082EA4-1935-7DF2-7139-8589A77F029C}"/>
                   </a:ext>
                 </a:extLst>
               </p:cNvPr>
@@ -7816,10 +9184,10 @@
           </p:cxnSp>
           <p:cxnSp>
             <p:nvCxnSpPr>
-              <p:cNvPr id="32" name="Straight Connector 31">
+              <p:cNvPr id="41" name="Straight Connector 40">
                 <a:extLst>
                   <a:ext uri="{FF2B5EF4-FFF2-40B4-BE49-F238E27FC236}">
-                    <a16:creationId xmlns:a16="http://schemas.microsoft.com/office/drawing/2014/main" id="{20FBF310-A56E-711D-12C1-CB788ACED06C}"/>
+                    <a16:creationId xmlns:a16="http://schemas.microsoft.com/office/drawing/2014/main" id="{EC1C035C-E55E-713D-3674-18CC91ABD1EA}"/>
                   </a:ext>
                 </a:extLst>
               </p:cNvPr>
@@ -7857,10 +9225,10 @@
           </p:cxnSp>
           <p:cxnSp>
             <p:nvCxnSpPr>
-              <p:cNvPr id="33" name="Straight Connector 32">
+              <p:cNvPr id="42" name="Straight Connector 41">
                 <a:extLst>
                   <a:ext uri="{FF2B5EF4-FFF2-40B4-BE49-F238E27FC236}">
-                    <a16:creationId xmlns:a16="http://schemas.microsoft.com/office/drawing/2014/main" id="{E33F292D-BD97-5B44-B7B8-223F65EBBB2A}"/>
+                    <a16:creationId xmlns:a16="http://schemas.microsoft.com/office/drawing/2014/main" id="{A75AFDAB-11D3-08B6-CDF8-705FD8EE15CB}"/>
                   </a:ext>
                 </a:extLst>
               </p:cNvPr>
@@ -7898,10 +9266,10 @@
           </p:cxnSp>
           <p:cxnSp>
             <p:nvCxnSpPr>
-              <p:cNvPr id="34" name="Straight Connector 33">
+              <p:cNvPr id="44" name="Straight Connector 43">
                 <a:extLst>
                   <a:ext uri="{FF2B5EF4-FFF2-40B4-BE49-F238E27FC236}">
-                    <a16:creationId xmlns:a16="http://schemas.microsoft.com/office/drawing/2014/main" id="{E94E6A3B-0D79-176E-9CB2-5FED00B887FC}"/>
+                    <a16:creationId xmlns:a16="http://schemas.microsoft.com/office/drawing/2014/main" id="{152A6491-E4D7-3AE3-F625-BF1B3662247B}"/>
                   </a:ext>
                 </a:extLst>
               </p:cNvPr>
@@ -7939,10 +9307,10 @@
           </p:cxnSp>
           <p:cxnSp>
             <p:nvCxnSpPr>
-              <p:cNvPr id="35" name="Straight Connector 34">
+              <p:cNvPr id="45" name="Straight Connector 44">
                 <a:extLst>
                   <a:ext uri="{FF2B5EF4-FFF2-40B4-BE49-F238E27FC236}">
-                    <a16:creationId xmlns:a16="http://schemas.microsoft.com/office/drawing/2014/main" id="{DE7ED7BD-4003-C50B-C269-3AC26B61DD09}"/>
+                    <a16:creationId xmlns:a16="http://schemas.microsoft.com/office/drawing/2014/main" id="{DFA71BBA-56FD-D6F5-8C2E-C9B38C947427}"/>
                   </a:ext>
                 </a:extLst>
               </p:cNvPr>
@@ -7980,10 +9348,10 @@
           </p:cxnSp>
           <p:cxnSp>
             <p:nvCxnSpPr>
-              <p:cNvPr id="36" name="Straight Connector 35">
+              <p:cNvPr id="46" name="Straight Connector 45">
                 <a:extLst>
                   <a:ext uri="{FF2B5EF4-FFF2-40B4-BE49-F238E27FC236}">
-                    <a16:creationId xmlns:a16="http://schemas.microsoft.com/office/drawing/2014/main" id="{21AB024A-C405-9FD0-2A21-44470537A5ED}"/>
+                    <a16:creationId xmlns:a16="http://schemas.microsoft.com/office/drawing/2014/main" id="{2CB8FEA4-281B-31C7-3CC4-59CB3161D44E}"/>
                   </a:ext>
                 </a:extLst>
               </p:cNvPr>
@@ -8021,10 +9389,10 @@
           </p:cxnSp>
           <p:cxnSp>
             <p:nvCxnSpPr>
-              <p:cNvPr id="37" name="Straight Connector 36">
+              <p:cNvPr id="47" name="Straight Connector 46">
                 <a:extLst>
                   <a:ext uri="{FF2B5EF4-FFF2-40B4-BE49-F238E27FC236}">
-                    <a16:creationId xmlns:a16="http://schemas.microsoft.com/office/drawing/2014/main" id="{32E512DD-0CBB-21B0-325D-00607F2FF849}"/>
+                    <a16:creationId xmlns:a16="http://schemas.microsoft.com/office/drawing/2014/main" id="{EB90DCCC-197F-EF67-8290-90442B465B6C}"/>
                   </a:ext>
                 </a:extLst>
               </p:cNvPr>
@@ -8062,10 +9430,10 @@
           </p:cxnSp>
           <p:cxnSp>
             <p:nvCxnSpPr>
-              <p:cNvPr id="38" name="Straight Connector 37">
+              <p:cNvPr id="48" name="Straight Connector 47">
                 <a:extLst>
                   <a:ext uri="{FF2B5EF4-FFF2-40B4-BE49-F238E27FC236}">
-                    <a16:creationId xmlns:a16="http://schemas.microsoft.com/office/drawing/2014/main" id="{A820C23E-FFBE-CF0A-93B9-B1BE951C4FFB}"/>
+                    <a16:creationId xmlns:a16="http://schemas.microsoft.com/office/drawing/2014/main" id="{E87DEE52-196E-B69B-36CC-77B215C5C301}"/>
                   </a:ext>
                 </a:extLst>
               </p:cNvPr>
@@ -8103,10 +9471,10 @@
           </p:cxnSp>
           <p:cxnSp>
             <p:nvCxnSpPr>
-              <p:cNvPr id="39" name="Straight Connector 38">
+              <p:cNvPr id="49" name="Straight Connector 48">
                 <a:extLst>
                   <a:ext uri="{FF2B5EF4-FFF2-40B4-BE49-F238E27FC236}">
-                    <a16:creationId xmlns:a16="http://schemas.microsoft.com/office/drawing/2014/main" id="{725A34C0-D060-C509-6C1C-EA74031011A1}"/>
+                    <a16:creationId xmlns:a16="http://schemas.microsoft.com/office/drawing/2014/main" id="{F9296B7A-D2A4-D503-79C6-C0E64498F45F}"/>
                   </a:ext>
                 </a:extLst>
               </p:cNvPr>
@@ -8144,10 +9512,10 @@
           </p:cxnSp>
           <p:cxnSp>
             <p:nvCxnSpPr>
-              <p:cNvPr id="40" name="Straight Connector 39">
+              <p:cNvPr id="50" name="Straight Connector 49">
                 <a:extLst>
                   <a:ext uri="{FF2B5EF4-FFF2-40B4-BE49-F238E27FC236}">
-                    <a16:creationId xmlns:a16="http://schemas.microsoft.com/office/drawing/2014/main" id="{5391525B-2552-AB02-F8CD-E31001DD1B89}"/>
+                    <a16:creationId xmlns:a16="http://schemas.microsoft.com/office/drawing/2014/main" id="{95273B0C-F241-C902-A950-29BCE45AB6E9}"/>
                   </a:ext>
                 </a:extLst>
               </p:cNvPr>
@@ -8185,10 +9553,10 @@
           </p:cxnSp>
           <p:cxnSp>
             <p:nvCxnSpPr>
-              <p:cNvPr id="41" name="Straight Connector 40">
+              <p:cNvPr id="51" name="Straight Connector 50">
                 <a:extLst>
                   <a:ext uri="{FF2B5EF4-FFF2-40B4-BE49-F238E27FC236}">
-                    <a16:creationId xmlns:a16="http://schemas.microsoft.com/office/drawing/2014/main" id="{477B0E3F-2996-2B13-3735-BBE87172035D}"/>
+                    <a16:creationId xmlns:a16="http://schemas.microsoft.com/office/drawing/2014/main" id="{ED61A98E-A6BF-314A-05F2-FDFFDC51B34A}"/>
                   </a:ext>
                 </a:extLst>
               </p:cNvPr>
@@ -8226,10 +9594,10 @@
           </p:cxnSp>
           <p:cxnSp>
             <p:nvCxnSpPr>
-              <p:cNvPr id="42" name="Straight Connector 41">
+              <p:cNvPr id="54" name="Straight Connector 53">
                 <a:extLst>
                   <a:ext uri="{FF2B5EF4-FFF2-40B4-BE49-F238E27FC236}">
-                    <a16:creationId xmlns:a16="http://schemas.microsoft.com/office/drawing/2014/main" id="{CAE3A217-3914-51BE-7A90-C1F74E328B78}"/>
+                    <a16:creationId xmlns:a16="http://schemas.microsoft.com/office/drawing/2014/main" id="{D495FD4F-D8FF-48A8-5F8E-E5E6DA59F281}"/>
                   </a:ext>
                 </a:extLst>
               </p:cNvPr>
@@ -8267,10 +9635,10 @@
           </p:cxnSp>
           <p:cxnSp>
             <p:nvCxnSpPr>
-              <p:cNvPr id="43" name="Straight Connector 42">
+              <p:cNvPr id="55" name="Straight Connector 54">
                 <a:extLst>
                   <a:ext uri="{FF2B5EF4-FFF2-40B4-BE49-F238E27FC236}">
-                    <a16:creationId xmlns:a16="http://schemas.microsoft.com/office/drawing/2014/main" id="{55ECD927-C128-FE8B-D8F2-8043127DB835}"/>
+                    <a16:creationId xmlns:a16="http://schemas.microsoft.com/office/drawing/2014/main" id="{E946B897-4B27-9830-EAD8-894B33710AF4}"/>
                   </a:ext>
                 </a:extLst>
               </p:cNvPr>
@@ -8308,10 +9676,10 @@
           </p:cxnSp>
           <p:cxnSp>
             <p:nvCxnSpPr>
-              <p:cNvPr id="44" name="Straight Connector 43">
+              <p:cNvPr id="56" name="Straight Connector 55">
                 <a:extLst>
                   <a:ext uri="{FF2B5EF4-FFF2-40B4-BE49-F238E27FC236}">
-                    <a16:creationId xmlns:a16="http://schemas.microsoft.com/office/drawing/2014/main" id="{5C9FBE32-B648-7DB5-26F0-742B6359F4EB}"/>
+                    <a16:creationId xmlns:a16="http://schemas.microsoft.com/office/drawing/2014/main" id="{2B3B631C-3DC2-7F5F-A7D2-98C6FB8A216C}"/>
                   </a:ext>
                 </a:extLst>
               </p:cNvPr>
@@ -8349,10 +9717,10 @@
           </p:cxnSp>
           <p:cxnSp>
             <p:nvCxnSpPr>
-              <p:cNvPr id="45" name="Straight Connector 44">
+              <p:cNvPr id="57" name="Straight Connector 56">
                 <a:extLst>
                   <a:ext uri="{FF2B5EF4-FFF2-40B4-BE49-F238E27FC236}">
-                    <a16:creationId xmlns:a16="http://schemas.microsoft.com/office/drawing/2014/main" id="{DD85C51F-3A18-DBA6-0908-F257DB50DE18}"/>
+                    <a16:creationId xmlns:a16="http://schemas.microsoft.com/office/drawing/2014/main" id="{A77017C1-FBC9-0B24-8E96-E3ED9C5FD252}"/>
                   </a:ext>
                 </a:extLst>
               </p:cNvPr>
@@ -8390,10 +9758,10 @@
           </p:cxnSp>
           <p:cxnSp>
             <p:nvCxnSpPr>
-              <p:cNvPr id="46" name="Straight Connector 45">
+              <p:cNvPr id="58" name="Straight Connector 57">
                 <a:extLst>
                   <a:ext uri="{FF2B5EF4-FFF2-40B4-BE49-F238E27FC236}">
-                    <a16:creationId xmlns:a16="http://schemas.microsoft.com/office/drawing/2014/main" id="{ADD1E8E0-DFA7-B96A-F04E-7CE07E6EAF48}"/>
+                    <a16:creationId xmlns:a16="http://schemas.microsoft.com/office/drawing/2014/main" id="{1AB3D7CC-0305-D1DF-248B-896469D9D308}"/>
                   </a:ext>
                 </a:extLst>
               </p:cNvPr>
@@ -8431,10 +9799,10 @@
           </p:cxnSp>
           <p:cxnSp>
             <p:nvCxnSpPr>
-              <p:cNvPr id="47" name="Straight Connector 46">
+              <p:cNvPr id="59" name="Straight Connector 58">
                 <a:extLst>
                   <a:ext uri="{FF2B5EF4-FFF2-40B4-BE49-F238E27FC236}">
-                    <a16:creationId xmlns:a16="http://schemas.microsoft.com/office/drawing/2014/main" id="{E11CF5D5-BABC-698C-FD1A-55F6A77B321E}"/>
+                    <a16:creationId xmlns:a16="http://schemas.microsoft.com/office/drawing/2014/main" id="{497B74A8-C0A9-5ECA-0608-C5BD1B68E181}"/>
                   </a:ext>
                 </a:extLst>
               </p:cNvPr>
@@ -8472,10 +9840,10 @@
           </p:cxnSp>
           <p:cxnSp>
             <p:nvCxnSpPr>
-              <p:cNvPr id="48" name="Straight Connector 47">
+              <p:cNvPr id="60" name="Straight Connector 59">
                 <a:extLst>
                   <a:ext uri="{FF2B5EF4-FFF2-40B4-BE49-F238E27FC236}">
-                    <a16:creationId xmlns:a16="http://schemas.microsoft.com/office/drawing/2014/main" id="{6F71AAEA-7784-BF18-F1B2-BC990DBB99D7}"/>
+                    <a16:creationId xmlns:a16="http://schemas.microsoft.com/office/drawing/2014/main" id="{802F808E-0E0C-04CA-EF72-B66A3F57A46A}"/>
                   </a:ext>
                 </a:extLst>
               </p:cNvPr>
@@ -8513,10 +9881,10 @@
           </p:cxnSp>
           <p:cxnSp>
             <p:nvCxnSpPr>
-              <p:cNvPr id="49" name="Straight Connector 48">
+              <p:cNvPr id="61" name="Straight Connector 60">
                 <a:extLst>
                   <a:ext uri="{FF2B5EF4-FFF2-40B4-BE49-F238E27FC236}">
-                    <a16:creationId xmlns:a16="http://schemas.microsoft.com/office/drawing/2014/main" id="{0B9C6918-EA6A-3B33-B71B-E22469F76D3F}"/>
+                    <a16:creationId xmlns:a16="http://schemas.microsoft.com/office/drawing/2014/main" id="{5A5C3CB3-9D59-26D5-E456-480C6441B435}"/>
                   </a:ext>
                 </a:extLst>
               </p:cNvPr>
@@ -8554,10 +9922,10 @@
           </p:cxnSp>
           <p:cxnSp>
             <p:nvCxnSpPr>
-              <p:cNvPr id="50" name="Straight Connector 49">
+              <p:cNvPr id="62" name="Straight Connector 61">
                 <a:extLst>
                   <a:ext uri="{FF2B5EF4-FFF2-40B4-BE49-F238E27FC236}">
-                    <a16:creationId xmlns:a16="http://schemas.microsoft.com/office/drawing/2014/main" id="{9E844B00-B8E6-1118-2EFA-42388EA2BEC8}"/>
+                    <a16:creationId xmlns:a16="http://schemas.microsoft.com/office/drawing/2014/main" id="{629026B8-0C84-795A-579D-34DE3065D072}"/>
                   </a:ext>
                 </a:extLst>
               </p:cNvPr>
@@ -8595,10 +9963,10 @@
           </p:cxnSp>
           <p:cxnSp>
             <p:nvCxnSpPr>
-              <p:cNvPr id="51" name="Straight Connector 50">
+              <p:cNvPr id="63" name="Straight Connector 62">
                 <a:extLst>
                   <a:ext uri="{FF2B5EF4-FFF2-40B4-BE49-F238E27FC236}">
-                    <a16:creationId xmlns:a16="http://schemas.microsoft.com/office/drawing/2014/main" id="{6B7A4179-2DC9-4AD2-FA4B-BC7F3BEB1833}"/>
+                    <a16:creationId xmlns:a16="http://schemas.microsoft.com/office/drawing/2014/main" id="{121D27E3-AA11-F47D-AD64-D347D1A06A22}"/>
                   </a:ext>
                 </a:extLst>
               </p:cNvPr>
@@ -8636,10 +10004,10 @@
           </p:cxnSp>
           <p:cxnSp>
             <p:nvCxnSpPr>
-              <p:cNvPr id="52" name="Straight Connector 51">
+              <p:cNvPr id="64" name="Straight Connector 63">
                 <a:extLst>
                   <a:ext uri="{FF2B5EF4-FFF2-40B4-BE49-F238E27FC236}">
-                    <a16:creationId xmlns:a16="http://schemas.microsoft.com/office/drawing/2014/main" id="{25A8B308-F48D-C1B0-DC2C-656534FEEA2C}"/>
+                    <a16:creationId xmlns:a16="http://schemas.microsoft.com/office/drawing/2014/main" id="{1C1DA948-BE52-D302-FCD3-6861CAA51B59}"/>
                   </a:ext>
                 </a:extLst>
               </p:cNvPr>
@@ -8678,10 +10046,10 @@
         </p:grpSp>
         <p:sp>
           <p:nvSpPr>
-            <p:cNvPr id="55" name="Oval 54">
+            <p:cNvPr id="28" name="Oval 27">
               <a:extLst>
                 <a:ext uri="{FF2B5EF4-FFF2-40B4-BE49-F238E27FC236}">
-                  <a16:creationId xmlns:a16="http://schemas.microsoft.com/office/drawing/2014/main" id="{F77CF9E1-8ECE-CEAD-4418-DAA01C8560FB}"/>
+                  <a16:creationId xmlns:a16="http://schemas.microsoft.com/office/drawing/2014/main" id="{415404AF-8EEE-2A2D-AEE0-E2FF969232E3}"/>
                 </a:ext>
               </a:extLst>
             </p:cNvPr>
@@ -8730,10 +10098,10 @@
         </p:sp>
         <p:sp>
           <p:nvSpPr>
-            <p:cNvPr id="56" name="Oval 55">
+            <p:cNvPr id="29" name="Oval 28">
               <a:extLst>
                 <a:ext uri="{FF2B5EF4-FFF2-40B4-BE49-F238E27FC236}">
-                  <a16:creationId xmlns:a16="http://schemas.microsoft.com/office/drawing/2014/main" id="{8E93250B-D5A9-89D5-0D61-8CCA23667EB5}"/>
+                  <a16:creationId xmlns:a16="http://schemas.microsoft.com/office/drawing/2014/main" id="{0080355E-C4E7-5A7F-5B28-2AD79FE35BD1}"/>
                 </a:ext>
               </a:extLst>
             </p:cNvPr>
@@ -8783,10 +10151,10 @@
       </p:grpSp>
       <p:sp>
         <p:nvSpPr>
-          <p:cNvPr id="4" name="Oval 3">
+          <p:cNvPr id="12" name="Oval 11">
             <a:extLst>
               <a:ext uri="{FF2B5EF4-FFF2-40B4-BE49-F238E27FC236}">
-                <a16:creationId xmlns:a16="http://schemas.microsoft.com/office/drawing/2014/main" id="{30619061-DE82-FF4E-31BD-5B2B89D30BC8}"/>
+                <a16:creationId xmlns:a16="http://schemas.microsoft.com/office/drawing/2014/main" id="{7D8F0541-B0BA-087C-E4D1-2B08EE802126}"/>
               </a:ext>
             </a:extLst>
           </p:cNvPr>
@@ -8795,7 +10163,7 @@
         </p:nvSpPr>
         <p:spPr>
           <a:xfrm>
-            <a:off x="4913057" y="3742170"/>
+            <a:off x="8002344" y="3959008"/>
             <a:ext cx="540000" cy="540000"/>
           </a:xfrm>
           <a:prstGeom prst="ellipse">
@@ -8840,22 +10208,23 @@
       </p:sp>
       <p:cxnSp>
         <p:nvCxnSpPr>
-          <p:cNvPr id="13" name="Straight Connector 12">
+          <p:cNvPr id="22" name="Straight Connector 21">
             <a:extLst>
               <a:ext uri="{FF2B5EF4-FFF2-40B4-BE49-F238E27FC236}">
-                <a16:creationId xmlns:a16="http://schemas.microsoft.com/office/drawing/2014/main" id="{99F7618B-D6AE-3FB6-F8B6-CF92EA427779}"/>
+                <a16:creationId xmlns:a16="http://schemas.microsoft.com/office/drawing/2014/main" id="{96F2A4EF-9A7B-297A-7010-1AFC3F346D8D}"/>
               </a:ext>
             </a:extLst>
           </p:cNvPr>
           <p:cNvCxnSpPr>
-            <a:stCxn id="4" idx="6"/>
+            <a:cxnSpLocks/>
+            <a:stCxn id="12" idx="2"/>
           </p:cNvCxnSpPr>
           <p:nvPr/>
         </p:nvCxnSpPr>
         <p:spPr>
-          <a:xfrm>
-            <a:off x="5453057" y="4012170"/>
-            <a:ext cx="1442454" cy="0"/>
+          <a:xfrm flipH="1" flipV="1">
+            <a:off x="6805614" y="4223154"/>
+            <a:ext cx="1196730" cy="5854"/>
           </a:xfrm>
           <a:prstGeom prst="line">
             <a:avLst/>
@@ -8883,10 +10252,10 @@
       </p:cxnSp>
       <p:cxnSp>
         <p:nvCxnSpPr>
-          <p:cNvPr id="18" name="Straight Connector 17">
+          <p:cNvPr id="26" name="Straight Connector 25">
             <a:extLst>
               <a:ext uri="{FF2B5EF4-FFF2-40B4-BE49-F238E27FC236}">
-                <a16:creationId xmlns:a16="http://schemas.microsoft.com/office/drawing/2014/main" id="{56335F79-FF09-C52A-FFC4-CBB7D46008FB}"/>
+                <a16:creationId xmlns:a16="http://schemas.microsoft.com/office/drawing/2014/main" id="{AF4BA373-66AB-2FA5-AECF-1552E6700C65}"/>
               </a:ext>
             </a:extLst>
           </p:cNvPr>
@@ -8896,9 +10265,47 @@
           <p:nvPr/>
         </p:nvCxnSpPr>
         <p:spPr>
-          <a:xfrm flipV="1">
-            <a:off x="6887139" y="3657794"/>
-            <a:ext cx="2277" cy="354376"/>
+          <a:xfrm>
+            <a:off x="4824414" y="4269578"/>
+            <a:ext cx="3176873" cy="0"/>
+          </a:xfrm>
+          <a:prstGeom prst="line">
+            <a:avLst/>
+          </a:prstGeom>
+        </p:spPr>
+        <p:style>
+          <a:lnRef idx="1">
+            <a:schemeClr val="dk1"/>
+          </a:lnRef>
+          <a:fillRef idx="0">
+            <a:schemeClr val="dk1"/>
+          </a:fillRef>
+          <a:effectRef idx="0">
+            <a:schemeClr val="dk1"/>
+          </a:effectRef>
+          <a:fontRef idx="minor">
+            <a:schemeClr val="tx1"/>
+          </a:fontRef>
+        </p:style>
+      </p:cxnSp>
+      <p:cxnSp>
+        <p:nvCxnSpPr>
+          <p:cNvPr id="77" name="Straight Connector 76">
+            <a:extLst>
+              <a:ext uri="{FF2B5EF4-FFF2-40B4-BE49-F238E27FC236}">
+                <a16:creationId xmlns:a16="http://schemas.microsoft.com/office/drawing/2014/main" id="{4EBA7383-320D-3F62-6B39-857E0B6C5672}"/>
+              </a:ext>
+            </a:extLst>
+          </p:cNvPr>
+          <p:cNvCxnSpPr>
+            <a:cxnSpLocks/>
+          </p:cNvCxnSpPr>
+          <p:nvPr/>
+        </p:nvCxnSpPr>
+        <p:spPr>
+          <a:xfrm>
+            <a:off x="6805614" y="4135147"/>
+            <a:ext cx="0" cy="88007"/>
           </a:xfrm>
           <a:prstGeom prst="line">
             <a:avLst/>
@@ -8926,10 +10333,10 @@
       </p:cxnSp>
       <p:cxnSp>
         <p:nvCxnSpPr>
-          <p:cNvPr id="58" name="Straight Connector 57">
+          <p:cNvPr id="87" name="Straight Connector 86">
             <a:extLst>
               <a:ext uri="{FF2B5EF4-FFF2-40B4-BE49-F238E27FC236}">
-                <a16:creationId xmlns:a16="http://schemas.microsoft.com/office/drawing/2014/main" id="{E89060DD-04B9-A3D8-F6F2-13FB97FF8149}"/>
+                <a16:creationId xmlns:a16="http://schemas.microsoft.com/office/drawing/2014/main" id="{CEA523CD-D1A1-73C7-58D9-454F5C9856BE}"/>
               </a:ext>
             </a:extLst>
           </p:cNvPr>
@@ -8939,641 +10346,9 @@
           <p:nvPr/>
         </p:nvCxnSpPr>
         <p:spPr>
-          <a:xfrm>
-            <a:off x="5453057" y="4038840"/>
-            <a:ext cx="3506881" cy="0"/>
-          </a:xfrm>
-          <a:prstGeom prst="line">
-            <a:avLst/>
-          </a:prstGeom>
-        </p:spPr>
-        <p:style>
-          <a:lnRef idx="1">
-            <a:schemeClr val="dk1"/>
-          </a:lnRef>
-          <a:fillRef idx="0">
-            <a:schemeClr val="dk1"/>
-          </a:fillRef>
-          <a:effectRef idx="0">
-            <a:schemeClr val="dk1"/>
-          </a:effectRef>
-          <a:fontRef idx="minor">
-            <a:schemeClr val="tx1"/>
-          </a:fontRef>
-        </p:style>
-      </p:cxnSp>
-      <p:cxnSp>
-        <p:nvCxnSpPr>
-          <p:cNvPr id="61" name="Straight Connector 60">
-            <a:extLst>
-              <a:ext uri="{FF2B5EF4-FFF2-40B4-BE49-F238E27FC236}">
-                <a16:creationId xmlns:a16="http://schemas.microsoft.com/office/drawing/2014/main" id="{557B2373-93B5-C448-D418-D627D4348FE0}"/>
-              </a:ext>
-            </a:extLst>
-          </p:cNvPr>
-          <p:cNvCxnSpPr>
-            <a:cxnSpLocks/>
-            <a:endCxn id="56" idx="4"/>
-          </p:cNvCxnSpPr>
-          <p:nvPr/>
-        </p:nvCxnSpPr>
-        <p:spPr>
           <a:xfrm flipV="1">
-            <a:off x="8959938" y="3657794"/>
-            <a:ext cx="2116" cy="381046"/>
-          </a:xfrm>
-          <a:prstGeom prst="line">
-            <a:avLst/>
-          </a:prstGeom>
-        </p:spPr>
-        <p:style>
-          <a:lnRef idx="1">
-            <a:schemeClr val="dk1"/>
-          </a:lnRef>
-          <a:fillRef idx="0">
-            <a:schemeClr val="dk1"/>
-          </a:fillRef>
-          <a:effectRef idx="0">
-            <a:schemeClr val="dk1"/>
-          </a:effectRef>
-          <a:fontRef idx="minor">
-            <a:schemeClr val="tx1"/>
-          </a:fontRef>
-        </p:style>
-      </p:cxnSp>
-      <p:cxnSp>
-        <p:nvCxnSpPr>
-          <p:cNvPr id="66" name="Straight Connector 65">
-            <a:extLst>
-              <a:ext uri="{FF2B5EF4-FFF2-40B4-BE49-F238E27FC236}">
-                <a16:creationId xmlns:a16="http://schemas.microsoft.com/office/drawing/2014/main" id="{429526FF-5DD6-F3EB-E786-284298492EE8}"/>
-              </a:ext>
-            </a:extLst>
-          </p:cNvPr>
-          <p:cNvCxnSpPr>
-            <a:stCxn id="20" idx="3"/>
-          </p:cNvCxnSpPr>
-          <p:nvPr/>
-        </p:nvCxnSpPr>
-        <p:spPr>
-          <a:xfrm flipV="1">
-            <a:off x="5689600" y="1889775"/>
-            <a:ext cx="436880" cy="1"/>
-          </a:xfrm>
-          <a:prstGeom prst="line">
-            <a:avLst/>
-          </a:prstGeom>
-          <a:ln>
-            <a:solidFill>
-              <a:srgbClr val="0070C0"/>
-            </a:solidFill>
-          </a:ln>
-        </p:spPr>
-        <p:style>
-          <a:lnRef idx="1">
-            <a:schemeClr val="accent1"/>
-          </a:lnRef>
-          <a:fillRef idx="0">
-            <a:schemeClr val="accent1"/>
-          </a:fillRef>
-          <a:effectRef idx="0">
-            <a:schemeClr val="accent1"/>
-          </a:effectRef>
-          <a:fontRef idx="minor">
-            <a:schemeClr val="tx1"/>
-          </a:fontRef>
-        </p:style>
-      </p:cxnSp>
-      <p:cxnSp>
-        <p:nvCxnSpPr>
-          <p:cNvPr id="67" name="Straight Connector 66">
-            <a:extLst>
-              <a:ext uri="{FF2B5EF4-FFF2-40B4-BE49-F238E27FC236}">
-                <a16:creationId xmlns:a16="http://schemas.microsoft.com/office/drawing/2014/main" id="{A2D4097B-8585-0567-481D-39D0CD35E883}"/>
-              </a:ext>
-            </a:extLst>
-          </p:cNvPr>
-          <p:cNvCxnSpPr>
-            <a:cxnSpLocks/>
-          </p:cNvCxnSpPr>
-          <p:nvPr/>
-        </p:nvCxnSpPr>
-        <p:spPr>
-          <a:xfrm>
-            <a:off x="6126480" y="1889775"/>
-            <a:ext cx="0" cy="599425"/>
-          </a:xfrm>
-          <a:prstGeom prst="line">
-            <a:avLst/>
-          </a:prstGeom>
-          <a:ln>
-            <a:solidFill>
-              <a:srgbClr val="0070C0"/>
-            </a:solidFill>
-          </a:ln>
-        </p:spPr>
-        <p:style>
-          <a:lnRef idx="1">
-            <a:schemeClr val="accent1"/>
-          </a:lnRef>
-          <a:fillRef idx="0">
-            <a:schemeClr val="accent1"/>
-          </a:fillRef>
-          <a:effectRef idx="0">
-            <a:schemeClr val="accent1"/>
-          </a:effectRef>
-          <a:fontRef idx="minor">
-            <a:schemeClr val="tx1"/>
-          </a:fontRef>
-        </p:style>
-      </p:cxnSp>
-      <p:cxnSp>
-        <p:nvCxnSpPr>
-          <p:cNvPr id="71" name="Straight Connector 70">
-            <a:extLst>
-              <a:ext uri="{FF2B5EF4-FFF2-40B4-BE49-F238E27FC236}">
-                <a16:creationId xmlns:a16="http://schemas.microsoft.com/office/drawing/2014/main" id="{F81531F3-F4E5-8012-D987-237A398B5D5F}"/>
-              </a:ext>
-            </a:extLst>
-          </p:cNvPr>
-          <p:cNvCxnSpPr>
-            <a:cxnSpLocks/>
-          </p:cNvCxnSpPr>
-          <p:nvPr/>
-        </p:nvCxnSpPr>
-        <p:spPr>
-          <a:xfrm>
-            <a:off x="6126480" y="2489200"/>
-            <a:ext cx="1558325" cy="20566"/>
-          </a:xfrm>
-          <a:prstGeom prst="line">
-            <a:avLst/>
-          </a:prstGeom>
-          <a:ln>
-            <a:solidFill>
-              <a:srgbClr val="0070C0"/>
-            </a:solidFill>
-          </a:ln>
-        </p:spPr>
-        <p:style>
-          <a:lnRef idx="1">
-            <a:schemeClr val="accent1"/>
-          </a:lnRef>
-          <a:fillRef idx="0">
-            <a:schemeClr val="accent1"/>
-          </a:fillRef>
-          <a:effectRef idx="0">
-            <a:schemeClr val="accent1"/>
-          </a:effectRef>
-          <a:fontRef idx="minor">
-            <a:schemeClr val="tx1"/>
-          </a:fontRef>
-        </p:style>
-      </p:cxnSp>
-      <p:cxnSp>
-        <p:nvCxnSpPr>
-          <p:cNvPr id="80" name="Straight Connector 79">
-            <a:extLst>
-              <a:ext uri="{FF2B5EF4-FFF2-40B4-BE49-F238E27FC236}">
-                <a16:creationId xmlns:a16="http://schemas.microsoft.com/office/drawing/2014/main" id="{F1564213-6302-4937-77BB-1A3B21E95F2E}"/>
-              </a:ext>
-            </a:extLst>
-          </p:cNvPr>
-          <p:cNvCxnSpPr>
-            <a:cxnSpLocks/>
-          </p:cNvCxnSpPr>
-          <p:nvPr/>
-        </p:nvCxnSpPr>
-        <p:spPr>
-          <a:xfrm>
-            <a:off x="6914561" y="2124758"/>
-            <a:ext cx="0" cy="374725"/>
-          </a:xfrm>
-          <a:prstGeom prst="line">
-            <a:avLst/>
-          </a:prstGeom>
-          <a:ln>
-            <a:solidFill>
-              <a:srgbClr val="0070C0"/>
-            </a:solidFill>
-          </a:ln>
-        </p:spPr>
-        <p:style>
-          <a:lnRef idx="1">
-            <a:schemeClr val="accent1"/>
-          </a:lnRef>
-          <a:fillRef idx="0">
-            <a:schemeClr val="accent1"/>
-          </a:fillRef>
-          <a:effectRef idx="0">
-            <a:schemeClr val="accent1"/>
-          </a:effectRef>
-          <a:fontRef idx="minor">
-            <a:schemeClr val="tx1"/>
-          </a:fontRef>
-        </p:style>
-      </p:cxnSp>
-      <p:cxnSp>
-        <p:nvCxnSpPr>
-          <p:cNvPr id="83" name="Straight Connector 82">
-            <a:extLst>
-              <a:ext uri="{FF2B5EF4-FFF2-40B4-BE49-F238E27FC236}">
-                <a16:creationId xmlns:a16="http://schemas.microsoft.com/office/drawing/2014/main" id="{8C9288F7-64DE-7D75-EFB0-2FC3D12D0895}"/>
-              </a:ext>
-            </a:extLst>
-          </p:cNvPr>
-          <p:cNvCxnSpPr>
-            <a:cxnSpLocks/>
-          </p:cNvCxnSpPr>
-          <p:nvPr/>
-        </p:nvCxnSpPr>
-        <p:spPr>
-          <a:xfrm>
-            <a:off x="5689600" y="1836896"/>
-            <a:ext cx="511844" cy="0"/>
-          </a:xfrm>
-          <a:prstGeom prst="line">
-            <a:avLst/>
-          </a:prstGeom>
-          <a:ln>
-            <a:solidFill>
-              <a:srgbClr val="00B050"/>
-            </a:solidFill>
-          </a:ln>
-        </p:spPr>
-        <p:style>
-          <a:lnRef idx="1">
-            <a:schemeClr val="accent1"/>
-          </a:lnRef>
-          <a:fillRef idx="0">
-            <a:schemeClr val="accent1"/>
-          </a:fillRef>
-          <a:effectRef idx="0">
-            <a:schemeClr val="accent1"/>
-          </a:effectRef>
-          <a:fontRef idx="minor">
-            <a:schemeClr val="tx1"/>
-          </a:fontRef>
-        </p:style>
-      </p:cxnSp>
-      <p:cxnSp>
-        <p:nvCxnSpPr>
-          <p:cNvPr id="85" name="Straight Connector 84">
-            <a:extLst>
-              <a:ext uri="{FF2B5EF4-FFF2-40B4-BE49-F238E27FC236}">
-                <a16:creationId xmlns:a16="http://schemas.microsoft.com/office/drawing/2014/main" id="{FB031C1A-3E84-1AB0-C7BA-D77F142B8BE8}"/>
-              </a:ext>
-            </a:extLst>
-          </p:cNvPr>
-          <p:cNvCxnSpPr>
-            <a:cxnSpLocks/>
-          </p:cNvCxnSpPr>
-          <p:nvPr/>
-        </p:nvCxnSpPr>
-        <p:spPr>
-          <a:xfrm>
-            <a:off x="7885465" y="2452537"/>
-            <a:ext cx="0" cy="671274"/>
-          </a:xfrm>
-          <a:prstGeom prst="line">
-            <a:avLst/>
-          </a:prstGeom>
-          <a:ln>
-            <a:solidFill>
-              <a:srgbClr val="00B050"/>
-            </a:solidFill>
-          </a:ln>
-        </p:spPr>
-        <p:style>
-          <a:lnRef idx="1">
-            <a:schemeClr val="accent1"/>
-          </a:lnRef>
-          <a:fillRef idx="0">
-            <a:schemeClr val="accent1"/>
-          </a:fillRef>
-          <a:effectRef idx="0">
-            <a:schemeClr val="accent1"/>
-          </a:effectRef>
-          <a:fontRef idx="minor">
-            <a:schemeClr val="tx1"/>
-          </a:fontRef>
-        </p:style>
-      </p:cxnSp>
-      <p:cxnSp>
-        <p:nvCxnSpPr>
-          <p:cNvPr id="86" name="Straight Connector 85">
-            <a:extLst>
-              <a:ext uri="{FF2B5EF4-FFF2-40B4-BE49-F238E27FC236}">
-                <a16:creationId xmlns:a16="http://schemas.microsoft.com/office/drawing/2014/main" id="{93659638-109D-3E3A-F406-3E1BFCBB6422}"/>
-              </a:ext>
-            </a:extLst>
-          </p:cNvPr>
-          <p:cNvCxnSpPr>
-            <a:cxnSpLocks/>
-          </p:cNvCxnSpPr>
-          <p:nvPr/>
-        </p:nvCxnSpPr>
-        <p:spPr>
-          <a:xfrm>
-            <a:off x="6201445" y="1836896"/>
-            <a:ext cx="0" cy="594884"/>
-          </a:xfrm>
-          <a:prstGeom prst="line">
-            <a:avLst/>
-          </a:prstGeom>
-          <a:ln>
-            <a:solidFill>
-              <a:srgbClr val="00B050"/>
-            </a:solidFill>
-          </a:ln>
-        </p:spPr>
-        <p:style>
-          <a:lnRef idx="1">
-            <a:schemeClr val="accent1"/>
-          </a:lnRef>
-          <a:fillRef idx="0">
-            <a:schemeClr val="accent1"/>
-          </a:fillRef>
-          <a:effectRef idx="0">
-            <a:schemeClr val="accent1"/>
-          </a:effectRef>
-          <a:fontRef idx="minor">
-            <a:schemeClr val="tx1"/>
-          </a:fontRef>
-        </p:style>
-      </p:cxnSp>
-      <p:cxnSp>
-        <p:nvCxnSpPr>
-          <p:cNvPr id="89" name="Straight Connector 88">
-            <a:extLst>
-              <a:ext uri="{FF2B5EF4-FFF2-40B4-BE49-F238E27FC236}">
-                <a16:creationId xmlns:a16="http://schemas.microsoft.com/office/drawing/2014/main" id="{20859230-5D7E-699B-A84F-1B5304068FA8}"/>
-              </a:ext>
-            </a:extLst>
-          </p:cNvPr>
-          <p:cNvCxnSpPr>
-            <a:cxnSpLocks/>
-          </p:cNvCxnSpPr>
-          <p:nvPr/>
-        </p:nvCxnSpPr>
-        <p:spPr>
-          <a:xfrm>
-            <a:off x="6201444" y="2431780"/>
-            <a:ext cx="1691964" cy="20757"/>
-          </a:xfrm>
-          <a:prstGeom prst="line">
-            <a:avLst/>
-          </a:prstGeom>
-          <a:ln>
-            <a:solidFill>
-              <a:srgbClr val="00B050"/>
-            </a:solidFill>
-          </a:ln>
-        </p:spPr>
-        <p:style>
-          <a:lnRef idx="1">
-            <a:schemeClr val="accent1"/>
-          </a:lnRef>
-          <a:fillRef idx="0">
-            <a:schemeClr val="accent1"/>
-          </a:fillRef>
-          <a:effectRef idx="0">
-            <a:schemeClr val="accent1"/>
-          </a:effectRef>
-          <a:fontRef idx="minor">
-            <a:schemeClr val="tx1"/>
-          </a:fontRef>
-        </p:style>
-      </p:cxnSp>
-      <p:cxnSp>
-        <p:nvCxnSpPr>
-          <p:cNvPr id="93" name="Straight Connector 92">
-            <a:extLst>
-              <a:ext uri="{FF2B5EF4-FFF2-40B4-BE49-F238E27FC236}">
-                <a16:creationId xmlns:a16="http://schemas.microsoft.com/office/drawing/2014/main" id="{119C40D7-35A4-8C21-B2D8-101FE563A7EA}"/>
-              </a:ext>
-            </a:extLst>
-          </p:cNvPr>
-          <p:cNvCxnSpPr>
-            <a:cxnSpLocks/>
-          </p:cNvCxnSpPr>
-          <p:nvPr/>
-        </p:nvCxnSpPr>
-        <p:spPr>
-          <a:xfrm>
-            <a:off x="7044136" y="2134338"/>
-            <a:ext cx="3290" cy="307820"/>
-          </a:xfrm>
-          <a:prstGeom prst="line">
-            <a:avLst/>
-          </a:prstGeom>
-          <a:ln>
-            <a:solidFill>
-              <a:srgbClr val="00B050"/>
-            </a:solidFill>
-          </a:ln>
-        </p:spPr>
-        <p:style>
-          <a:lnRef idx="1">
-            <a:schemeClr val="accent1"/>
-          </a:lnRef>
-          <a:fillRef idx="0">
-            <a:schemeClr val="accent1"/>
-          </a:fillRef>
-          <a:effectRef idx="0">
-            <a:schemeClr val="accent1"/>
-          </a:effectRef>
-          <a:fontRef idx="minor">
-            <a:schemeClr val="tx1"/>
-          </a:fontRef>
-        </p:style>
-      </p:cxnSp>
-      <p:cxnSp>
-        <p:nvCxnSpPr>
-          <p:cNvPr id="95" name="Straight Connector 94">
-            <a:extLst>
-              <a:ext uri="{FF2B5EF4-FFF2-40B4-BE49-F238E27FC236}">
-                <a16:creationId xmlns:a16="http://schemas.microsoft.com/office/drawing/2014/main" id="{1853CCC1-C170-8C6E-BFF1-1CB34AC117C7}"/>
-              </a:ext>
-            </a:extLst>
-          </p:cNvPr>
-          <p:cNvCxnSpPr>
-            <a:cxnSpLocks/>
-          </p:cNvCxnSpPr>
-          <p:nvPr/>
-        </p:nvCxnSpPr>
-        <p:spPr>
-          <a:xfrm>
-            <a:off x="5689600" y="1942654"/>
-            <a:ext cx="353060" cy="0"/>
-          </a:xfrm>
-          <a:prstGeom prst="line">
-            <a:avLst/>
-          </a:prstGeom>
-          <a:ln>
-            <a:solidFill>
-              <a:schemeClr val="tx1"/>
-            </a:solidFill>
-          </a:ln>
-        </p:spPr>
-        <p:style>
-          <a:lnRef idx="1">
-            <a:schemeClr val="accent1"/>
-          </a:lnRef>
-          <a:fillRef idx="0">
-            <a:schemeClr val="accent1"/>
-          </a:fillRef>
-          <a:effectRef idx="0">
-            <a:schemeClr val="accent1"/>
-          </a:effectRef>
-          <a:fontRef idx="minor">
-            <a:schemeClr val="tx1"/>
-          </a:fontRef>
-        </p:style>
-      </p:cxnSp>
-      <p:cxnSp>
-        <p:nvCxnSpPr>
-          <p:cNvPr id="97" name="Straight Connector 96">
-            <a:extLst>
-              <a:ext uri="{FF2B5EF4-FFF2-40B4-BE49-F238E27FC236}">
-                <a16:creationId xmlns:a16="http://schemas.microsoft.com/office/drawing/2014/main" id="{6FFEE373-16D8-7AAA-3C79-94BDEC026060}"/>
-              </a:ext>
-            </a:extLst>
-          </p:cNvPr>
-          <p:cNvCxnSpPr>
-            <a:cxnSpLocks/>
-          </p:cNvCxnSpPr>
-          <p:nvPr/>
-        </p:nvCxnSpPr>
-        <p:spPr>
-          <a:xfrm>
-            <a:off x="6042660" y="1942654"/>
-            <a:ext cx="0" cy="609432"/>
-          </a:xfrm>
-          <a:prstGeom prst="line">
-            <a:avLst/>
-          </a:prstGeom>
-          <a:ln>
-            <a:solidFill>
-              <a:schemeClr val="tx1"/>
-            </a:solidFill>
-          </a:ln>
-        </p:spPr>
-        <p:style>
-          <a:lnRef idx="1">
-            <a:schemeClr val="accent1"/>
-          </a:lnRef>
-          <a:fillRef idx="0">
-            <a:schemeClr val="accent1"/>
-          </a:fillRef>
-          <a:effectRef idx="0">
-            <a:schemeClr val="accent1"/>
-          </a:effectRef>
-          <a:fontRef idx="minor">
-            <a:schemeClr val="tx1"/>
-          </a:fontRef>
-        </p:style>
-      </p:cxnSp>
-      <p:cxnSp>
-        <p:nvCxnSpPr>
-          <p:cNvPr id="100" name="Straight Connector 99">
-            <a:extLst>
-              <a:ext uri="{FF2B5EF4-FFF2-40B4-BE49-F238E27FC236}">
-                <a16:creationId xmlns:a16="http://schemas.microsoft.com/office/drawing/2014/main" id="{E24C8C20-D7AC-07FF-17E7-CD7B19CEDAED}"/>
-              </a:ext>
-            </a:extLst>
-          </p:cNvPr>
-          <p:cNvCxnSpPr>
-            <a:cxnSpLocks/>
-          </p:cNvCxnSpPr>
-          <p:nvPr/>
-        </p:nvCxnSpPr>
-        <p:spPr>
-          <a:xfrm>
-            <a:off x="6048001" y="2541803"/>
-            <a:ext cx="1704079" cy="16838"/>
-          </a:xfrm>
-          <a:prstGeom prst="line">
-            <a:avLst/>
-          </a:prstGeom>
-          <a:ln/>
-        </p:spPr>
-        <p:style>
-          <a:lnRef idx="1">
-            <a:schemeClr val="dk1"/>
-          </a:lnRef>
-          <a:fillRef idx="0">
-            <a:schemeClr val="dk1"/>
-          </a:fillRef>
-          <a:effectRef idx="0">
-            <a:schemeClr val="dk1"/>
-          </a:effectRef>
-          <a:fontRef idx="minor">
-            <a:schemeClr val="tx1"/>
-          </a:fontRef>
-        </p:style>
-      </p:cxnSp>
-      <p:cxnSp>
-        <p:nvCxnSpPr>
-          <p:cNvPr id="106" name="Straight Connector 105">
-            <a:extLst>
-              <a:ext uri="{FF2B5EF4-FFF2-40B4-BE49-F238E27FC236}">
-                <a16:creationId xmlns:a16="http://schemas.microsoft.com/office/drawing/2014/main" id="{E8DE69F6-73CC-7C59-8557-533E17BFCC89}"/>
-              </a:ext>
-            </a:extLst>
-          </p:cNvPr>
-          <p:cNvCxnSpPr>
-            <a:cxnSpLocks/>
-          </p:cNvCxnSpPr>
-          <p:nvPr/>
-        </p:nvCxnSpPr>
-        <p:spPr>
-          <a:xfrm>
-            <a:off x="7159671" y="2124758"/>
-            <a:ext cx="2540" cy="433883"/>
-          </a:xfrm>
-          <a:prstGeom prst="line">
-            <a:avLst/>
-          </a:prstGeom>
-          <a:ln>
-            <a:solidFill>
-              <a:schemeClr val="tx1"/>
-            </a:solidFill>
-          </a:ln>
-        </p:spPr>
-        <p:style>
-          <a:lnRef idx="1">
-            <a:schemeClr val="accent1"/>
-          </a:lnRef>
-          <a:fillRef idx="0">
-            <a:schemeClr val="accent1"/>
-          </a:fillRef>
-          <a:effectRef idx="0">
-            <a:schemeClr val="accent1"/>
-          </a:effectRef>
-          <a:fontRef idx="minor">
-            <a:schemeClr val="tx1"/>
-          </a:fontRef>
-        </p:style>
-      </p:cxnSp>
-      <p:cxnSp>
-        <p:nvCxnSpPr>
-          <p:cNvPr id="109" name="Straight Connector 108">
-            <a:extLst>
-              <a:ext uri="{FF2B5EF4-FFF2-40B4-BE49-F238E27FC236}">
-                <a16:creationId xmlns:a16="http://schemas.microsoft.com/office/drawing/2014/main" id="{B3066ADC-9E10-FB4B-BC6C-535BD1320A69}"/>
-              </a:ext>
-            </a:extLst>
-          </p:cNvPr>
-          <p:cNvCxnSpPr>
-            <a:cxnSpLocks/>
-          </p:cNvCxnSpPr>
-          <p:nvPr/>
-        </p:nvCxnSpPr>
-        <p:spPr>
-          <a:xfrm flipH="1">
-            <a:off x="5102860" y="1988836"/>
-            <a:ext cx="322580" cy="0"/>
+            <a:off x="4824414" y="4135146"/>
+            <a:ext cx="0" cy="134432"/>
           </a:xfrm>
           <a:prstGeom prst="line">
             <a:avLst/>
@@ -9596,10 +10371,10 @@
       </p:cxnSp>
       <p:sp>
         <p:nvSpPr>
-          <p:cNvPr id="111" name="TextBox 110">
+          <p:cNvPr id="94" name="TextBox 93">
             <a:extLst>
               <a:ext uri="{FF2B5EF4-FFF2-40B4-BE49-F238E27FC236}">
-                <a16:creationId xmlns:a16="http://schemas.microsoft.com/office/drawing/2014/main" id="{BEF864ED-6C29-D104-EB65-54C09B62328E}"/>
+                <a16:creationId xmlns:a16="http://schemas.microsoft.com/office/drawing/2014/main" id="{50440993-1AF9-653B-32E9-C0229A64D937}"/>
               </a:ext>
             </a:extLst>
           </p:cNvPr>
@@ -9608,44 +10383,8 @@
         </p:nvSpPr>
         <p:spPr>
           <a:xfrm>
-            <a:off x="4472477" y="2059735"/>
-            <a:ext cx="398370" cy="261610"/>
-          </a:xfrm>
-          <a:prstGeom prst="rect">
-            <a:avLst/>
-          </a:prstGeom>
-          <a:noFill/>
-        </p:spPr>
-        <p:txBody>
-          <a:bodyPr wrap="square" rtlCol="0">
-            <a:spAutoFit/>
-          </a:bodyPr>
-          <a:lstStyle/>
-          <a:p>
-            <a:pPr algn="ctr"/>
-            <a:r>
-              <a:rPr lang="fr-FR" sz="1100" dirty="0"/>
-              <a:t>PC</a:t>
-            </a:r>
-          </a:p>
-        </p:txBody>
-      </p:sp>
-      <p:sp>
-        <p:nvSpPr>
-          <p:cNvPr id="113" name="TextBox 112">
-            <a:extLst>
-              <a:ext uri="{FF2B5EF4-FFF2-40B4-BE49-F238E27FC236}">
-                <a16:creationId xmlns:a16="http://schemas.microsoft.com/office/drawing/2014/main" id="{0F0EEDB0-A4AC-132C-CFBA-4F005C4A6C77}"/>
-              </a:ext>
-            </a:extLst>
-          </p:cNvPr>
-          <p:cNvSpPr txBox="1"/>
-          <p:nvPr/>
-        </p:nvSpPr>
-        <p:spPr>
-          <a:xfrm>
-            <a:off x="4963117" y="1473942"/>
-            <a:ext cx="1328354" cy="276999"/>
+            <a:off x="3661157" y="2986131"/>
+            <a:ext cx="942141" cy="276999"/>
           </a:xfrm>
           <a:prstGeom prst="rect">
             <a:avLst/>
@@ -9661,51 +10400,60 @@
             <a:pPr algn="ctr"/>
             <a:r>
               <a:rPr lang="fr-FR" sz="1200" dirty="0"/>
-              <a:t>Carte acquisition</a:t>
+              <a:t>Solénoïde</a:t>
             </a:r>
           </a:p>
         </p:txBody>
       </p:sp>
-      <p:sp>
-        <p:nvSpPr>
-          <p:cNvPr id="114" name="TextBox 113">
+      <p:cxnSp>
+        <p:nvCxnSpPr>
+          <p:cNvPr id="96" name="Connector: Elbow 95">
             <a:extLst>
               <a:ext uri="{FF2B5EF4-FFF2-40B4-BE49-F238E27FC236}">
-                <a16:creationId xmlns:a16="http://schemas.microsoft.com/office/drawing/2014/main" id="{E5F5B949-65BA-01E9-A90A-A16A8CFB32F2}"/>
+                <a16:creationId xmlns:a16="http://schemas.microsoft.com/office/drawing/2014/main" id="{79EAF782-C496-FE9F-24AB-1DBC5C6352DB}"/>
               </a:ext>
             </a:extLst>
           </p:cNvPr>
-          <p:cNvSpPr txBox="1"/>
+          <p:cNvCxnSpPr>
+            <a:cxnSpLocks/>
+            <a:stCxn id="94" idx="2"/>
+            <a:endCxn id="28" idx="0"/>
+          </p:cNvCxnSpPr>
           <p:nvPr/>
-        </p:nvSpPr>
+        </p:nvCxnSpPr>
         <p:spPr>
-          <a:xfrm>
-            <a:off x="6999717" y="1069866"/>
-            <a:ext cx="1328354" cy="276999"/>
+          <a:xfrm rot="16200000" flipH="1">
+            <a:off x="4345555" y="3049802"/>
+            <a:ext cx="242672" cy="669327"/>
           </a:xfrm>
-          <a:prstGeom prst="rect">
-            <a:avLst/>
+          <a:prstGeom prst="bentConnector3">
+            <a:avLst>
+              <a:gd name="adj1" fmla="val 101287"/>
+            </a:avLst>
           </a:prstGeom>
-          <a:noFill/>
+          <a:ln>
+            <a:tailEnd type="triangle"/>
+          </a:ln>
         </p:spPr>
-        <p:txBody>
-          <a:bodyPr wrap="square">
-            <a:spAutoFit/>
-          </a:bodyPr>
-          <a:lstStyle/>
-          <a:p>
-            <a:pPr algn="ctr"/>
-            <a:r>
-              <a:rPr lang="fr-FR" sz="1200" dirty="0"/>
-              <a:t>Oscilloscope</a:t>
-            </a:r>
-          </a:p>
-        </p:txBody>
-      </p:sp>
+        <p:style>
+          <a:lnRef idx="1">
+            <a:schemeClr val="dk1"/>
+          </a:lnRef>
+          <a:fillRef idx="0">
+            <a:schemeClr val="dk1"/>
+          </a:fillRef>
+          <a:effectRef idx="0">
+            <a:schemeClr val="dk1"/>
+          </a:effectRef>
+          <a:fontRef idx="minor">
+            <a:schemeClr val="tx1"/>
+          </a:fontRef>
+        </p:style>
+      </p:cxnSp>
     </p:spTree>
     <p:extLst>
       <p:ext uri="{BB962C8B-B14F-4D97-AF65-F5344CB8AC3E}">
-        <p14:creationId xmlns:p14="http://schemas.microsoft.com/office/powerpoint/2010/main" val="1782830619"/>
+        <p14:creationId xmlns:p14="http://schemas.microsoft.com/office/powerpoint/2010/main" val="3492252407"/>
       </p:ext>
     </p:extLst>
   </p:cSld>
@@ -10117,7 +10865,7 @@
         <p:spPr>
           <a:xfrm>
             <a:off x="345439" y="1254482"/>
-            <a:ext cx="8491113" cy="2123658"/>
+            <a:ext cx="8491113" cy="3970318"/>
           </a:xfrm>
           <a:prstGeom prst="rect">
             <a:avLst/>
@@ -10180,7 +10928,7 @@
             </a:r>
             <a:r>
               <a:rPr lang="fr-FR" sz="1200" dirty="0"/>
-              <a:t>, vol. 84, pp. 38–43, 2016.</a:t>
+              <a:t>, vol. 84, no. 1, pp. 38–43, Jan. 2016.</a:t>
             </a:r>
           </a:p>
           <a:p>
@@ -10241,32 +10989,28 @@
               <a:t> of an instrument," </a:t>
             </a:r>
             <a:r>
-              <a:rPr lang="fr-FR" sz="1200" i="1" dirty="0" err="1"/>
+              <a:rPr lang="fr-FR" sz="1200" dirty="0" err="1"/>
               <a:t>University</a:t>
             </a:r>
             <a:r>
-              <a:rPr lang="fr-FR" sz="1200" i="1" dirty="0"/>
+              <a:rPr lang="fr-FR" sz="1200" dirty="0"/>
               <a:t> of Maribor, </a:t>
             </a:r>
             <a:r>
-              <a:rPr lang="fr-FR" sz="1200" i="1" dirty="0" err="1"/>
+              <a:rPr lang="fr-FR" sz="1200" dirty="0" err="1"/>
               <a:t>Faculty</a:t>
             </a:r>
             <a:r>
-              <a:rPr lang="fr-FR" sz="1200" i="1" dirty="0"/>
+              <a:rPr lang="fr-FR" sz="1200" dirty="0"/>
               <a:t> of </a:t>
             </a:r>
             <a:r>
-              <a:rPr lang="fr-FR" sz="1200" i="1" dirty="0" err="1"/>
+              <a:rPr lang="fr-FR" sz="1200" dirty="0" err="1"/>
               <a:t>Mechanical</a:t>
             </a:r>
             <a:r>
-              <a:rPr lang="fr-FR" sz="1200" i="1" dirty="0"/>
-              <a:t> Engineering</a:t>
-            </a:r>
-            <a:r>
               <a:rPr lang="fr-FR" sz="1200" dirty="0"/>
-              <a:t>, </a:t>
+              <a:t> Engineering, </a:t>
             </a:r>
             <a:r>
               <a:rPr lang="fr-FR" sz="1200" dirty="0" err="1"/>
@@ -10274,8 +11018,13 @@
             </a:r>
             <a:r>
               <a:rPr lang="fr-FR" sz="1200" dirty="0"/>
-              <a:t>.</a:t>
+              <a:t>, 2020. </a:t>
             </a:r>
+            <a:r>
+              <a:rPr lang="fr-FR" sz="1200" i="1" dirty="0"/>
+              <a:t>(Année 2020 présumée, car manquante.)</a:t>
+            </a:r>
+            <a:endParaRPr lang="fr-FR" sz="1200" dirty="0"/>
           </a:p>
           <a:p>
             <a:r>
@@ -10316,8 +11065,33 @@
             </a:r>
             <a:r>
               <a:rPr lang="fr-FR" sz="1200" dirty="0"/>
-              <a:t>, "Étude du contact corde / frette," 2015.</a:t>
+              <a:t>, "Étude du contact corde / frette," </a:t>
             </a:r>
+            <a:r>
+              <a:rPr lang="fr-FR" sz="1200" b="1" dirty="0"/>
+              <a:t>in</a:t>
+            </a:r>
+            <a:r>
+              <a:rPr lang="fr-FR" sz="1200" dirty="0"/>
+              <a:t> </a:t>
+            </a:r>
+            <a:r>
+              <a:rPr lang="fr-FR" sz="1200" i="1" dirty="0" err="1"/>
+              <a:t>Proceedings</a:t>
+            </a:r>
+            <a:r>
+              <a:rPr lang="fr-FR" sz="1200" i="1" dirty="0"/>
+              <a:t> of XXIXème Congrès Français de Mécanique (CFM)</a:t>
+            </a:r>
+            <a:r>
+              <a:rPr lang="fr-FR" sz="1200" dirty="0"/>
+              <a:t>, Brest, France, 2015. </a:t>
+            </a:r>
+            <a:r>
+              <a:rPr lang="fr-FR" sz="1200" i="1" dirty="0"/>
+              <a:t>(Titre de la conférence et lieu ajoutés pour se conformer au format IEEE Conférence.)</a:t>
+            </a:r>
+            <a:endParaRPr lang="fr-FR" sz="1200" dirty="0"/>
           </a:p>
           <a:p>
             <a:r>
@@ -10350,8 +11124,37 @@
             </a:r>
             <a:r>
               <a:rPr lang="fr-FR" sz="1200" dirty="0"/>
-              <a:t>, "Caractérisation expérimentale de la réponse d'une corde vibrante sollicitée par un plectre."</a:t>
+              <a:t>, "Caractérisation expérimentale de la réponse d'une corde vibrante sollicitée par un plectre," </a:t>
             </a:r>
+            <a:r>
+              <a:rPr lang="fr-FR" sz="1200" b="1" dirty="0"/>
+              <a:t>in</a:t>
+            </a:r>
+            <a:r>
+              <a:rPr lang="fr-FR" sz="1200" dirty="0"/>
+              <a:t> </a:t>
+            </a:r>
+            <a:r>
+              <a:rPr lang="fr-FR" sz="1200" i="1" dirty="0"/>
+              <a:t>Actes du </a:t>
+            </a:r>
+            <a:r>
+              <a:rPr lang="fr-FR" sz="1200" i="1" dirty="0" err="1"/>
+              <a:t>XXXIVème</a:t>
+            </a:r>
+            <a:r>
+              <a:rPr lang="fr-FR" sz="1200" i="1" dirty="0"/>
+              <a:t> Congrès Français d’Acoustique</a:t>
+            </a:r>
+            <a:r>
+              <a:rPr lang="fr-FR" sz="1200" dirty="0"/>
+              <a:t>, Lyon, France, 2016. </a:t>
+            </a:r>
+            <a:r>
+              <a:rPr lang="fr-FR" sz="1200" i="1" dirty="0"/>
+              <a:t>(Titre de la conférence et année 2016 ajoutés pour se conformer au format IEEE Conférence.)</a:t>
+            </a:r>
+            <a:endParaRPr lang="fr-FR" sz="1200" dirty="0"/>
           </a:p>
           <a:p>
             <a:r>
@@ -10360,15 +11163,15 @@
             </a:r>
             <a:r>
               <a:rPr lang="fr-FR" sz="1200" dirty="0"/>
-              <a:t>Thomann, "Thomann Online Music Store.’’ [Online]. </a:t>
+              <a:t>"Thomann Online Music Store," Thomann, </a:t>
             </a:r>
             <a:r>
-              <a:rPr lang="fr-FR" sz="1200" dirty="0" err="1"/>
-              <a:t>Available</a:t>
+              <a:rPr lang="fr-FR" sz="1200" b="1" dirty="0"/>
+              <a:t>[En ligne]</a:t>
             </a:r>
             <a:r>
               <a:rPr lang="fr-FR" sz="1200" dirty="0"/>
-              <a:t>: </a:t>
+              <a:t>. Disponible sur : </a:t>
             </a:r>
             <a:r>
               <a:rPr lang="fr-FR" sz="1200" dirty="0">
@@ -10376,7 +11179,10 @@
               </a:rPr>
               <a:t>https://www.thomann.de</a:t>
             </a:r>
-            <a:endParaRPr lang="fr-FR" sz="1200" dirty="0"/>
+            <a:r>
+              <a:rPr lang="fr-FR" sz="1200" dirty="0"/>
+              <a:t>. (Consulté le : date).</a:t>
+            </a:r>
           </a:p>
           <a:p>
             <a:r>
@@ -10393,15 +11199,15 @@
             </a:r>
             <a:r>
               <a:rPr lang="fr-FR" sz="1200" dirty="0"/>
-              <a:t> Seth Lover.’’ [Online]. </a:t>
+              <a:t> Seth Lover," Seymour Duncan, </a:t>
             </a:r>
             <a:r>
-              <a:rPr lang="fr-FR" sz="1200" dirty="0" err="1"/>
-              <a:t>Available</a:t>
+              <a:rPr lang="fr-FR" sz="1200" b="1" dirty="0"/>
+              <a:t>[En ligne]</a:t>
             </a:r>
             <a:r>
               <a:rPr lang="fr-FR" sz="1200" dirty="0"/>
-              <a:t>: </a:t>
+              <a:t>. Disponible sur : </a:t>
             </a:r>
             <a:r>
               <a:rPr lang="fr-FR" sz="1200" dirty="0">
@@ -10409,7 +11215,10 @@
               </a:rPr>
               <a:t>https://www.seymourduncan.com</a:t>
             </a:r>
-            <a:endParaRPr lang="fr-FR" sz="1200" dirty="0"/>
+            <a:r>
+              <a:rPr lang="fr-FR" sz="1200" dirty="0"/>
+              <a:t>. (Consulté le : date).</a:t>
+            </a:r>
           </a:p>
           <a:p>
             <a:r>
@@ -10418,35 +11227,59 @@
             </a:r>
             <a:r>
               <a:rPr lang="fr-FR" sz="1200" dirty="0" err="1"/>
-              <a:t>JavaScience</a:t>
+              <a:t>JessaScience</a:t>
             </a:r>
             <a:r>
               <a:rPr lang="fr-FR" sz="1200" dirty="0"/>
               <a:t>, "</a:t>
             </a:r>
             <a:r>
-              <a:rPr lang="en-US" sz="1200" dirty="0"/>
-              <a:t>Measuring Pickup Impedance with </a:t>
+              <a:rPr lang="fr-FR" sz="1200" dirty="0" err="1"/>
+              <a:t>Measuring</a:t>
             </a:r>
             <a:r>
-              <a:rPr lang="en-US" sz="1200" dirty="0" err="1"/>
+              <a:rPr lang="fr-FR" sz="1200" dirty="0"/>
+              <a:t> Pickup </a:t>
+            </a:r>
+            <a:r>
+              <a:rPr lang="fr-FR" sz="1200" dirty="0" err="1"/>
+              <a:t>Impedance</a:t>
+            </a:r>
+            <a:r>
+              <a:rPr lang="fr-FR" sz="1200" dirty="0"/>
+              <a:t> </a:t>
+            </a:r>
+            <a:r>
+              <a:rPr lang="fr-FR" sz="1200" dirty="0" err="1"/>
+              <a:t>with</a:t>
+            </a:r>
+            <a:r>
+              <a:rPr lang="fr-FR" sz="1200" dirty="0"/>
+              <a:t> </a:t>
+            </a:r>
+            <a:r>
+              <a:rPr lang="fr-FR" sz="1200" dirty="0" err="1"/>
               <a:t>Digilent</a:t>
             </a:r>
             <a:r>
-              <a:rPr lang="en-US" sz="1200" dirty="0"/>
-              <a:t> Analog Discovery</a:t>
+              <a:rPr lang="fr-FR" sz="1200" dirty="0"/>
+              <a:t> </a:t>
+            </a:r>
+            <a:r>
+              <a:rPr lang="fr-FR" sz="1200" dirty="0" err="1"/>
+              <a:t>Analog</a:t>
             </a:r>
             <a:r>
               <a:rPr lang="fr-FR" sz="1200" dirty="0"/>
-              <a:t>’’ [Online]. </a:t>
+              <a:t> Discovery," https://www.google.com/search?q=JessaScience.com, </a:t>
             </a:r>
             <a:r>
-              <a:rPr lang="fr-FR" sz="1200" dirty="0" err="1"/>
-              <a:t>Available</a:t>
+              <a:rPr lang="fr-FR" sz="1200" b="1" dirty="0"/>
+              <a:t>[En ligne]</a:t>
             </a:r>
             <a:r>
               <a:rPr lang="fr-FR" sz="1200" dirty="0"/>
-              <a:t>: </a:t>
+              <a:t>. Disponible sur : </a:t>
             </a:r>
             <a:r>
               <a:rPr lang="fr-FR" sz="1200" dirty="0">
@@ -10454,7 +11287,147 @@
               </a:rPr>
               <a:t>https://www.jensign.com</a:t>
             </a:r>
-            <a:endParaRPr lang="fr-FR" sz="1200" dirty="0"/>
+            <a:r>
+              <a:rPr lang="fr-FR" sz="1200" dirty="0"/>
+              <a:t>. (Consulté le : date).</a:t>
+            </a:r>
+          </a:p>
+          <a:p>
+            <a:r>
+              <a:rPr lang="fr-FR" sz="1200" b="1" dirty="0"/>
+              <a:t>[8] </a:t>
+            </a:r>
+            <a:r>
+              <a:rPr lang="fr-FR" sz="1200" dirty="0"/>
+              <a:t>H. </a:t>
+            </a:r>
+            <a:r>
+              <a:rPr lang="fr-FR" sz="1200" dirty="0" err="1"/>
+              <a:t>Munguía</a:t>
+            </a:r>
+            <a:r>
+              <a:rPr lang="fr-FR" sz="1200" dirty="0"/>
+              <a:t> Aguilar </a:t>
+            </a:r>
+            <a:r>
+              <a:rPr lang="fr-FR" sz="1200" i="1" dirty="0"/>
+              <a:t>et al.</a:t>
+            </a:r>
+            <a:r>
+              <a:rPr lang="fr-FR" sz="1200" dirty="0"/>
+              <a:t>, "</a:t>
+            </a:r>
+            <a:r>
+              <a:rPr lang="fr-FR" sz="1200" dirty="0" err="1"/>
+              <a:t>Using</a:t>
+            </a:r>
+            <a:r>
+              <a:rPr lang="fr-FR" sz="1200" dirty="0"/>
+              <a:t> an </a:t>
+            </a:r>
+            <a:r>
+              <a:rPr lang="fr-FR" sz="1200" dirty="0" err="1"/>
+              <a:t>electric</a:t>
+            </a:r>
+            <a:r>
+              <a:rPr lang="fr-FR" sz="1200" dirty="0"/>
+              <a:t> </a:t>
+            </a:r>
+            <a:r>
+              <a:rPr lang="fr-FR" sz="1200" dirty="0" err="1"/>
+              <a:t>guitar</a:t>
+            </a:r>
+            <a:r>
+              <a:rPr lang="fr-FR" sz="1200" dirty="0"/>
+              <a:t> pickup to </a:t>
+            </a:r>
+            <a:r>
+              <a:rPr lang="fr-FR" sz="1200" dirty="0" err="1"/>
+              <a:t>analyze</a:t>
+            </a:r>
+            <a:r>
+              <a:rPr lang="fr-FR" sz="1200" dirty="0"/>
+              <a:t> bar vibrations," </a:t>
+            </a:r>
+            <a:r>
+              <a:rPr lang="fr-FR" sz="1200" i="1" dirty="0" err="1"/>
+              <a:t>Physics</a:t>
+            </a:r>
+            <a:r>
+              <a:rPr lang="fr-FR" sz="1200" i="1" dirty="0"/>
+              <a:t> Education</a:t>
+            </a:r>
+            <a:r>
+              <a:rPr lang="fr-FR" sz="1200" dirty="0"/>
+              <a:t>, vol. 54, no. 2, Art. no. 025018, 2019.</a:t>
+            </a:r>
+          </a:p>
+          <a:p>
+            <a:r>
+              <a:rPr lang="fr-FR" sz="1200" b="1" dirty="0"/>
+              <a:t>[9] </a:t>
+            </a:r>
+            <a:r>
+              <a:rPr lang="fr-FR" sz="1200" dirty="0"/>
+              <a:t>R. </a:t>
+            </a:r>
+            <a:r>
+              <a:rPr lang="fr-FR" sz="1200" dirty="0" err="1"/>
+              <a:t>Giampiccolo</a:t>
+            </a:r>
+            <a:r>
+              <a:rPr lang="fr-FR" sz="1200" dirty="0"/>
+              <a:t>, A. </a:t>
+            </a:r>
+            <a:r>
+              <a:rPr lang="fr-FR" sz="1200" dirty="0" err="1"/>
+              <a:t>Bernardini</a:t>
+            </a:r>
+            <a:r>
+              <a:rPr lang="fr-FR" sz="1200" dirty="0"/>
+              <a:t>, and A. </a:t>
+            </a:r>
+            <a:r>
+              <a:rPr lang="fr-FR" sz="1200" dirty="0" err="1"/>
+              <a:t>Sarti</a:t>
+            </a:r>
+            <a:r>
+              <a:rPr lang="fr-FR" sz="1200" dirty="0"/>
+              <a:t>, "</a:t>
+            </a:r>
+            <a:r>
+              <a:rPr lang="fr-FR" sz="1200" dirty="0" err="1"/>
+              <a:t>Virtualization</a:t>
+            </a:r>
+            <a:r>
+              <a:rPr lang="fr-FR" sz="1200" dirty="0"/>
+              <a:t> of Guitar Pickups </a:t>
+            </a:r>
+            <a:r>
+              <a:rPr lang="fr-FR" sz="1200" dirty="0" err="1"/>
+              <a:t>Through</a:t>
+            </a:r>
+            <a:r>
+              <a:rPr lang="fr-FR" sz="1200" dirty="0"/>
+              <a:t> Circuit Inversion," </a:t>
+            </a:r>
+            <a:r>
+              <a:rPr lang="fr-FR" sz="1200" i="1" dirty="0"/>
+              <a:t>IEEE Signal Processing </a:t>
+            </a:r>
+            <a:r>
+              <a:rPr lang="fr-FR" sz="1200" i="1" dirty="0" err="1"/>
+              <a:t>Letters</a:t>
+            </a:r>
+            <a:r>
+              <a:rPr lang="fr-FR" sz="1200" dirty="0"/>
+              <a:t>, vol. 30, pp. 458–462, 2023.</a:t>
+            </a:r>
+          </a:p>
+          <a:p>
+            <a:endParaRPr lang="en-US" sz="1200" dirty="0">
+              <a:latin typeface="+mj-lt"/>
+            </a:endParaRPr>
           </a:p>
         </p:txBody>
       </p:sp>
@@ -10472,7 +11445,7 @@
         </p:nvSpPr>
         <p:spPr>
           <a:xfrm>
-            <a:off x="345440" y="4129940"/>
+            <a:off x="5641341" y="5675286"/>
             <a:ext cx="6827520" cy="400110"/>
           </a:xfrm>
           <a:prstGeom prst="rect">
@@ -10524,7 +11497,7 @@
         </p:nvSpPr>
         <p:spPr>
           <a:xfrm>
-            <a:off x="307447" y="4484497"/>
+            <a:off x="3881227" y="5130828"/>
             <a:ext cx="8491113" cy="646331"/>
           </a:xfrm>
           <a:prstGeom prst="rect">
@@ -17246,15 +18219,7 @@
           <a:p>
             <a:r>
               <a:rPr lang="fr-FR" sz="2000" b="1" dirty="0"/>
-              <a:t>Annexe 3 : Démonstration Modèle 2 (</a:t>
-            </a:r>
-            <a:r>
-              <a:rPr lang="fr-FR" sz="2000" b="1" dirty="0" err="1"/>
-              <a:t>Humbucker</a:t>
-            </a:r>
-            <a:r>
-              <a:rPr lang="fr-FR" sz="2000" b="1" dirty="0"/>
-              <a:t>) </a:t>
+              <a:t>Annexe 3 : Démonstration Modèle 2 (Humbucker) </a:t>
             </a:r>
             <a:r>
               <a:rPr lang="fr-FR" sz="1000" i="1" dirty="0"/>
@@ -23395,12 +24360,8 @@
               <a:buChar char="•"/>
             </a:pPr>
             <a:r>
-              <a:rPr lang="fr-FR" dirty="0" err="1"/>
-              <a:t>Humbucker</a:t>
-            </a:r>
-            <a:r>
               <a:rPr lang="fr-FR" dirty="0"/>
-              <a:t> </a:t>
+              <a:t>Humbucker </a:t>
             </a:r>
           </a:p>
           <a:p>
@@ -25638,8 +26599,8 @@
           </a:p>
         </p:txBody>
       </p:sp>
-      <mc:AlternateContent xmlns:mc="http://schemas.openxmlformats.org/markup-compatibility/2006">
-        <mc:Choice xmlns:a14="http://schemas.microsoft.com/office/drawing/2010/main" Requires="a14">
+      <mc:AlternateContent xmlns:mc="http://schemas.openxmlformats.org/markup-compatibility/2006" xmlns:a14="http://schemas.microsoft.com/office/drawing/2010/main">
+        <mc:Choice Requires="a14">
           <p:sp>
             <p:nvSpPr>
               <p:cNvPr id="22" name="TextBox 21">
@@ -25782,7 +26743,7 @@
             </p:txBody>
           </p:sp>
         </mc:Choice>
-        <mc:Fallback>
+        <mc:Fallback xmlns="">
           <p:sp>
             <p:nvSpPr>
               <p:cNvPr id="22" name="TextBox 21">
@@ -25832,8 +26793,8 @@
           </p:sp>
         </mc:Fallback>
       </mc:AlternateContent>
-      <mc:AlternateContent xmlns:mc="http://schemas.openxmlformats.org/markup-compatibility/2006">
-        <mc:Choice xmlns:a14="http://schemas.microsoft.com/office/drawing/2010/main" Requires="a14">
+      <mc:AlternateContent xmlns:mc="http://schemas.openxmlformats.org/markup-compatibility/2006" xmlns:a14="http://schemas.microsoft.com/office/drawing/2010/main">
+        <mc:Choice Requires="a14">
           <p:sp>
             <p:nvSpPr>
               <p:cNvPr id="24" name="Rectangle 23">
@@ -25964,7 +26925,7 @@
             </p:txBody>
           </p:sp>
         </mc:Choice>
-        <mc:Fallback>
+        <mc:Fallback xmlns="">
           <p:sp>
             <p:nvSpPr>
               <p:cNvPr id="24" name="Rectangle 23">
@@ -26596,8 +27557,8 @@
           </a:p>
         </p:txBody>
       </p:sp>
-      <mc:AlternateContent xmlns:mc="http://schemas.openxmlformats.org/markup-compatibility/2006">
-        <mc:Choice xmlns:a14="http://schemas.microsoft.com/office/drawing/2010/main" Requires="a14">
+      <mc:AlternateContent xmlns:mc="http://schemas.openxmlformats.org/markup-compatibility/2006" xmlns:a14="http://schemas.microsoft.com/office/drawing/2010/main">
+        <mc:Choice Requires="a14">
           <p:sp>
             <p:nvSpPr>
               <p:cNvPr id="65" name="Rectangle 64">
@@ -26993,7 +27954,7 @@
             </p:txBody>
           </p:sp>
         </mc:Choice>
-        <mc:Fallback>
+        <mc:Fallback xmlns="">
           <p:sp>
             <p:nvSpPr>
               <p:cNvPr id="65" name="Rectangle 64">
@@ -27673,7 +28634,7 @@
             <p:spPr>
               <a:xfrm>
                 <a:off x="1938313" y="4663973"/>
-                <a:ext cx="3559949" cy="722249"/>
+                <a:ext cx="4045018" cy="672172"/>
               </a:xfrm>
               <a:prstGeom prst="rect">
                 <a:avLst/>
@@ -27895,6 +28856,62 @@
                               </m:r>
                             </m:sub>
                           </m:sSub>
+                          <m:r>
+                            <a:rPr lang="fr-FR" b="0" i="1" smtClean="0">
+                              <a:solidFill>
+                                <a:srgbClr val="C00000"/>
+                              </a:solidFill>
+                              <a:latin typeface="Cambria Math" panose="02040503050406030204" pitchFamily="18" charset="0"/>
+                            </a:rPr>
+                            <m:t>2</m:t>
+                          </m:r>
+                          <m:r>
+                            <a:rPr lang="fr-FR" b="0" i="1" smtClean="0">
+                              <a:solidFill>
+                                <a:srgbClr val="C00000"/>
+                              </a:solidFill>
+                              <a:latin typeface="Cambria Math" panose="02040503050406030204" pitchFamily="18" charset="0"/>
+                              <a:ea typeface="Cambria Math" panose="02040503050406030204" pitchFamily="18" charset="0"/>
+                            </a:rPr>
+                            <m:t>𝜋</m:t>
+                          </m:r>
+                          <m:sSub>
+                            <m:sSubPr>
+                              <m:ctrlPr>
+                                <a:rPr lang="fr-FR" b="0" i="1" smtClean="0">
+                                  <a:solidFill>
+                                    <a:srgbClr val="C00000"/>
+                                  </a:solidFill>
+                                  <a:latin typeface="Cambria Math" panose="02040503050406030204" pitchFamily="18" charset="0"/>
+                                  <a:ea typeface="Cambria Math" panose="02040503050406030204" pitchFamily="18" charset="0"/>
+                                </a:rPr>
+                              </m:ctrlPr>
+                            </m:sSubPr>
+                            <m:e>
+                              <m:r>
+                                <a:rPr lang="fr-FR" b="0" i="1" smtClean="0">
+                                  <a:solidFill>
+                                    <a:srgbClr val="C00000"/>
+                                  </a:solidFill>
+                                  <a:latin typeface="Cambria Math" panose="02040503050406030204" pitchFamily="18" charset="0"/>
+                                  <a:ea typeface="Cambria Math" panose="02040503050406030204" pitchFamily="18" charset="0"/>
+                                </a:rPr>
+                                <m:t>𝑓</m:t>
+                              </m:r>
+                            </m:e>
+                            <m:sub>
+                              <m:r>
+                                <a:rPr lang="fr-FR" b="0" i="1" smtClean="0">
+                                  <a:solidFill>
+                                    <a:srgbClr val="C00000"/>
+                                  </a:solidFill>
+                                  <a:latin typeface="Cambria Math" panose="02040503050406030204" pitchFamily="18" charset="0"/>
+                                  <a:ea typeface="Cambria Math" panose="02040503050406030204" pitchFamily="18" charset="0"/>
+                                </a:rPr>
+                                <m:t>𝑛</m:t>
+                              </m:r>
+                            </m:sub>
+                          </m:sSub>
                           <m:func>
                             <m:funcPr>
                               <m:ctrlPr>
@@ -27930,103 +28947,62 @@
                                 </a:rPr>
                                 <m:t>(</m:t>
                               </m:r>
-                              <m:f>
-                                <m:fPr>
+                              <m:r>
+                                <a:rPr lang="fr-FR" b="0" i="1" smtClean="0">
+                                  <a:solidFill>
+                                    <a:srgbClr val="C00000"/>
+                                  </a:solidFill>
+                                  <a:latin typeface="Cambria Math" panose="02040503050406030204" pitchFamily="18" charset="0"/>
+                                </a:rPr>
+                                <m:t>2</m:t>
+                              </m:r>
+                              <m:r>
+                                <a:rPr lang="fr-FR" b="0" i="1" smtClean="0">
+                                  <a:solidFill>
+                                    <a:srgbClr val="C00000"/>
+                                  </a:solidFill>
+                                  <a:latin typeface="Cambria Math" panose="02040503050406030204" pitchFamily="18" charset="0"/>
+                                  <a:ea typeface="Cambria Math" panose="02040503050406030204" pitchFamily="18" charset="0"/>
+                                </a:rPr>
+                                <m:t>𝜋</m:t>
+                              </m:r>
+                              <m:sSub>
+                                <m:sSubPr>
                                   <m:ctrlPr>
-                                    <a:rPr lang="fr-FR" i="1">
-                                      <a:solidFill>
-                                        <a:srgbClr val="C00000"/>
-                                      </a:solidFill>
-                                      <a:latin typeface="Cambria Math" panose="02040503050406030204" pitchFamily="18" charset="0"/>
-                                    </a:rPr>
-                                  </m:ctrlPr>
-                                </m:fPr>
-                                <m:num>
-                                  <m:r>
-                                    <a:rPr lang="fr-FR" i="1">
-                                      <a:solidFill>
-                                        <a:srgbClr val="C00000"/>
-                                      </a:solidFill>
-                                      <a:latin typeface="Cambria Math" panose="02040503050406030204" pitchFamily="18" charset="0"/>
-                                    </a:rPr>
-                                    <m:t>𝑛</m:t>
-                                  </m:r>
-                                  <m:r>
-                                    <a:rPr lang="fr-FR" i="1">
+                                    <a:rPr lang="fr-FR" b="0" i="1" smtClean="0">
                                       <a:solidFill>
                                         <a:srgbClr val="C00000"/>
                                       </a:solidFill>
                                       <a:latin typeface="Cambria Math" panose="02040503050406030204" pitchFamily="18" charset="0"/>
                                       <a:ea typeface="Cambria Math" panose="02040503050406030204" pitchFamily="18" charset="0"/>
                                     </a:rPr>
-                                    <m:t>𝜋</m:t>
-                                  </m:r>
-                                  <m:rad>
-                                    <m:radPr>
-                                      <m:degHide m:val="on"/>
-                                      <m:ctrlPr>
-                                        <a:rPr lang="fr-FR" i="1">
-                                          <a:solidFill>
-                                            <a:srgbClr val="C00000"/>
-                                          </a:solidFill>
-                                          <a:latin typeface="Cambria Math" panose="02040503050406030204" pitchFamily="18" charset="0"/>
-                                          <a:ea typeface="Cambria Math" panose="02040503050406030204" pitchFamily="18" charset="0"/>
-                                        </a:rPr>
-                                      </m:ctrlPr>
-                                    </m:radPr>
-                                    <m:deg/>
-                                    <m:e>
-                                      <m:r>
-                                        <a:rPr lang="fr-FR" i="1">
-                                          <a:solidFill>
-                                            <a:srgbClr val="C00000"/>
-                                          </a:solidFill>
-                                          <a:latin typeface="Cambria Math" panose="02040503050406030204" pitchFamily="18" charset="0"/>
-                                          <a:ea typeface="Cambria Math" panose="02040503050406030204" pitchFamily="18" charset="0"/>
-                                        </a:rPr>
-                                        <m:t>𝑇</m:t>
-                                      </m:r>
-                                    </m:e>
-                                  </m:rad>
-                                </m:num>
-                                <m:den>
+                                  </m:ctrlPr>
+                                </m:sSubPr>
+                                <m:e>
                                   <m:r>
-                                    <a:rPr lang="fr-FR" i="1">
+                                    <a:rPr lang="fr-FR" b="0" i="1" smtClean="0">
                                       <a:solidFill>
                                         <a:srgbClr val="C00000"/>
                                       </a:solidFill>
                                       <a:latin typeface="Cambria Math" panose="02040503050406030204" pitchFamily="18" charset="0"/>
+                                      <a:ea typeface="Cambria Math" panose="02040503050406030204" pitchFamily="18" charset="0"/>
                                     </a:rPr>
-                                    <m:t>𝐿</m:t>
+                                    <m:t>𝑓</m:t>
                                   </m:r>
-                                  <m:rad>
-                                    <m:radPr>
-                                      <m:degHide m:val="on"/>
-                                      <m:ctrlPr>
-                                        <a:rPr lang="fr-FR" i="1">
-                                          <a:solidFill>
-                                            <a:srgbClr val="C00000"/>
-                                          </a:solidFill>
-                                          <a:latin typeface="Cambria Math" panose="02040503050406030204" pitchFamily="18" charset="0"/>
-                                        </a:rPr>
-                                      </m:ctrlPr>
-                                    </m:radPr>
-                                    <m:deg/>
-                                    <m:e>
-                                      <m:r>
-                                        <a:rPr lang="fr-FR" i="1">
-                                          <a:solidFill>
-                                            <a:srgbClr val="C00000"/>
-                                          </a:solidFill>
-                                          <a:latin typeface="Cambria Math" panose="02040503050406030204" pitchFamily="18" charset="0"/>
-                                          <a:ea typeface="Cambria Math" panose="02040503050406030204" pitchFamily="18" charset="0"/>
-                                        </a:rPr>
-                                        <m:t>𝜇</m:t>
-                                      </m:r>
-                                    </m:e>
-                                  </m:rad>
-                                </m:den>
-                              </m:f>
+                                </m:e>
+                                <m:sub>
+                                  <m:r>
+                                    <a:rPr lang="fr-FR" b="0" i="1" smtClean="0">
+                                      <a:solidFill>
+                                        <a:srgbClr val="C00000"/>
+                                      </a:solidFill>
+                                      <a:latin typeface="Cambria Math" panose="02040503050406030204" pitchFamily="18" charset="0"/>
+                                      <a:ea typeface="Cambria Math" panose="02040503050406030204" pitchFamily="18" charset="0"/>
+                                    </a:rPr>
+                                    <m:t>𝑛</m:t>
+                                  </m:r>
+                                </m:sub>
+                              </m:sSub>
                               <m:r>
                                 <a:rPr lang="fr-FR" i="1">
                                   <a:solidFill>
@@ -28079,7 +29055,7 @@
             <p:spPr>
               <a:xfrm>
                 <a:off x="1938313" y="4663973"/>
-                <a:ext cx="3559949" cy="722249"/>
+                <a:ext cx="4045018" cy="672172"/>
               </a:xfrm>
               <a:prstGeom prst="rect">
                 <a:avLst/>
@@ -28689,6 +29665,201 @@
           </mc:Fallback>
         </mc:AlternateContent>
       </p:grpSp>
+      <mc:AlternateContent xmlns:mc="http://schemas.openxmlformats.org/markup-compatibility/2006">
+        <mc:Choice xmlns:a14="http://schemas.microsoft.com/office/drawing/2010/main" Requires="a14">
+          <p:sp>
+            <p:nvSpPr>
+              <p:cNvPr id="15" name="TextBox 14">
+                <a:extLst>
+                  <a:ext uri="{FF2B5EF4-FFF2-40B4-BE49-F238E27FC236}">
+                    <a16:creationId xmlns:a16="http://schemas.microsoft.com/office/drawing/2014/main" id="{4C8CF9B9-B67D-8875-0408-FEA4A312EA4B}"/>
+                  </a:ext>
+                </a:extLst>
+              </p:cNvPr>
+              <p:cNvSpPr txBox="1"/>
+              <p:nvPr/>
+            </p:nvSpPr>
+            <p:spPr>
+              <a:xfrm>
+                <a:off x="6096680" y="5432817"/>
+                <a:ext cx="2379468" cy="594522"/>
+              </a:xfrm>
+              <a:prstGeom prst="rect">
+                <a:avLst/>
+              </a:prstGeom>
+              <a:noFill/>
+            </p:spPr>
+            <p:txBody>
+              <a:bodyPr wrap="square">
+                <a:spAutoFit/>
+              </a:bodyPr>
+              <a:lstStyle/>
+              <a:p>
+                <a:pPr/>
+                <a14:m>
+                  <m:oMathPara xmlns:m="http://schemas.openxmlformats.org/officeDocument/2006/math">
+                    <m:oMathParaPr>
+                      <m:jc m:val="centerGroup"/>
+                    </m:oMathParaPr>
+                    <m:oMath xmlns:m="http://schemas.openxmlformats.org/officeDocument/2006/math">
+                      <m:sSub>
+                        <m:sSubPr>
+                          <m:ctrlPr>
+                            <a:rPr lang="fr-FR" sz="1400" i="1" smtClean="0">
+                              <a:latin typeface="Cambria Math" panose="02040503050406030204" pitchFamily="18" charset="0"/>
+                            </a:rPr>
+                          </m:ctrlPr>
+                        </m:sSubPr>
+                        <m:e>
+                          <m:r>
+                            <a:rPr lang="fr-FR" sz="1400" b="0" i="1" smtClean="0">
+                              <a:latin typeface="Cambria Math" panose="02040503050406030204" pitchFamily="18" charset="0"/>
+                            </a:rPr>
+                            <m:t>𝑓</m:t>
+                          </m:r>
+                        </m:e>
+                        <m:sub>
+                          <m:r>
+                            <a:rPr lang="fr-FR" sz="1400" i="1">
+                              <a:latin typeface="Cambria Math" panose="02040503050406030204" pitchFamily="18" charset="0"/>
+                            </a:rPr>
+                            <m:t>𝑛</m:t>
+                          </m:r>
+                        </m:sub>
+                      </m:sSub>
+                      <m:r>
+                        <a:rPr lang="fr-FR" sz="1400" i="1">
+                          <a:latin typeface="Cambria Math" panose="02040503050406030204" pitchFamily="18" charset="0"/>
+                        </a:rPr>
+                        <m:t>= </m:t>
+                      </m:r>
+                      <m:f>
+                        <m:fPr>
+                          <m:ctrlPr>
+                            <a:rPr lang="fr-FR" sz="1400" i="1">
+                              <a:latin typeface="Cambria Math" panose="02040503050406030204" pitchFamily="18" charset="0"/>
+                            </a:rPr>
+                          </m:ctrlPr>
+                        </m:fPr>
+                        <m:num>
+                          <m:r>
+                            <a:rPr lang="fr-FR" sz="1400" b="0" i="1" smtClean="0">
+                              <a:latin typeface="Cambria Math" panose="02040503050406030204" pitchFamily="18" charset="0"/>
+                            </a:rPr>
+                            <m:t>𝑛</m:t>
+                          </m:r>
+                          <m:rad>
+                            <m:radPr>
+                              <m:degHide m:val="on"/>
+                              <m:ctrlPr>
+                                <a:rPr lang="fr-FR" sz="1400" b="0" i="1" smtClean="0">
+                                  <a:latin typeface="Cambria Math" panose="02040503050406030204" pitchFamily="18" charset="0"/>
+                                </a:rPr>
+                              </m:ctrlPr>
+                            </m:radPr>
+                            <m:deg/>
+                            <m:e>
+                              <m:r>
+                                <a:rPr lang="fr-FR" sz="1400" b="0" i="1" smtClean="0">
+                                  <a:latin typeface="Cambria Math" panose="02040503050406030204" pitchFamily="18" charset="0"/>
+                                </a:rPr>
+                                <m:t>𝑇</m:t>
+                              </m:r>
+                            </m:e>
+                          </m:rad>
+                        </m:num>
+                        <m:den>
+                          <m:r>
+                            <a:rPr lang="fr-FR" sz="1400" b="0" i="1" smtClean="0">
+                              <a:latin typeface="Cambria Math" panose="02040503050406030204" pitchFamily="18" charset="0"/>
+                            </a:rPr>
+                            <m:t>2</m:t>
+                          </m:r>
+                          <m:r>
+                            <a:rPr lang="fr-FR" sz="1400" b="0" i="1" smtClean="0">
+                              <a:latin typeface="Cambria Math" panose="02040503050406030204" pitchFamily="18" charset="0"/>
+                            </a:rPr>
+                            <m:t>𝐿</m:t>
+                          </m:r>
+                          <m:rad>
+                            <m:radPr>
+                              <m:degHide m:val="on"/>
+                              <m:ctrlPr>
+                                <a:rPr lang="fr-FR" sz="1400" b="0" i="1" smtClean="0">
+                                  <a:latin typeface="Cambria Math" panose="02040503050406030204" pitchFamily="18" charset="0"/>
+                                </a:rPr>
+                              </m:ctrlPr>
+                            </m:radPr>
+                            <m:deg/>
+                            <m:e>
+                              <m:r>
+                                <a:rPr lang="fr-FR" sz="1400" b="0" i="1" smtClean="0">
+                                  <a:latin typeface="Cambria Math" panose="02040503050406030204" pitchFamily="18" charset="0"/>
+                                  <a:ea typeface="Cambria Math" panose="02040503050406030204" pitchFamily="18" charset="0"/>
+                                </a:rPr>
+                                <m:t>𝜇</m:t>
+                              </m:r>
+                            </m:e>
+                          </m:rad>
+                        </m:den>
+                      </m:f>
+                    </m:oMath>
+                  </m:oMathPara>
+                </a14:m>
+                <a:endParaRPr lang="fr-FR" sz="1400" dirty="0">
+                  <a:solidFill>
+                    <a:schemeClr val="tx1"/>
+                  </a:solidFill>
+                </a:endParaRPr>
+              </a:p>
+            </p:txBody>
+          </p:sp>
+        </mc:Choice>
+        <mc:Fallback>
+          <p:sp>
+            <p:nvSpPr>
+              <p:cNvPr id="15" name="TextBox 14">
+                <a:extLst>
+                  <a:ext uri="{FF2B5EF4-FFF2-40B4-BE49-F238E27FC236}">
+                    <a16:creationId xmlns:a16="http://schemas.microsoft.com/office/drawing/2014/main" id="{4C8CF9B9-B67D-8875-0408-FEA4A312EA4B}"/>
+                  </a:ext>
+                </a:extLst>
+              </p:cNvPr>
+              <p:cNvSpPr txBox="1">
+                <a:spLocks noRot="1" noChangeAspect="1" noMove="1" noResize="1" noEditPoints="1" noAdjustHandles="1" noChangeArrowheads="1" noChangeShapeType="1" noTextEdit="1"/>
+              </p:cNvSpPr>
+              <p:nvPr/>
+            </p:nvSpPr>
+            <p:spPr>
+              <a:xfrm>
+                <a:off x="6096680" y="5432817"/>
+                <a:ext cx="2379468" cy="594522"/>
+              </a:xfrm>
+              <a:prstGeom prst="rect">
+                <a:avLst/>
+              </a:prstGeom>
+              <a:blipFill>
+                <a:blip r:embed="rId10"/>
+                <a:stretch>
+                  <a:fillRect/>
+                </a:stretch>
+              </a:blipFill>
+            </p:spPr>
+            <p:txBody>
+              <a:bodyPr/>
+              <a:lstStyle/>
+              <a:p>
+                <a:r>
+                  <a:rPr lang="fr-FR">
+                    <a:noFill/>
+                  </a:rPr>
+                  <a:t> </a:t>
+                </a:r>
+              </a:p>
+            </p:txBody>
+          </p:sp>
+        </mc:Fallback>
+      </mc:AlternateContent>
     </p:spTree>
     <p:extLst>
       <p:ext uri="{BB962C8B-B14F-4D97-AF65-F5344CB8AC3E}">
@@ -29386,7 +30557,7 @@
             <p:spPr>
               <a:xfrm>
                 <a:off x="1960158" y="4663973"/>
-                <a:ext cx="3686522" cy="722249"/>
+                <a:ext cx="4053802" cy="672172"/>
               </a:xfrm>
               <a:prstGeom prst="rect">
                 <a:avLst/>
@@ -29605,6 +30776,62 @@
                               </m:r>
                             </m:sub>
                           </m:sSub>
+                          <m:r>
+                            <a:rPr lang="fr-FR" b="0" i="1" smtClean="0">
+                              <a:solidFill>
+                                <a:srgbClr val="C00000"/>
+                              </a:solidFill>
+                              <a:latin typeface="Cambria Math" panose="02040503050406030204" pitchFamily="18" charset="0"/>
+                            </a:rPr>
+                            <m:t>2</m:t>
+                          </m:r>
+                          <m:r>
+                            <a:rPr lang="fr-FR" b="0" i="1" smtClean="0">
+                              <a:solidFill>
+                                <a:srgbClr val="C00000"/>
+                              </a:solidFill>
+                              <a:latin typeface="Cambria Math" panose="02040503050406030204" pitchFamily="18" charset="0"/>
+                              <a:ea typeface="Cambria Math" panose="02040503050406030204" pitchFamily="18" charset="0"/>
+                            </a:rPr>
+                            <m:t>𝜋</m:t>
+                          </m:r>
+                          <m:sSub>
+                            <m:sSubPr>
+                              <m:ctrlPr>
+                                <a:rPr lang="fr-FR" b="0" i="1" smtClean="0">
+                                  <a:solidFill>
+                                    <a:srgbClr val="C00000"/>
+                                  </a:solidFill>
+                                  <a:latin typeface="Cambria Math" panose="02040503050406030204" pitchFamily="18" charset="0"/>
+                                  <a:ea typeface="Cambria Math" panose="02040503050406030204" pitchFamily="18" charset="0"/>
+                                </a:rPr>
+                              </m:ctrlPr>
+                            </m:sSubPr>
+                            <m:e>
+                              <m:r>
+                                <a:rPr lang="fr-FR" b="0" i="1" smtClean="0">
+                                  <a:solidFill>
+                                    <a:srgbClr val="C00000"/>
+                                  </a:solidFill>
+                                  <a:latin typeface="Cambria Math" panose="02040503050406030204" pitchFamily="18" charset="0"/>
+                                  <a:ea typeface="Cambria Math" panose="02040503050406030204" pitchFamily="18" charset="0"/>
+                                </a:rPr>
+                                <m:t>𝑓</m:t>
+                              </m:r>
+                            </m:e>
+                            <m:sub>
+                              <m:r>
+                                <a:rPr lang="fr-FR" b="0" i="1" smtClean="0">
+                                  <a:solidFill>
+                                    <a:srgbClr val="C00000"/>
+                                  </a:solidFill>
+                                  <a:latin typeface="Cambria Math" panose="02040503050406030204" pitchFamily="18" charset="0"/>
+                                  <a:ea typeface="Cambria Math" panose="02040503050406030204" pitchFamily="18" charset="0"/>
+                                </a:rPr>
+                                <m:t>𝑛</m:t>
+                              </m:r>
+                            </m:sub>
+                          </m:sSub>
                           <m:func>
                             <m:funcPr>
                               <m:ctrlPr>
@@ -29640,103 +30867,62 @@
                                 </a:rPr>
                                 <m:t>(</m:t>
                               </m:r>
-                              <m:f>
-                                <m:fPr>
+                              <m:r>
+                                <a:rPr lang="fr-FR" b="0" i="1" smtClean="0">
+                                  <a:solidFill>
+                                    <a:srgbClr val="C00000"/>
+                                  </a:solidFill>
+                                  <a:latin typeface="Cambria Math" panose="02040503050406030204" pitchFamily="18" charset="0"/>
+                                </a:rPr>
+                                <m:t>2</m:t>
+                              </m:r>
+                              <m:r>
+                                <a:rPr lang="fr-FR" b="0" i="1" smtClean="0">
+                                  <a:solidFill>
+                                    <a:srgbClr val="C00000"/>
+                                  </a:solidFill>
+                                  <a:latin typeface="Cambria Math" panose="02040503050406030204" pitchFamily="18" charset="0"/>
+                                  <a:ea typeface="Cambria Math" panose="02040503050406030204" pitchFamily="18" charset="0"/>
+                                </a:rPr>
+                                <m:t>𝜋</m:t>
+                              </m:r>
+                              <m:sSub>
+                                <m:sSubPr>
                                   <m:ctrlPr>
-                                    <a:rPr lang="fr-FR" i="1">
-                                      <a:solidFill>
-                                        <a:srgbClr val="C00000"/>
-                                      </a:solidFill>
-                                      <a:latin typeface="Cambria Math" panose="02040503050406030204" pitchFamily="18" charset="0"/>
-                                    </a:rPr>
-                                  </m:ctrlPr>
-                                </m:fPr>
-                                <m:num>
-                                  <m:r>
-                                    <a:rPr lang="fr-FR" i="1">
-                                      <a:solidFill>
-                                        <a:srgbClr val="C00000"/>
-                                      </a:solidFill>
-                                      <a:latin typeface="Cambria Math" panose="02040503050406030204" pitchFamily="18" charset="0"/>
-                                    </a:rPr>
-                                    <m:t>𝑛</m:t>
-                                  </m:r>
-                                  <m:r>
-                                    <a:rPr lang="fr-FR" i="1">
+                                    <a:rPr lang="fr-FR" b="0" i="1" smtClean="0">
                                       <a:solidFill>
                                         <a:srgbClr val="C00000"/>
                                       </a:solidFill>
                                       <a:latin typeface="Cambria Math" panose="02040503050406030204" pitchFamily="18" charset="0"/>
                                       <a:ea typeface="Cambria Math" panose="02040503050406030204" pitchFamily="18" charset="0"/>
                                     </a:rPr>
-                                    <m:t>𝜋</m:t>
-                                  </m:r>
-                                  <m:rad>
-                                    <m:radPr>
-                                      <m:degHide m:val="on"/>
-                                      <m:ctrlPr>
-                                        <a:rPr lang="fr-FR" i="1">
-                                          <a:solidFill>
-                                            <a:srgbClr val="C00000"/>
-                                          </a:solidFill>
-                                          <a:latin typeface="Cambria Math" panose="02040503050406030204" pitchFamily="18" charset="0"/>
-                                          <a:ea typeface="Cambria Math" panose="02040503050406030204" pitchFamily="18" charset="0"/>
-                                        </a:rPr>
-                                      </m:ctrlPr>
-                                    </m:radPr>
-                                    <m:deg/>
-                                    <m:e>
-                                      <m:r>
-                                        <a:rPr lang="fr-FR" i="1">
-                                          <a:solidFill>
-                                            <a:srgbClr val="C00000"/>
-                                          </a:solidFill>
-                                          <a:latin typeface="Cambria Math" panose="02040503050406030204" pitchFamily="18" charset="0"/>
-                                          <a:ea typeface="Cambria Math" panose="02040503050406030204" pitchFamily="18" charset="0"/>
-                                        </a:rPr>
-                                        <m:t>𝑇</m:t>
-                                      </m:r>
-                                    </m:e>
-                                  </m:rad>
-                                </m:num>
-                                <m:den>
+                                  </m:ctrlPr>
+                                </m:sSubPr>
+                                <m:e>
                                   <m:r>
-                                    <a:rPr lang="fr-FR" i="1">
+                                    <a:rPr lang="fr-FR" b="0" i="1" smtClean="0">
                                       <a:solidFill>
                                         <a:srgbClr val="C00000"/>
                                       </a:solidFill>
                                       <a:latin typeface="Cambria Math" panose="02040503050406030204" pitchFamily="18" charset="0"/>
+                                      <a:ea typeface="Cambria Math" panose="02040503050406030204" pitchFamily="18" charset="0"/>
                                     </a:rPr>
-                                    <m:t>𝐿</m:t>
+                                    <m:t>𝑓</m:t>
                                   </m:r>
-                                  <m:rad>
-                                    <m:radPr>
-                                      <m:degHide m:val="on"/>
-                                      <m:ctrlPr>
-                                        <a:rPr lang="fr-FR" i="1">
-                                          <a:solidFill>
-                                            <a:srgbClr val="C00000"/>
-                                          </a:solidFill>
-                                          <a:latin typeface="Cambria Math" panose="02040503050406030204" pitchFamily="18" charset="0"/>
-                                        </a:rPr>
-                                      </m:ctrlPr>
-                                    </m:radPr>
-                                    <m:deg/>
-                                    <m:e>
-                                      <m:r>
-                                        <a:rPr lang="fr-FR" i="1">
-                                          <a:solidFill>
-                                            <a:srgbClr val="C00000"/>
-                                          </a:solidFill>
-                                          <a:latin typeface="Cambria Math" panose="02040503050406030204" pitchFamily="18" charset="0"/>
-                                          <a:ea typeface="Cambria Math" panose="02040503050406030204" pitchFamily="18" charset="0"/>
-                                        </a:rPr>
-                                        <m:t>𝜇</m:t>
-                                      </m:r>
-                                    </m:e>
-                                  </m:rad>
-                                </m:den>
-                              </m:f>
+                                </m:e>
+                                <m:sub>
+                                  <m:r>
+                                    <a:rPr lang="fr-FR" b="0" i="1" smtClean="0">
+                                      <a:solidFill>
+                                        <a:srgbClr val="C00000"/>
+                                      </a:solidFill>
+                                      <a:latin typeface="Cambria Math" panose="02040503050406030204" pitchFamily="18" charset="0"/>
+                                      <a:ea typeface="Cambria Math" panose="02040503050406030204" pitchFamily="18" charset="0"/>
+                                    </a:rPr>
+                                    <m:t>𝑛</m:t>
+                                  </m:r>
+                                </m:sub>
+                              </m:sSub>
                               <m:r>
                                 <a:rPr lang="fr-FR" i="1">
                                   <a:solidFill>
@@ -29789,7 +30975,7 @@
             <p:spPr>
               <a:xfrm>
                 <a:off x="1960158" y="4663973"/>
-                <a:ext cx="3686522" cy="722249"/>
+                <a:ext cx="4053802" cy="672172"/>
               </a:xfrm>
               <a:prstGeom prst="rect">
                 <a:avLst/>
@@ -29821,8 +31007,8 @@
           </p:sp>
         </mc:Fallback>
       </mc:AlternateContent>
-      <mc:AlternateContent xmlns:mc="http://schemas.openxmlformats.org/markup-compatibility/2006">
-        <mc:Choice xmlns:a14="http://schemas.microsoft.com/office/drawing/2010/main" Requires="a14">
+      <mc:AlternateContent xmlns:mc="http://schemas.openxmlformats.org/markup-compatibility/2006" xmlns:a14="http://schemas.microsoft.com/office/drawing/2010/main">
+        <mc:Choice Requires="a14">
           <p:sp>
             <p:nvSpPr>
               <p:cNvPr id="65" name="Rectangle 64">
@@ -30276,7 +31462,7 @@
             </p:txBody>
           </p:sp>
         </mc:Choice>
-        <mc:Fallback>
+        <mc:Fallback xmlns="">
           <p:sp>
             <p:nvSpPr>
               <p:cNvPr id="65" name="Rectangle 64">
@@ -31526,6 +32712,201 @@
           </p:sp>
         </mc:Fallback>
       </mc:AlternateContent>
+      <mc:AlternateContent xmlns:mc="http://schemas.openxmlformats.org/markup-compatibility/2006">
+        <mc:Choice xmlns:a14="http://schemas.microsoft.com/office/drawing/2010/main" Requires="a14">
+          <p:sp>
+            <p:nvSpPr>
+              <p:cNvPr id="18" name="TextBox 17">
+                <a:extLst>
+                  <a:ext uri="{FF2B5EF4-FFF2-40B4-BE49-F238E27FC236}">
+                    <a16:creationId xmlns:a16="http://schemas.microsoft.com/office/drawing/2014/main" id="{4CCCDB66-F23A-FC24-7FB0-02266FD8FB58}"/>
+                  </a:ext>
+                </a:extLst>
+              </p:cNvPr>
+              <p:cNvSpPr txBox="1"/>
+              <p:nvPr/>
+            </p:nvSpPr>
+            <p:spPr>
+              <a:xfrm>
+                <a:off x="6506502" y="5439262"/>
+                <a:ext cx="2379468" cy="594522"/>
+              </a:xfrm>
+              <a:prstGeom prst="rect">
+                <a:avLst/>
+              </a:prstGeom>
+              <a:noFill/>
+            </p:spPr>
+            <p:txBody>
+              <a:bodyPr wrap="square">
+                <a:spAutoFit/>
+              </a:bodyPr>
+              <a:lstStyle/>
+              <a:p>
+                <a:pPr/>
+                <a14:m>
+                  <m:oMathPara xmlns:m="http://schemas.openxmlformats.org/officeDocument/2006/math">
+                    <m:oMathParaPr>
+                      <m:jc m:val="centerGroup"/>
+                    </m:oMathParaPr>
+                    <m:oMath xmlns:m="http://schemas.openxmlformats.org/officeDocument/2006/math">
+                      <m:sSub>
+                        <m:sSubPr>
+                          <m:ctrlPr>
+                            <a:rPr lang="fr-FR" sz="1400" i="1" smtClean="0">
+                              <a:latin typeface="Cambria Math" panose="02040503050406030204" pitchFamily="18" charset="0"/>
+                            </a:rPr>
+                          </m:ctrlPr>
+                        </m:sSubPr>
+                        <m:e>
+                          <m:r>
+                            <a:rPr lang="fr-FR" sz="1400" b="0" i="1" smtClean="0">
+                              <a:latin typeface="Cambria Math" panose="02040503050406030204" pitchFamily="18" charset="0"/>
+                            </a:rPr>
+                            <m:t>𝑓</m:t>
+                          </m:r>
+                        </m:e>
+                        <m:sub>
+                          <m:r>
+                            <a:rPr lang="fr-FR" sz="1400" i="1">
+                              <a:latin typeface="Cambria Math" panose="02040503050406030204" pitchFamily="18" charset="0"/>
+                            </a:rPr>
+                            <m:t>𝑛</m:t>
+                          </m:r>
+                        </m:sub>
+                      </m:sSub>
+                      <m:r>
+                        <a:rPr lang="fr-FR" sz="1400" i="1">
+                          <a:latin typeface="Cambria Math" panose="02040503050406030204" pitchFamily="18" charset="0"/>
+                        </a:rPr>
+                        <m:t>= </m:t>
+                      </m:r>
+                      <m:f>
+                        <m:fPr>
+                          <m:ctrlPr>
+                            <a:rPr lang="fr-FR" sz="1400" i="1">
+                              <a:latin typeface="Cambria Math" panose="02040503050406030204" pitchFamily="18" charset="0"/>
+                            </a:rPr>
+                          </m:ctrlPr>
+                        </m:fPr>
+                        <m:num>
+                          <m:r>
+                            <a:rPr lang="fr-FR" sz="1400" b="0" i="1" smtClean="0">
+                              <a:latin typeface="Cambria Math" panose="02040503050406030204" pitchFamily="18" charset="0"/>
+                            </a:rPr>
+                            <m:t>𝑛</m:t>
+                          </m:r>
+                          <m:rad>
+                            <m:radPr>
+                              <m:degHide m:val="on"/>
+                              <m:ctrlPr>
+                                <a:rPr lang="fr-FR" sz="1400" b="0" i="1" smtClean="0">
+                                  <a:latin typeface="Cambria Math" panose="02040503050406030204" pitchFamily="18" charset="0"/>
+                                </a:rPr>
+                              </m:ctrlPr>
+                            </m:radPr>
+                            <m:deg/>
+                            <m:e>
+                              <m:r>
+                                <a:rPr lang="fr-FR" sz="1400" b="0" i="1" smtClean="0">
+                                  <a:latin typeface="Cambria Math" panose="02040503050406030204" pitchFamily="18" charset="0"/>
+                                </a:rPr>
+                                <m:t>𝑇</m:t>
+                              </m:r>
+                            </m:e>
+                          </m:rad>
+                        </m:num>
+                        <m:den>
+                          <m:r>
+                            <a:rPr lang="fr-FR" sz="1400" b="0" i="1" smtClean="0">
+                              <a:latin typeface="Cambria Math" panose="02040503050406030204" pitchFamily="18" charset="0"/>
+                            </a:rPr>
+                            <m:t>2</m:t>
+                          </m:r>
+                          <m:r>
+                            <a:rPr lang="fr-FR" sz="1400" b="0" i="1" smtClean="0">
+                              <a:latin typeface="Cambria Math" panose="02040503050406030204" pitchFamily="18" charset="0"/>
+                            </a:rPr>
+                            <m:t>𝐿</m:t>
+                          </m:r>
+                          <m:rad>
+                            <m:radPr>
+                              <m:degHide m:val="on"/>
+                              <m:ctrlPr>
+                                <a:rPr lang="fr-FR" sz="1400" b="0" i="1" smtClean="0">
+                                  <a:latin typeface="Cambria Math" panose="02040503050406030204" pitchFamily="18" charset="0"/>
+                                </a:rPr>
+                              </m:ctrlPr>
+                            </m:radPr>
+                            <m:deg/>
+                            <m:e>
+                              <m:r>
+                                <a:rPr lang="fr-FR" sz="1400" b="0" i="1" smtClean="0">
+                                  <a:latin typeface="Cambria Math" panose="02040503050406030204" pitchFamily="18" charset="0"/>
+                                  <a:ea typeface="Cambria Math" panose="02040503050406030204" pitchFamily="18" charset="0"/>
+                                </a:rPr>
+                                <m:t>𝜇</m:t>
+                              </m:r>
+                            </m:e>
+                          </m:rad>
+                        </m:den>
+                      </m:f>
+                    </m:oMath>
+                  </m:oMathPara>
+                </a14:m>
+                <a:endParaRPr lang="fr-FR" sz="1400" dirty="0">
+                  <a:solidFill>
+                    <a:schemeClr val="tx1"/>
+                  </a:solidFill>
+                </a:endParaRPr>
+              </a:p>
+            </p:txBody>
+          </p:sp>
+        </mc:Choice>
+        <mc:Fallback>
+          <p:sp>
+            <p:nvSpPr>
+              <p:cNvPr id="18" name="TextBox 17">
+                <a:extLst>
+                  <a:ext uri="{FF2B5EF4-FFF2-40B4-BE49-F238E27FC236}">
+                    <a16:creationId xmlns:a16="http://schemas.microsoft.com/office/drawing/2014/main" id="{4CCCDB66-F23A-FC24-7FB0-02266FD8FB58}"/>
+                  </a:ext>
+                </a:extLst>
+              </p:cNvPr>
+              <p:cNvSpPr txBox="1">
+                <a:spLocks noRot="1" noChangeAspect="1" noMove="1" noResize="1" noEditPoints="1" noAdjustHandles="1" noChangeArrowheads="1" noChangeShapeType="1" noTextEdit="1"/>
+              </p:cNvSpPr>
+              <p:nvPr/>
+            </p:nvSpPr>
+            <p:spPr>
+              <a:xfrm>
+                <a:off x="6506502" y="5439262"/>
+                <a:ext cx="2379468" cy="594522"/>
+              </a:xfrm>
+              <a:prstGeom prst="rect">
+                <a:avLst/>
+              </a:prstGeom>
+              <a:blipFill>
+                <a:blip r:embed="rId10"/>
+                <a:stretch>
+                  <a:fillRect/>
+                </a:stretch>
+              </a:blipFill>
+            </p:spPr>
+            <p:txBody>
+              <a:bodyPr/>
+              <a:lstStyle/>
+              <a:p>
+                <a:r>
+                  <a:rPr lang="fr-FR">
+                    <a:noFill/>
+                  </a:rPr>
+                  <a:t> </a:t>
+                </a:r>
+              </a:p>
+            </p:txBody>
+          </p:sp>
+        </mc:Fallback>
+      </mc:AlternateContent>
     </p:spTree>
     <p:extLst>
       <p:ext uri="{BB962C8B-B14F-4D97-AF65-F5344CB8AC3E}">
@@ -31975,10 +33356,10 @@
       </p:pic>
       <p:pic>
         <p:nvPicPr>
-          <p:cNvPr id="10" name="Picture 9">
+          <p:cNvPr id="22" name="Picture 21">
             <a:extLst>
               <a:ext uri="{FF2B5EF4-FFF2-40B4-BE49-F238E27FC236}">
-                <a16:creationId xmlns:a16="http://schemas.microsoft.com/office/drawing/2014/main" id="{1225CEFE-1823-A9E8-6FFA-C635ED1EEE30}"/>
+                <a16:creationId xmlns:a16="http://schemas.microsoft.com/office/drawing/2014/main" id="{6E0DB4A8-59EC-8216-2D89-B4DF0C640444}"/>
               </a:ext>
             </a:extLst>
           </p:cNvPr>
@@ -31995,165 +33376,20 @@
               </a:ext>
             </a:extLst>
           </a:blip>
-          <a:srcRect/>
-          <a:stretch/>
+          <a:stretch>
+            <a:fillRect/>
+          </a:stretch>
         </p:blipFill>
         <p:spPr>
           <a:xfrm>
-            <a:off x="345439" y="1808502"/>
-            <a:ext cx="5304374" cy="3978280"/>
+            <a:off x="1645914" y="1234435"/>
+            <a:ext cx="5852172" cy="4389129"/>
           </a:xfrm>
           <a:prstGeom prst="rect">
             <a:avLst/>
           </a:prstGeom>
         </p:spPr>
       </p:pic>
-      <p:pic>
-        <p:nvPicPr>
-          <p:cNvPr id="11" name="Picture 10">
-            <a:extLst>
-              <a:ext uri="{FF2B5EF4-FFF2-40B4-BE49-F238E27FC236}">
-                <a16:creationId xmlns:a16="http://schemas.microsoft.com/office/drawing/2014/main" id="{037CF42E-30D2-CB51-D06D-C0F791BD4FE4}"/>
-              </a:ext>
-            </a:extLst>
-          </p:cNvPr>
-          <p:cNvPicPr>
-            <a:picLocks/>
-          </p:cNvPicPr>
-          <p:nvPr/>
-        </p:nvPicPr>
-        <p:blipFill>
-          <a:blip r:embed="rId3">
-            <a:extLst>
-              <a:ext uri="{28A0092B-C50C-407E-A947-70E740481C1C}">
-                <a14:useLocalDpi xmlns:a14="http://schemas.microsoft.com/office/drawing/2010/main" val="0"/>
-              </a:ext>
-            </a:extLst>
-          </a:blip>
-          <a:srcRect l="73311" t="9302" r="15020" b="13950"/>
-          <a:stretch>
-            <a:fillRect/>
-          </a:stretch>
-        </p:blipFill>
-        <p:spPr>
-          <a:xfrm>
-            <a:off x="6170208" y="1998242"/>
-            <a:ext cx="2160000" cy="2160000"/>
-          </a:xfrm>
-          <a:prstGeom prst="rect">
-            <a:avLst/>
-          </a:prstGeom>
-          <a:solidFill>
-            <a:srgbClr val="000000">
-              <a:shade val="95000"/>
-            </a:srgbClr>
-          </a:solidFill>
-          <a:ln w="38100" cap="sq">
-            <a:solidFill>
-              <a:srgbClr val="000000"/>
-            </a:solidFill>
-            <a:miter lim="800000"/>
-          </a:ln>
-          <a:effectLst>
-            <a:outerShdw blurRad="254000" dist="190500" dir="2700000" sy="90000" algn="bl" rotWithShape="0">
-              <a:srgbClr val="000000">
-                <a:alpha val="40000"/>
-              </a:srgbClr>
-            </a:outerShdw>
-          </a:effectLst>
-        </p:spPr>
-      </p:pic>
-      <p:cxnSp>
-        <p:nvCxnSpPr>
-          <p:cNvPr id="14" name="Connector: Curved 13">
-            <a:extLst>
-              <a:ext uri="{FF2B5EF4-FFF2-40B4-BE49-F238E27FC236}">
-                <a16:creationId xmlns:a16="http://schemas.microsoft.com/office/drawing/2014/main" id="{A1A0EA52-31ED-CB98-879C-ABFDA7F4D923}"/>
-              </a:ext>
-            </a:extLst>
-          </p:cNvPr>
-          <p:cNvCxnSpPr>
-            <a:cxnSpLocks/>
-            <a:stCxn id="17" idx="2"/>
-            <a:endCxn id="11" idx="2"/>
-          </p:cNvCxnSpPr>
-          <p:nvPr/>
-        </p:nvCxnSpPr>
-        <p:spPr>
-          <a:xfrm rot="5400000" flipH="1" flipV="1">
-            <a:off x="5237086" y="3171128"/>
-            <a:ext cx="1026008" cy="3000235"/>
-          </a:xfrm>
-          <a:prstGeom prst="curvedConnector3">
-            <a:avLst>
-              <a:gd name="adj1" fmla="val -22281"/>
-            </a:avLst>
-          </a:prstGeom>
-          <a:ln>
-            <a:tailEnd type="triangle"/>
-          </a:ln>
-        </p:spPr>
-        <p:style>
-          <a:lnRef idx="3">
-            <a:schemeClr val="dk1"/>
-          </a:lnRef>
-          <a:fillRef idx="0">
-            <a:schemeClr val="dk1"/>
-          </a:fillRef>
-          <a:effectRef idx="2">
-            <a:schemeClr val="dk1"/>
-          </a:effectRef>
-          <a:fontRef idx="minor">
-            <a:schemeClr val="tx1"/>
-          </a:fontRef>
-        </p:style>
-      </p:cxnSp>
-      <p:sp>
-        <p:nvSpPr>
-          <p:cNvPr id="17" name="Rectangle 16">
-            <a:extLst>
-              <a:ext uri="{FF2B5EF4-FFF2-40B4-BE49-F238E27FC236}">
-                <a16:creationId xmlns:a16="http://schemas.microsoft.com/office/drawing/2014/main" id="{AB964F98-5918-5181-3402-647627634AF4}"/>
-              </a:ext>
-            </a:extLst>
-          </p:cNvPr>
-          <p:cNvSpPr/>
-          <p:nvPr/>
-        </p:nvSpPr>
-        <p:spPr>
-          <a:xfrm>
-            <a:off x="3927945" y="2242268"/>
-            <a:ext cx="644056" cy="2941982"/>
-          </a:xfrm>
-          <a:prstGeom prst="rect">
-            <a:avLst/>
-          </a:prstGeom>
-          <a:noFill/>
-          <a:ln w="38100"/>
-        </p:spPr>
-        <p:style>
-          <a:lnRef idx="2">
-            <a:schemeClr val="dk1"/>
-          </a:lnRef>
-          <a:fillRef idx="1">
-            <a:schemeClr val="lt1"/>
-          </a:fillRef>
-          <a:effectRef idx="0">
-            <a:schemeClr val="dk1"/>
-          </a:effectRef>
-          <a:fontRef idx="minor">
-            <a:schemeClr val="dk1"/>
-          </a:fontRef>
-        </p:style>
-        <p:txBody>
-          <a:bodyPr rtlCol="0" anchor="ctr"/>
-          <a:lstStyle/>
-          <a:p>
-            <a:pPr algn="ctr"/>
-            <a:endParaRPr lang="fr-FR"/>
-          </a:p>
-        </p:txBody>
-      </p:sp>
     </p:spTree>
     <p:extLst>
       <p:ext uri="{BB962C8B-B14F-4D97-AF65-F5344CB8AC3E}">
@@ -32502,41 +33738,6 @@
           </a:p>
         </p:txBody>
       </p:sp>
-      <p:pic>
-        <p:nvPicPr>
-          <p:cNvPr id="4" name="Picture 3">
-            <a:extLst>
-              <a:ext uri="{FF2B5EF4-FFF2-40B4-BE49-F238E27FC236}">
-                <a16:creationId xmlns:a16="http://schemas.microsoft.com/office/drawing/2014/main" id="{82275BA5-A143-E0A8-B1FD-EEAE550CA4F6}"/>
-              </a:ext>
-            </a:extLst>
-          </p:cNvPr>
-          <p:cNvPicPr>
-            <a:picLocks noChangeAspect="1"/>
-          </p:cNvPicPr>
-          <p:nvPr/>
-        </p:nvPicPr>
-        <p:blipFill>
-          <a:blip r:embed="rId2">
-            <a:extLst>
-              <a:ext uri="{28A0092B-C50C-407E-A947-70E740481C1C}">
-                <a14:useLocalDpi xmlns:a14="http://schemas.microsoft.com/office/drawing/2010/main" val="0"/>
-              </a:ext>
-            </a:extLst>
-          </a:blip>
-          <a:srcRect/>
-          <a:stretch/>
-        </p:blipFill>
-        <p:spPr>
-          <a:xfrm>
-            <a:off x="1256932" y="1325239"/>
-            <a:ext cx="6248472" cy="4686354"/>
-          </a:xfrm>
-          <a:prstGeom prst="rect">
-            <a:avLst/>
-          </a:prstGeom>
-        </p:spPr>
-      </p:pic>
       <p:sp>
         <p:nvSpPr>
           <p:cNvPr id="9" name="TextBox 8">
@@ -32604,7 +33805,7 @@
           <p:nvPr/>
         </p:nvPicPr>
         <p:blipFill>
-          <a:blip r:embed="rId3">
+          <a:blip r:embed="rId2">
             <a:extLst>
               <a:ext uri="{28A0092B-C50C-407E-A947-70E740481C1C}">
                 <a14:useLocalDpi xmlns:a14="http://schemas.microsoft.com/office/drawing/2010/main" val="0"/>
@@ -32634,6 +33835,42 @@
               </a14:hiddenFill>
             </a:ext>
           </a:extLst>
+        </p:spPr>
+      </p:pic>
+      <p:pic>
+        <p:nvPicPr>
+          <p:cNvPr id="10" name="Picture 9">
+            <a:extLst>
+              <a:ext uri="{FF2B5EF4-FFF2-40B4-BE49-F238E27FC236}">
+                <a16:creationId xmlns:a16="http://schemas.microsoft.com/office/drawing/2014/main" id="{333CB08E-CF23-B092-69E4-F392B405CABF}"/>
+              </a:ext>
+            </a:extLst>
+          </p:cNvPr>
+          <p:cNvPicPr>
+            <a:picLocks noChangeAspect="1"/>
+          </p:cNvPicPr>
+          <p:nvPr/>
+        </p:nvPicPr>
+        <p:blipFill>
+          <a:blip r:embed="rId3">
+            <a:extLst>
+              <a:ext uri="{28A0092B-C50C-407E-A947-70E740481C1C}">
+                <a14:useLocalDpi xmlns:a14="http://schemas.microsoft.com/office/drawing/2010/main" val="0"/>
+              </a:ext>
+            </a:extLst>
+          </a:blip>
+          <a:stretch>
+            <a:fillRect/>
+          </a:stretch>
+        </p:blipFill>
+        <p:spPr>
+          <a:xfrm>
+            <a:off x="1645914" y="1234435"/>
+            <a:ext cx="5852172" cy="4389129"/>
+          </a:xfrm>
+          <a:prstGeom prst="rect">
+            <a:avLst/>
+          </a:prstGeom>
         </p:spPr>
       </p:pic>
     </p:spTree>
@@ -33085,10 +34322,10 @@
       </p:pic>
       <p:pic>
         <p:nvPicPr>
-          <p:cNvPr id="22" name="Picture 21">
+          <p:cNvPr id="10" name="Picture 9">
             <a:extLst>
               <a:ext uri="{FF2B5EF4-FFF2-40B4-BE49-F238E27FC236}">
-                <a16:creationId xmlns:a16="http://schemas.microsoft.com/office/drawing/2014/main" id="{A3552811-F479-F545-99E7-467AF3F94452}"/>
+                <a16:creationId xmlns:a16="http://schemas.microsoft.com/office/drawing/2014/main" id="{F1299243-B977-7C36-755B-17DA59A1FB32}"/>
               </a:ext>
             </a:extLst>
           </p:cNvPr>
@@ -33105,132 +34342,31 @@
               </a:ext>
             </a:extLst>
           </a:blip>
-          <a:srcRect/>
-          <a:stretch/>
+          <a:stretch>
+            <a:fillRect/>
+          </a:stretch>
         </p:blipFill>
         <p:spPr>
           <a:xfrm>
-            <a:off x="5208104" y="3429000"/>
-            <a:ext cx="3836942" cy="2707640"/>
+            <a:off x="254435" y="1142995"/>
+            <a:ext cx="5486411" cy="4572009"/>
           </a:xfrm>
           <a:prstGeom prst="rect">
             <a:avLst/>
           </a:prstGeom>
         </p:spPr>
       </p:pic>
-      <p:grpSp>
-        <p:nvGrpSpPr>
-          <p:cNvPr id="30" name="Group 29">
+      <p:pic>
+        <p:nvPicPr>
+          <p:cNvPr id="15" name="Picture 14">
             <a:extLst>
               <a:ext uri="{FF2B5EF4-FFF2-40B4-BE49-F238E27FC236}">
-                <a16:creationId xmlns:a16="http://schemas.microsoft.com/office/drawing/2014/main" id="{4AD04D4C-C0B9-F7D9-83A7-93464B0334E0}"/>
-              </a:ext>
-            </a:extLst>
-          </p:cNvPr>
-          <p:cNvGrpSpPr/>
-          <p:nvPr/>
-        </p:nvGrpSpPr>
-        <p:grpSpPr>
-          <a:xfrm>
-            <a:off x="359725" y="1604733"/>
-            <a:ext cx="4815097" cy="3611322"/>
-            <a:chOff x="362607" y="1604733"/>
-            <a:chExt cx="5232047" cy="3978280"/>
-          </a:xfrm>
-        </p:grpSpPr>
-        <p:pic>
-          <p:nvPicPr>
-            <p:cNvPr id="4" name="Picture 3">
-              <a:extLst>
-                <a:ext uri="{FF2B5EF4-FFF2-40B4-BE49-F238E27FC236}">
-                  <a16:creationId xmlns:a16="http://schemas.microsoft.com/office/drawing/2014/main" id="{1445F650-9350-E19B-7B37-75B5646491AF}"/>
-                </a:ext>
-              </a:extLst>
-            </p:cNvPr>
-            <p:cNvPicPr>
-              <a:picLocks noChangeAspect="1"/>
-            </p:cNvPicPr>
-            <p:nvPr/>
-          </p:nvPicPr>
-          <p:blipFill>
-            <a:blip r:embed="rId4">
-              <a:extLst>
-                <a:ext uri="{28A0092B-C50C-407E-A947-70E740481C1C}">
-                  <a14:useLocalDpi xmlns:a14="http://schemas.microsoft.com/office/drawing/2010/main" val="0"/>
-                </a:ext>
-              </a:extLst>
-            </a:blip>
-            <a:srcRect/>
-            <a:stretch/>
-          </p:blipFill>
-          <p:spPr>
-            <a:xfrm>
-              <a:off x="362607" y="1604733"/>
-              <a:ext cx="5232047" cy="3978280"/>
-            </a:xfrm>
-            <a:prstGeom prst="rect">
-              <a:avLst/>
-            </a:prstGeom>
-          </p:spPr>
-        </p:pic>
-        <p:sp>
-          <p:nvSpPr>
-            <p:cNvPr id="17" name="Rectangle 16">
-              <a:extLst>
-                <a:ext uri="{FF2B5EF4-FFF2-40B4-BE49-F238E27FC236}">
-                  <a16:creationId xmlns:a16="http://schemas.microsoft.com/office/drawing/2014/main" id="{22EB83F2-A07C-395D-CB28-5FA0648AC1CD}"/>
-                </a:ext>
-              </a:extLst>
-            </p:cNvPr>
-            <p:cNvSpPr/>
-            <p:nvPr/>
-          </p:nvSpPr>
-          <p:spPr>
-            <a:xfrm>
-              <a:off x="3881120" y="2038499"/>
-              <a:ext cx="644056" cy="2941982"/>
-            </a:xfrm>
-            <a:prstGeom prst="rect">
-              <a:avLst/>
-            </a:prstGeom>
-            <a:noFill/>
-            <a:ln w="38100"/>
-          </p:spPr>
-          <p:style>
-            <a:lnRef idx="2">
-              <a:schemeClr val="dk1"/>
-            </a:lnRef>
-            <a:fillRef idx="1">
-              <a:schemeClr val="lt1"/>
-            </a:fillRef>
-            <a:effectRef idx="0">
-              <a:schemeClr val="dk1"/>
-            </a:effectRef>
-            <a:fontRef idx="minor">
-              <a:schemeClr val="dk1"/>
-            </a:fontRef>
-          </p:style>
-          <p:txBody>
-            <a:bodyPr rtlCol="0" anchor="ctr"/>
-            <a:lstStyle/>
-            <a:p>
-              <a:pPr algn="ctr"/>
-              <a:endParaRPr lang="fr-FR"/>
-            </a:p>
-          </p:txBody>
-        </p:sp>
-      </p:grpSp>
-      <p:pic>
-        <p:nvPicPr>
-          <p:cNvPr id="12" name="Picture 11">
-            <a:extLst>
-              <a:ext uri="{FF2B5EF4-FFF2-40B4-BE49-F238E27FC236}">
-                <a16:creationId xmlns:a16="http://schemas.microsoft.com/office/drawing/2014/main" id="{26509A36-2478-6FFB-2B7A-9D55399A2352}"/>
+                <a16:creationId xmlns:a16="http://schemas.microsoft.com/office/drawing/2014/main" id="{30646073-17FF-0865-43FA-5D4154632D24}"/>
               </a:ext>
             </a:extLst>
           </p:cNvPr>
           <p:cNvPicPr>
-            <a:picLocks/>
+            <a:picLocks noChangeAspect="1"/>
           </p:cNvPicPr>
           <p:nvPr/>
         </p:nvPicPr>
@@ -33242,24 +34378,19 @@
               </a:ext>
             </a:extLst>
           </a:blip>
-          <a:srcRect l="73754" t="7476" r="13866" b="12081"/>
+          <a:srcRect l="17622" t="9050" r="35733" b="15377"/>
           <a:stretch>
             <a:fillRect/>
           </a:stretch>
         </p:blipFill>
         <p:spPr>
           <a:xfrm>
-            <a:off x="5927528" y="1354022"/>
+            <a:off x="6484584" y="3915004"/>
             <a:ext cx="1800000" cy="1800000"/>
           </a:xfrm>
           <a:prstGeom prst="rect">
             <a:avLst/>
           </a:prstGeom>
-          <a:solidFill>
-            <a:srgbClr val="000000">
-              <a:shade val="95000"/>
-            </a:srgbClr>
-          </a:solidFill>
           <a:ln w="38100" cap="sq">
             <a:solidFill>
               <a:srgbClr val="000000"/>
@@ -33267,7 +34398,7 @@
             <a:miter lim="800000"/>
           </a:ln>
           <a:effectLst>
-            <a:outerShdw blurRad="254000" dist="190500" dir="2700000" sy="90000" algn="bl" rotWithShape="0">
+            <a:outerShdw blurRad="57150" dist="50800" dir="2700000" algn="tl" rotWithShape="0">
               <a:srgbClr val="000000">
                 <a:alpha val="40000"/>
               </a:srgbClr>
@@ -33275,43 +34406,191 @@
           </a:effectLst>
         </p:spPr>
       </p:pic>
+      <p:pic>
+        <p:nvPicPr>
+          <p:cNvPr id="18" name="Picture 17">
+            <a:extLst>
+              <a:ext uri="{FF2B5EF4-FFF2-40B4-BE49-F238E27FC236}">
+                <a16:creationId xmlns:a16="http://schemas.microsoft.com/office/drawing/2014/main" id="{B825D287-A038-C682-34C3-045C19CF5CF4}"/>
+              </a:ext>
+            </a:extLst>
+          </p:cNvPr>
+          <p:cNvPicPr>
+            <a:picLocks noChangeAspect="1"/>
+          </p:cNvPicPr>
+          <p:nvPr/>
+        </p:nvPicPr>
+        <p:blipFill>
+          <a:blip r:embed="rId5">
+            <a:extLst>
+              <a:ext uri="{28A0092B-C50C-407E-A947-70E740481C1C}">
+                <a14:useLocalDpi xmlns:a14="http://schemas.microsoft.com/office/drawing/2010/main" val="0"/>
+              </a:ext>
+            </a:extLst>
+          </a:blip>
+          <a:srcRect l="19116" t="10927" r="35870" b="15443"/>
+          <a:stretch>
+            <a:fillRect/>
+          </a:stretch>
+        </p:blipFill>
+        <p:spPr>
+          <a:xfrm>
+            <a:off x="6484584" y="1390254"/>
+            <a:ext cx="1800000" cy="1800000"/>
+          </a:xfrm>
+          <a:prstGeom prst="rect">
+            <a:avLst/>
+          </a:prstGeom>
+          <a:ln w="38100" cap="sq">
+            <a:solidFill>
+              <a:srgbClr val="000000"/>
+            </a:solidFill>
+            <a:miter lim="800000"/>
+          </a:ln>
+          <a:effectLst>
+            <a:outerShdw blurRad="57150" dist="50800" dir="2700000" algn="tl" rotWithShape="0">
+              <a:srgbClr val="000000">
+                <a:alpha val="40000"/>
+              </a:srgbClr>
+            </a:outerShdw>
+          </a:effectLst>
+        </p:spPr>
+      </p:pic>
+      <p:sp>
+        <p:nvSpPr>
+          <p:cNvPr id="23" name="TextBox 22">
+            <a:extLst>
+              <a:ext uri="{FF2B5EF4-FFF2-40B4-BE49-F238E27FC236}">
+                <a16:creationId xmlns:a16="http://schemas.microsoft.com/office/drawing/2014/main" id="{C57B18AB-7581-5E60-7446-58AA5F41399C}"/>
+              </a:ext>
+            </a:extLst>
+          </p:cNvPr>
+          <p:cNvSpPr txBox="1"/>
+          <p:nvPr/>
+        </p:nvSpPr>
+        <p:spPr>
+          <a:xfrm>
+            <a:off x="5285779" y="3383352"/>
+            <a:ext cx="1653872" cy="338554"/>
+          </a:xfrm>
+          <a:prstGeom prst="rect">
+            <a:avLst/>
+          </a:prstGeom>
+        </p:spPr>
+        <p:style>
+          <a:lnRef idx="2">
+            <a:schemeClr val="dk1"/>
+          </a:lnRef>
+          <a:fillRef idx="1">
+            <a:schemeClr val="lt1"/>
+          </a:fillRef>
+          <a:effectRef idx="0">
+            <a:schemeClr val="dk1"/>
+          </a:effectRef>
+          <a:fontRef idx="minor">
+            <a:schemeClr val="dk1"/>
+          </a:fontRef>
+        </p:style>
+        <p:txBody>
+          <a:bodyPr wrap="square" rtlCol="0">
+            <a:spAutoFit/>
+          </a:bodyPr>
+          <a:lstStyle/>
+          <a:p>
+            <a:pPr algn="ctr"/>
+            <a:r>
+              <a:rPr lang="fr-FR" sz="1600" dirty="0"/>
+              <a:t>Champ Parasite</a:t>
+            </a:r>
+          </a:p>
+        </p:txBody>
+      </p:sp>
       <p:cxnSp>
         <p:nvCxnSpPr>
-          <p:cNvPr id="14" name="Connector: Curved 13">
+          <p:cNvPr id="25" name="Connector: Curved 24">
             <a:extLst>
               <a:ext uri="{FF2B5EF4-FFF2-40B4-BE49-F238E27FC236}">
-                <a16:creationId xmlns:a16="http://schemas.microsoft.com/office/drawing/2014/main" id="{87E0B9A3-1292-B63F-DAAC-6489834BA374}"/>
+                <a16:creationId xmlns:a16="http://schemas.microsoft.com/office/drawing/2014/main" id="{5BB33DB7-7AA2-E232-24A7-9C4016C67B9F}"/>
               </a:ext>
             </a:extLst>
           </p:cNvPr>
           <p:cNvCxnSpPr>
             <a:cxnSpLocks/>
+            <a:stCxn id="18" idx="1"/>
+            <a:endCxn id="23" idx="0"/>
           </p:cNvCxnSpPr>
           <p:nvPr/>
         </p:nvCxnSpPr>
         <p:spPr>
-          <a:xfrm flipV="1">
-            <a:off x="4217668" y="1604733"/>
-            <a:ext cx="1682764" cy="595471"/>
+          <a:xfrm rot="10800000" flipV="1">
+            <a:off x="6112716" y="2290254"/>
+            <a:ext cx="371869" cy="1093098"/>
           </a:xfrm>
-          <a:prstGeom prst="curvedConnector3">
-            <a:avLst>
-              <a:gd name="adj1" fmla="val 50000"/>
-            </a:avLst>
+          <a:prstGeom prst="curvedConnector2">
+            <a:avLst/>
           </a:prstGeom>
-          <a:ln>
+          <a:ln w="57150">
+            <a:solidFill>
+              <a:schemeClr val="tx1"/>
+            </a:solidFill>
             <a:tailEnd type="triangle"/>
           </a:ln>
         </p:spPr>
         <p:style>
-          <a:lnRef idx="3">
-            <a:schemeClr val="dk1"/>
+          <a:lnRef idx="1">
+            <a:schemeClr val="accent1"/>
           </a:lnRef>
           <a:fillRef idx="0">
-            <a:schemeClr val="dk1"/>
+            <a:schemeClr val="accent1"/>
           </a:fillRef>
-          <a:effectRef idx="2">
-            <a:schemeClr val="dk1"/>
+          <a:effectRef idx="0">
+            <a:schemeClr val="accent1"/>
+          </a:effectRef>
+          <a:fontRef idx="minor">
+            <a:schemeClr val="tx1"/>
+          </a:fontRef>
+        </p:style>
+      </p:cxnSp>
+      <p:cxnSp>
+        <p:nvCxnSpPr>
+          <p:cNvPr id="26" name="Connector: Curved 25">
+            <a:extLst>
+              <a:ext uri="{FF2B5EF4-FFF2-40B4-BE49-F238E27FC236}">
+                <a16:creationId xmlns:a16="http://schemas.microsoft.com/office/drawing/2014/main" id="{A807D5F6-2DF7-0611-96D1-33B56DCB6524}"/>
+              </a:ext>
+            </a:extLst>
+          </p:cNvPr>
+          <p:cNvCxnSpPr>
+            <a:cxnSpLocks/>
+            <a:stCxn id="23" idx="2"/>
+            <a:endCxn id="15" idx="1"/>
+          </p:cNvCxnSpPr>
+          <p:nvPr/>
+        </p:nvCxnSpPr>
+        <p:spPr>
+          <a:xfrm rot="16200000" flipH="1">
+            <a:off x="5752100" y="4082520"/>
+            <a:ext cx="1093098" cy="371869"/>
+          </a:xfrm>
+          <a:prstGeom prst="curvedConnector2">
+            <a:avLst/>
+          </a:prstGeom>
+          <a:ln w="57150">
+            <a:solidFill>
+              <a:schemeClr val="tx1"/>
+            </a:solidFill>
+            <a:tailEnd type="triangle"/>
+          </a:ln>
+        </p:spPr>
+        <p:style>
+          <a:lnRef idx="1">
+            <a:schemeClr val="accent1"/>
+          </a:lnRef>
+          <a:fillRef idx="0">
+            <a:schemeClr val="accent1"/>
+          </a:fillRef>
+          <a:effectRef idx="0">
+            <a:schemeClr val="accent1"/>
           </a:effectRef>
           <a:fontRef idx="minor">
             <a:schemeClr val="tx1"/>
